--- a/NLP_Healthcare_Mykhailovskyi.pptx
+++ b/NLP_Healthcare_Mykhailovskyi.pptx
@@ -11,9 +11,9 @@
     <p:sldId id="259" r:id="rId5"/>
     <p:sldId id="260" r:id="rId6"/>
     <p:sldId id="261" r:id="rId7"/>
-    <p:sldId id="262" r:id="rId8"/>
-    <p:sldId id="263" r:id="rId9"/>
-    <p:sldId id="272" r:id="rId10"/>
+    <p:sldId id="263" r:id="rId8"/>
+    <p:sldId id="272" r:id="rId9"/>
+    <p:sldId id="262" r:id="rId10"/>
     <p:sldId id="264" r:id="rId11"/>
     <p:sldId id="273" r:id="rId12"/>
     <p:sldId id="265" r:id="rId13"/>
@@ -21,8 +21,7 @@
     <p:sldId id="266" r:id="rId15"/>
     <p:sldId id="267" r:id="rId16"/>
     <p:sldId id="268" r:id="rId17"/>
-    <p:sldId id="269" r:id="rId18"/>
-    <p:sldId id="271" r:id="rId19"/>
+    <p:sldId id="271" r:id="rId18"/>
   </p:sldIdLst>
   <p:sldSz cx="12188825" cy="6858000"/>
   <p:notesSz cx="6858000" cy="9144000"/>
@@ -8298,7 +8297,7 @@
         <p:spPr>
           <a:xfrm>
             <a:off x="457200" y="1170432"/>
-            <a:ext cx="5303520" cy="1785104"/>
+            <a:ext cx="5303520" cy="1131079"/>
           </a:xfrm>
           <a:prstGeom prst="rect">
             <a:avLst/>
@@ -8369,15 +8368,15 @@
                   <a:srgbClr val="1A1A1A"/>
                 </a:solidFill>
               </a:rPr>
-              <a:t>• </a:t>
-            </a:r>
-            <a:r>
-              <a:rPr sz="1250" dirty="0" err="1">
-                <a:solidFill>
-                  <a:srgbClr val="1A1A1A"/>
-                </a:solidFill>
-              </a:rPr>
-              <a:t>MedGemma</a:t>
+              <a:t>• BERT QA: 512-token left-side truncation may discard </a:t>
+            </a:r>
+            <a:r>
+              <a:rPr lang="en-US" sz="1250" dirty="0">
+                <a:solidFill>
+                  <a:srgbClr val="1A1A1A"/>
+                </a:solidFill>
+              </a:rPr>
+              <a:t>crucial parts </a:t>
             </a:r>
             <a:r>
               <a:rPr sz="1250" dirty="0">
@@ -8385,8 +8384,21 @@
                   <a:srgbClr val="1A1A1A"/>
                 </a:solidFill>
               </a:rPr>
-              <a:t> NER evaluated only qualitatively on 3 samples - no reliable F1</a:t>
-            </a:r>
+              <a:t>for long </a:t>
+            </a:r>
+            <a:r>
+              <a:rPr lang="en-US" sz="1250" dirty="0">
+                <a:solidFill>
+                  <a:srgbClr val="1A1A1A"/>
+                </a:solidFill>
+              </a:rPr>
+              <a:t>texts</a:t>
+            </a:r>
+            <a:endParaRPr sz="1250" dirty="0">
+              <a:solidFill>
+                <a:srgbClr val="1A1A1A"/>
+              </a:solidFill>
+            </a:endParaRPr>
           </a:p>
           <a:p>
             <a:pPr>
@@ -8400,53 +8412,23 @@
                   <a:srgbClr val="1A1A1A"/>
                 </a:solidFill>
               </a:rPr>
-              <a:t>• BERT QA: 512-token left-side truncation may discard entire clinical scenario for long vignettes</a:t>
-            </a:r>
-          </a:p>
-          <a:p>
-            <a:pPr>
-              <a:spcBef>
-                <a:spcPts val="300"/>
-              </a:spcBef>
-            </a:pPr>
+              <a:t>• </a:t>
+            </a:r>
+            <a:r>
+              <a:rPr sz="1250" dirty="0" err="1">
+                <a:solidFill>
+                  <a:srgbClr val="1A1A1A"/>
+                </a:solidFill>
+              </a:rPr>
+              <a:t>MedQA</a:t>
+            </a:r>
             <a:r>
               <a:rPr sz="1250" dirty="0">
                 <a:solidFill>
                   <a:srgbClr val="1A1A1A"/>
                 </a:solidFill>
               </a:rPr>
-              <a:t>• </a:t>
-            </a:r>
-            <a:r>
-              <a:rPr sz="1250" dirty="0" err="1">
-                <a:solidFill>
-                  <a:srgbClr val="1A1A1A"/>
-                </a:solidFill>
-              </a:rPr>
-              <a:t>MedQA</a:t>
-            </a:r>
-            <a:r>
-              <a:rPr sz="1250" dirty="0">
-                <a:solidFill>
-                  <a:srgbClr val="1A1A1A"/>
-                </a:solidFill>
-              </a:rPr>
-              <a:t> is US-centric (USMLE) - does not reflect global clinical practices</a:t>
-            </a:r>
-          </a:p>
-          <a:p>
-            <a:pPr>
-              <a:spcBef>
-                <a:spcPts val="300"/>
-              </a:spcBef>
-            </a:pPr>
-            <a:r>
-              <a:rPr sz="1250" dirty="0">
-                <a:solidFill>
-                  <a:srgbClr val="1A1A1A"/>
-                </a:solidFill>
-              </a:rPr>
-              <a:t>• MedMentions-MTI881-NER dataset has no stated license - legal status unclear</a:t>
+              <a:t> is US-centric (USMLE) - does not reflect global practices</a:t>
             </a:r>
           </a:p>
         </p:txBody>
@@ -8548,7 +8530,7 @@
         <p:spPr>
           <a:xfrm>
             <a:off x="566928" y="3346704"/>
-            <a:ext cx="5102352" cy="438912"/>
+            <a:ext cx="5102352" cy="261610"/>
           </a:xfrm>
           <a:prstGeom prst="rect">
             <a:avLst/>
@@ -8562,12 +8544,28 @@
           <a:lstStyle/>
           <a:p>
             <a:r>
-              <a:rPr sz="1100">
-                <a:solidFill>
-                  <a:srgbClr val="1A1A1A"/>
-                </a:solidFill>
-              </a:rPr>
-              <a:t>Data sparsity is the biggest structural barrier - even a perfect model cannot learn types it has never seen.ever seen.</a:t>
+              <a:rPr sz="1100" dirty="0">
+                <a:solidFill>
+                  <a:srgbClr val="1A1A1A"/>
+                </a:solidFill>
+              </a:rPr>
+              <a:t>Data is the biggest </a:t>
+            </a:r>
+            <a:r>
+              <a:rPr lang="en-US" sz="1100" dirty="0">
+                <a:solidFill>
+                  <a:srgbClr val="1A1A1A"/>
+                </a:solidFill>
+              </a:rPr>
+              <a:t>issue</a:t>
+            </a:r>
+            <a:r>
+              <a:rPr sz="1100" dirty="0">
+                <a:solidFill>
+                  <a:srgbClr val="1A1A1A"/>
+                </a:solidFill>
+              </a:rPr>
+              <a:t> - model cannot learn types it has never seen.</a:t>
             </a:r>
           </a:p>
         </p:txBody>
@@ -8614,7 +8612,7 @@
         <p:spPr>
           <a:xfrm>
             <a:off x="6217920" y="1170432"/>
-            <a:ext cx="5486400" cy="2011680"/>
+            <a:ext cx="5486400" cy="1208023"/>
           </a:xfrm>
           <a:prstGeom prst="rect">
             <a:avLst/>
@@ -8638,8 +8636,21 @@
                   <a:srgbClr val="1A1A1A"/>
                 </a:solidFill>
               </a:rPr>
-              <a:t>• Single GPU (A100) limits experiment scale and ablation studies</a:t>
-            </a:r>
+              <a:t>• Single GPU (A100) limits scal</a:t>
+            </a:r>
+            <a:r>
+              <a:rPr lang="en-US" sz="1250" dirty="0">
+                <a:solidFill>
+                  <a:srgbClr val="1A1A1A"/>
+                </a:solidFill>
+              </a:rPr>
+              <a:t>ing</a:t>
+            </a:r>
+            <a:endParaRPr sz="1250" dirty="0">
+              <a:solidFill>
+                <a:srgbClr val="1A1A1A"/>
+              </a:solidFill>
+            </a:endParaRPr>
           </a:p>
           <a:p>
             <a:pPr>
@@ -8653,8 +8664,53 @@
                   <a:srgbClr val="1A1A1A"/>
                 </a:solidFill>
               </a:rPr>
-              <a:t>• No hyperparameter search - all settings are single-run choices</a:t>
-            </a:r>
+              <a:t>• No </a:t>
+            </a:r>
+            <a:r>
+              <a:rPr lang="en-US" sz="1250" dirty="0">
+                <a:solidFill>
+                  <a:srgbClr val="1A1A1A"/>
+                </a:solidFill>
+              </a:rPr>
+              <a:t>automatic </a:t>
+            </a:r>
+            <a:r>
+              <a:rPr sz="1250" dirty="0">
+                <a:solidFill>
+                  <a:srgbClr val="1A1A1A"/>
+                </a:solidFill>
+              </a:rPr>
+              <a:t>hyperparameter</a:t>
+            </a:r>
+            <a:r>
+              <a:rPr lang="en-US" sz="1250" dirty="0">
+                <a:solidFill>
+                  <a:srgbClr val="1A1A1A"/>
+                </a:solidFill>
+              </a:rPr>
+              <a:t>s</a:t>
+            </a:r>
+            <a:r>
+              <a:rPr sz="1250" dirty="0">
+                <a:solidFill>
+                  <a:srgbClr val="1A1A1A"/>
+                </a:solidFill>
+              </a:rPr>
+              <a:t> </a:t>
+            </a:r>
+            <a:r>
+              <a:rPr lang="en-US" sz="1250" dirty="0">
+                <a:solidFill>
+                  <a:srgbClr val="1A1A1A"/>
+                </a:solidFill>
+              </a:rPr>
+              <a:t>search</a:t>
+            </a:r>
+            <a:endParaRPr sz="1250" dirty="0">
+              <a:solidFill>
+                <a:srgbClr val="1A1A1A"/>
+              </a:solidFill>
+            </a:endParaRPr>
           </a:p>
           <a:p>
             <a:pPr>
@@ -8699,8 +8755,37 @@
                   <a:srgbClr val="1A1A1A"/>
                 </a:solidFill>
               </a:rPr>
-              <a:t>• No confidence intervals or multi-seed averaging</a:t>
-            </a:r>
+              <a:t>• </a:t>
+            </a:r>
+            <a:r>
+              <a:rPr lang="en-US" sz="1250" dirty="0">
+                <a:solidFill>
+                  <a:srgbClr val="1A1A1A"/>
+                </a:solidFill>
+              </a:rPr>
+              <a:t>No </a:t>
+            </a:r>
+            <a:r>
+              <a:rPr lang="en-US" sz="1250" dirty="0" err="1">
+                <a:solidFill>
+                  <a:srgbClr val="1A1A1A"/>
+                </a:solidFill>
+              </a:rPr>
+              <a:t>multiseed</a:t>
+            </a:r>
+            <a:r>
+              <a:rPr lang="en-US" sz="1250" dirty="0">
+                <a:solidFill>
+                  <a:srgbClr val="1A1A1A"/>
+                </a:solidFill>
+              </a:rPr>
+              <a:t> averaging for results</a:t>
+            </a:r>
+            <a:endParaRPr sz="1250" dirty="0">
+              <a:solidFill>
+                <a:srgbClr val="1A1A1A"/>
+              </a:solidFill>
+            </a:endParaRPr>
           </a:p>
           <a:p>
             <a:pPr>
@@ -8714,7 +8799,7 @@
                   <a:srgbClr val="1A1A1A"/>
                 </a:solidFill>
               </a:rPr>
-              <a:t>• Catastrophic forgetting risk from fine-tuning </a:t>
+              <a:t>• </a:t>
             </a:r>
             <a:r>
               <a:rPr sz="1250" dirty="0" err="1">
@@ -8722,35 +8807,23 @@
                   <a:srgbClr val="1A1A1A"/>
                 </a:solidFill>
               </a:rPr>
-              <a:t>MedGemma</a:t>
-            </a:r>
-            <a:endParaRPr sz="1250" dirty="0">
-              <a:solidFill>
-                <a:srgbClr val="1A1A1A"/>
-              </a:solidFill>
-            </a:endParaRPr>
-          </a:p>
-          <a:p>
-            <a:pPr>
-              <a:spcBef>
-                <a:spcPts val="300"/>
-              </a:spcBef>
-            </a:pPr>
+              <a:t>BioClinicalBERT</a:t>
+            </a:r>
             <a:r>
               <a:rPr sz="1250" dirty="0">
                 <a:solidFill>
                   <a:srgbClr val="1A1A1A"/>
                 </a:solidFill>
               </a:rPr>
-              <a:t>• </a:t>
-            </a:r>
-            <a:r>
-              <a:rPr sz="1250" dirty="0" err="1">
-                <a:solidFill>
-                  <a:srgbClr val="1A1A1A"/>
-                </a:solidFill>
-              </a:rPr>
-              <a:t>BioClinicalBERT</a:t>
+              <a:t> </a:t>
+            </a:r>
+            <a:r>
+              <a:rPr lang="en-US" sz="1250" dirty="0">
+                <a:solidFill>
+                  <a:srgbClr val="1A1A1A"/>
+                </a:solidFill>
+              </a:rPr>
+              <a:t>fine-tuned </a:t>
             </a:r>
             <a:r>
               <a:rPr sz="1250" dirty="0">
@@ -8758,7 +8831,7 @@
                   <a:srgbClr val="1A1A1A"/>
                 </a:solidFill>
               </a:rPr>
-              <a:t> trained on MIMIC-III only - US ICU bias</a:t>
+              <a:t>on MIMIC-III only - US bias</a:t>
             </a:r>
           </a:p>
         </p:txBody>
@@ -8860,7 +8933,7 @@
         <p:spPr>
           <a:xfrm>
             <a:off x="6327648" y="3346704"/>
-            <a:ext cx="5285232" cy="438912"/>
+            <a:ext cx="5285232" cy="430887"/>
           </a:xfrm>
           <a:prstGeom prst="rect">
             <a:avLst/>
@@ -8874,134 +8947,26 @@
           <a:lstStyle/>
           <a:p>
             <a:r>
-              <a:rPr sz="1100">
-                <a:solidFill>
-                  <a:srgbClr val="1A1A1A"/>
-                </a:solidFill>
-              </a:rPr>
-              <a:t>Fine-tuning a strong pre-trained medical model requires more care than fine-tuning a general model - the model already 'knows medicine'.</a:t>
-            </a:r>
-          </a:p>
-        </p:txBody>
-      </p:sp>
-      <p:sp>
-        <p:nvSpPr>
-          <p:cNvPr id="19" name="Rectangle 18"/>
-          <p:cNvSpPr/>
-          <p:nvPr/>
-        </p:nvSpPr>
-        <p:spPr>
-          <a:xfrm>
-            <a:off x="457200" y="4005072"/>
-            <a:ext cx="41148" cy="548640"/>
-          </a:xfrm>
-          <a:prstGeom prst="rect">
-            <a:avLst/>
-          </a:prstGeom>
-          <a:solidFill>
-            <a:srgbClr val="1A56A8"/>
-          </a:solidFill>
-          <a:ln>
-            <a:noFill/>
-          </a:ln>
-        </p:spPr>
-        <p:style>
-          <a:lnRef idx="1">
-            <a:schemeClr val="accent1"/>
-          </a:lnRef>
-          <a:fillRef idx="3">
-            <a:schemeClr val="accent1"/>
-          </a:fillRef>
-          <a:effectRef idx="2">
-            <a:schemeClr val="accent1"/>
-          </a:effectRef>
-          <a:fontRef idx="minor">
-            <a:schemeClr val="lt1"/>
-          </a:fontRef>
-        </p:style>
-        <p:txBody>
-          <a:bodyPr rtlCol="0" anchor="ctr"/>
-          <a:lstStyle/>
-          <a:p>
-            <a:pPr algn="ctr"/>
-            <a:endParaRPr/>
-          </a:p>
-        </p:txBody>
-      </p:sp>
-      <p:sp>
-        <p:nvSpPr>
-          <p:cNvPr id="20" name="Rectangle 19"/>
-          <p:cNvSpPr/>
-          <p:nvPr/>
-        </p:nvSpPr>
-        <p:spPr>
-          <a:xfrm>
-            <a:off x="498348" y="4005072"/>
-            <a:ext cx="11233404" cy="548640"/>
-          </a:xfrm>
-          <a:prstGeom prst="rect">
-            <a:avLst/>
-          </a:prstGeom>
-          <a:solidFill>
-            <a:srgbClr val="E8F0FB"/>
-          </a:solidFill>
-          <a:ln>
-            <a:noFill/>
-          </a:ln>
-        </p:spPr>
-        <p:style>
-          <a:lnRef idx="1">
-            <a:schemeClr val="accent1"/>
-          </a:lnRef>
-          <a:fillRef idx="3">
-            <a:schemeClr val="accent1"/>
-          </a:fillRef>
-          <a:effectRef idx="2">
-            <a:schemeClr val="accent1"/>
-          </a:effectRef>
-          <a:fontRef idx="minor">
-            <a:schemeClr val="lt1"/>
-          </a:fontRef>
-        </p:style>
-        <p:txBody>
-          <a:bodyPr rtlCol="0" anchor="ctr"/>
-          <a:lstStyle/>
-          <a:p>
-            <a:pPr algn="ctr"/>
-            <a:endParaRPr/>
-          </a:p>
-        </p:txBody>
-      </p:sp>
-      <p:sp>
-        <p:nvSpPr>
-          <p:cNvPr id="21" name="TextBox 20"/>
-          <p:cNvSpPr txBox="1"/>
-          <p:nvPr/>
-        </p:nvSpPr>
-        <p:spPr>
-          <a:xfrm>
-            <a:off x="566928" y="4078224"/>
-            <a:ext cx="11073384" cy="438912"/>
-          </a:xfrm>
-          <a:prstGeom prst="rect">
-            <a:avLst/>
-          </a:prstGeom>
-          <a:noFill/>
-        </p:spPr>
-        <p:txBody>
-          <a:bodyPr wrap="square">
-            <a:spAutoFit/>
-          </a:bodyPr>
-          <a:lstStyle/>
-          <a:p>
-            <a:r>
-              <a:rPr sz="1200">
-                <a:solidFill>
-                  <a:srgbClr val="1A1A1A"/>
-                </a:solidFill>
-              </a:rPr>
-              <a:t>Summary: results are directionally valid but not publication-quality. The comparative conclusion (encoders for NER, decoders for QA) is robust.</a:t>
-            </a:r>
+              <a:rPr sz="1100" dirty="0">
+                <a:solidFill>
+                  <a:srgbClr val="1A1A1A"/>
+                </a:solidFill>
+              </a:rPr>
+              <a:t>Fine-tuning strong pre-trained medical model </a:t>
+            </a:r>
+            <a:r>
+              <a:rPr lang="en-US" sz="1100" dirty="0">
+                <a:solidFill>
+                  <a:srgbClr val="1A1A1A"/>
+                </a:solidFill>
+              </a:rPr>
+              <a:t>is relatively more straightforward and yields better results.</a:t>
+            </a:r>
+            <a:endParaRPr sz="1100" dirty="0">
+              <a:solidFill>
+                <a:srgbClr val="1A1A1A"/>
+              </a:solidFill>
+            </a:endParaRPr>
           </a:p>
         </p:txBody>
       </p:sp>
@@ -9039,7 +9004,51 @@
         <p:spPr>
           <a:xfrm>
             <a:off x="0" y="0"/>
-            <a:ext cx="12188952" cy="64008"/>
+            <a:ext cx="12188952" cy="6858000"/>
+          </a:xfrm>
+          <a:prstGeom prst="rect">
+            <a:avLst/>
+          </a:prstGeom>
+          <a:solidFill>
+            <a:srgbClr val="F0F6FF"/>
+          </a:solidFill>
+          <a:ln>
+            <a:noFill/>
+          </a:ln>
+        </p:spPr>
+        <p:style>
+          <a:lnRef idx="1">
+            <a:schemeClr val="accent1"/>
+          </a:lnRef>
+          <a:fillRef idx="3">
+            <a:schemeClr val="accent1"/>
+          </a:fillRef>
+          <a:effectRef idx="2">
+            <a:schemeClr val="accent1"/>
+          </a:effectRef>
+          <a:fontRef idx="minor">
+            <a:schemeClr val="lt1"/>
+          </a:fontRef>
+        </p:style>
+        <p:txBody>
+          <a:bodyPr rtlCol="0" anchor="ctr"/>
+          <a:lstStyle/>
+          <a:p>
+            <a:pPr algn="ctr"/>
+            <a:endParaRPr/>
+          </a:p>
+        </p:txBody>
+      </p:sp>
+      <p:sp>
+        <p:nvSpPr>
+          <p:cNvPr id="3" name="Rectangle 2"/>
+          <p:cNvSpPr/>
+          <p:nvPr/>
+        </p:nvSpPr>
+        <p:spPr>
+          <a:xfrm>
+            <a:off x="0" y="0"/>
+            <a:ext cx="12188952" cy="91440"/>
           </a:xfrm>
           <a:prstGeom prst="rect">
             <a:avLst/>
@@ -9076,14 +9085,14 @@
       </p:sp>
       <p:sp>
         <p:nvSpPr>
-          <p:cNvPr id="3" name="TextBox 2"/>
+          <p:cNvPr id="4" name="TextBox 3"/>
           <p:cNvSpPr txBox="1"/>
           <p:nvPr/>
         </p:nvSpPr>
         <p:spPr>
           <a:xfrm>
-            <a:off x="548640" y="164592"/>
-            <a:ext cx="11091672" cy="502920"/>
+            <a:off x="731520" y="502920"/>
+            <a:ext cx="10725912" cy="292608"/>
           </a:xfrm>
           <a:prstGeom prst="rect">
             <a:avLst/>
@@ -9091,32 +9100,145 @@
           <a:noFill/>
         </p:spPr>
         <p:txBody>
-          <a:bodyPr wrap="none">
+          <a:bodyPr wrap="square">
             <a:spAutoFit/>
           </a:bodyPr>
           <a:lstStyle/>
           <a:p>
-            <a:r>
-              <a:rPr sz="2200" b="1">
+            <a:pPr algn="l"/>
+            <a:r>
+              <a:rPr sz="1100" b="0">
+                <a:solidFill>
+                  <a:srgbClr val="666666"/>
+                </a:solidFill>
+              </a:rPr>
+              <a:t>CSCI E-222 · Foundations of Large Language Models · Final Project</a:t>
+            </a:r>
+          </a:p>
+        </p:txBody>
+      </p:sp>
+      <p:sp>
+        <p:nvSpPr>
+          <p:cNvPr id="5" name="TextBox 4"/>
+          <p:cNvSpPr txBox="1"/>
+          <p:nvPr/>
+        </p:nvSpPr>
+        <p:spPr>
+          <a:xfrm>
+            <a:off x="731520" y="1005840"/>
+            <a:ext cx="10725912" cy="731520"/>
+          </a:xfrm>
+          <a:prstGeom prst="rect">
+            <a:avLst/>
+          </a:prstGeom>
+          <a:noFill/>
+        </p:spPr>
+        <p:txBody>
+          <a:bodyPr wrap="square">
+            <a:spAutoFit/>
+          </a:bodyPr>
+          <a:lstStyle/>
+          <a:p>
+            <a:pPr algn="l"/>
+            <a:r>
+              <a:rPr sz="3600" b="1">
                 <a:solidFill>
                   <a:srgbClr val="1A56A8"/>
                 </a:solidFill>
               </a:rPr>
-              <a:t>Future Work</a:t>
-            </a:r>
-          </a:p>
-        </p:txBody>
-      </p:sp>
-      <p:sp>
-        <p:nvSpPr>
-          <p:cNvPr id="4" name="Rectangle 3"/>
+              <a:t>Thank You</a:t>
+            </a:r>
+          </a:p>
+        </p:txBody>
+      </p:sp>
+      <p:sp>
+        <p:nvSpPr>
+          <p:cNvPr id="6" name="TextBox 5"/>
+          <p:cNvSpPr txBox="1"/>
+          <p:nvPr/>
+        </p:nvSpPr>
+        <p:spPr>
+          <a:xfrm>
+            <a:off x="731520" y="1783080"/>
+            <a:ext cx="10725912" cy="365760"/>
+          </a:xfrm>
+          <a:prstGeom prst="rect">
+            <a:avLst/>
+          </a:prstGeom>
+          <a:noFill/>
+        </p:spPr>
+        <p:txBody>
+          <a:bodyPr wrap="square">
+            <a:spAutoFit/>
+          </a:bodyPr>
+          <a:lstStyle/>
+          <a:p>
+            <a:pPr algn="l"/>
+            <a:r>
+              <a:rPr sz="1600" b="0">
+                <a:solidFill>
+                  <a:srgbClr val="666666"/>
+                </a:solidFill>
+              </a:rPr>
+              <a:t>NLP for Healthcare: Medical Text Analysis</a:t>
+            </a:r>
+          </a:p>
+        </p:txBody>
+      </p:sp>
+      <p:sp>
+        <p:nvSpPr>
+          <p:cNvPr id="7" name="Rectangle 6"/>
           <p:cNvSpPr/>
           <p:nvPr/>
         </p:nvSpPr>
         <p:spPr>
           <a:xfrm>
-            <a:off x="548640" y="667512"/>
-            <a:ext cx="11091672" cy="22860"/>
+            <a:off x="731520" y="2423160"/>
+            <a:ext cx="41148" cy="804672"/>
+          </a:xfrm>
+          <a:prstGeom prst="rect">
+            <a:avLst/>
+          </a:prstGeom>
+          <a:solidFill>
+            <a:srgbClr val="1A56A8"/>
+          </a:solidFill>
+          <a:ln>
+            <a:noFill/>
+          </a:ln>
+        </p:spPr>
+        <p:style>
+          <a:lnRef idx="1">
+            <a:schemeClr val="accent1"/>
+          </a:lnRef>
+          <a:fillRef idx="3">
+            <a:schemeClr val="accent1"/>
+          </a:fillRef>
+          <a:effectRef idx="2">
+            <a:schemeClr val="accent1"/>
+          </a:effectRef>
+          <a:fontRef idx="minor">
+            <a:schemeClr val="lt1"/>
+          </a:fontRef>
+        </p:style>
+        <p:txBody>
+          <a:bodyPr rtlCol="0" anchor="ctr"/>
+          <a:lstStyle/>
+          <a:p>
+            <a:pPr algn="ctr"/>
+            <a:endParaRPr/>
+          </a:p>
+        </p:txBody>
+      </p:sp>
+      <p:sp>
+        <p:nvSpPr>
+          <p:cNvPr id="8" name="Rectangle 7"/>
+          <p:cNvSpPr/>
+          <p:nvPr/>
+        </p:nvSpPr>
+        <p:spPr>
+          <a:xfrm>
+            <a:off x="772668" y="2423160"/>
+            <a:ext cx="4988052" cy="804672"/>
           </a:xfrm>
           <a:prstGeom prst="rect">
             <a:avLst/>
@@ -9153,102 +9275,14 @@
       </p:sp>
       <p:sp>
         <p:nvSpPr>
-          <p:cNvPr id="5" name="Rectangle 4"/>
-          <p:cNvSpPr/>
-          <p:nvPr/>
-        </p:nvSpPr>
-        <p:spPr>
-          <a:xfrm>
-            <a:off x="0" y="6565392"/>
-            <a:ext cx="12188952" cy="292608"/>
-          </a:xfrm>
-          <a:prstGeom prst="rect">
-            <a:avLst/>
-          </a:prstGeom>
-          <a:solidFill>
-            <a:srgbClr val="F5F8FE"/>
-          </a:solidFill>
-          <a:ln>
-            <a:noFill/>
-          </a:ln>
-        </p:spPr>
-        <p:style>
-          <a:lnRef idx="1">
-            <a:schemeClr val="accent1"/>
-          </a:lnRef>
-          <a:fillRef idx="3">
-            <a:schemeClr val="accent1"/>
-          </a:fillRef>
-          <a:effectRef idx="2">
-            <a:schemeClr val="accent1"/>
-          </a:effectRef>
-          <a:fontRef idx="minor">
-            <a:schemeClr val="lt1"/>
-          </a:fontRef>
-        </p:style>
-        <p:txBody>
-          <a:bodyPr rtlCol="0" anchor="ctr"/>
-          <a:lstStyle/>
-          <a:p>
-            <a:pPr algn="ctr"/>
-            <a:endParaRPr/>
-          </a:p>
-        </p:txBody>
-      </p:sp>
-      <p:sp>
-        <p:nvSpPr>
-          <p:cNvPr id="6" name="Rectangle 5"/>
-          <p:cNvSpPr/>
-          <p:nvPr/>
-        </p:nvSpPr>
-        <p:spPr>
-          <a:xfrm>
-            <a:off x="0" y="6556248"/>
-            <a:ext cx="12188952" cy="9144"/>
-          </a:xfrm>
-          <a:prstGeom prst="rect">
-            <a:avLst/>
-          </a:prstGeom>
-          <a:solidFill>
-            <a:srgbClr val="D0E2F8"/>
-          </a:solidFill>
-          <a:ln>
-            <a:noFill/>
-          </a:ln>
-        </p:spPr>
-        <p:style>
-          <a:lnRef idx="1">
-            <a:schemeClr val="accent1"/>
-          </a:lnRef>
-          <a:fillRef idx="3">
-            <a:schemeClr val="accent1"/>
-          </a:fillRef>
-          <a:effectRef idx="2">
-            <a:schemeClr val="accent1"/>
-          </a:effectRef>
-          <a:fontRef idx="minor">
-            <a:schemeClr val="lt1"/>
-          </a:fontRef>
-        </p:style>
-        <p:txBody>
-          <a:bodyPr rtlCol="0" anchor="ctr"/>
-          <a:lstStyle/>
-          <a:p>
-            <a:pPr algn="ctr"/>
-            <a:endParaRPr/>
-          </a:p>
-        </p:txBody>
-      </p:sp>
-      <p:sp>
-        <p:nvSpPr>
-          <p:cNvPr id="7" name="TextBox 6"/>
+          <p:cNvPr id="9" name="TextBox 8"/>
           <p:cNvSpPr txBox="1"/>
           <p:nvPr/>
         </p:nvSpPr>
         <p:spPr>
           <a:xfrm>
-            <a:off x="365760" y="6583680"/>
-            <a:ext cx="8229600" cy="228600"/>
+            <a:off x="841248" y="2496312"/>
+            <a:ext cx="4828032" cy="646331"/>
           </a:xfrm>
           <a:prstGeom prst="rect">
             <a:avLst/>
@@ -9261,936 +9295,77 @@
           </a:bodyPr>
           <a:lstStyle/>
           <a:p>
-            <a:pPr algn="l"/>
-            <a:r>
-              <a:rPr sz="900" b="0">
-                <a:solidFill>
-                  <a:srgbClr val="666666"/>
-                </a:solidFill>
-              </a:rPr>
-              <a:t>CSCI E-222 · NLP for Healthcare · O. Mykhailovskyi</a:t>
-            </a:r>
-          </a:p>
-        </p:txBody>
-      </p:sp>
-      <p:sp>
-        <p:nvSpPr>
-          <p:cNvPr id="8" name="TextBox 7"/>
-          <p:cNvSpPr txBox="1"/>
-          <p:nvPr/>
-        </p:nvSpPr>
-        <p:spPr>
-          <a:xfrm>
-            <a:off x="11091672" y="6583680"/>
-            <a:ext cx="914400" cy="228600"/>
-          </a:xfrm>
-          <a:prstGeom prst="rect">
-            <a:avLst/>
-          </a:prstGeom>
-          <a:noFill/>
-        </p:spPr>
-        <p:txBody>
-          <a:bodyPr wrap="square">
-            <a:spAutoFit/>
-          </a:bodyPr>
-          <a:lstStyle/>
-          <a:p>
-            <a:pPr algn="r"/>
-            <a:r>
-              <a:rPr sz="900" b="0">
-                <a:solidFill>
-                  <a:srgbClr val="666666"/>
-                </a:solidFill>
-              </a:rPr>
-              <a:t>17 / 19</a:t>
-            </a:r>
-          </a:p>
-        </p:txBody>
-      </p:sp>
-      <p:sp>
-        <p:nvSpPr>
-          <p:cNvPr id="9" name="TextBox 8"/>
-          <p:cNvSpPr txBox="1"/>
-          <p:nvPr/>
-        </p:nvSpPr>
-        <p:spPr>
-          <a:xfrm>
-            <a:off x="457200" y="868680"/>
-            <a:ext cx="4572000" cy="256032"/>
-          </a:xfrm>
-          <a:prstGeom prst="rect">
-            <a:avLst/>
-          </a:prstGeom>
-          <a:noFill/>
-        </p:spPr>
-        <p:txBody>
-          <a:bodyPr wrap="none">
-            <a:spAutoFit/>
-          </a:bodyPr>
-          <a:lstStyle/>
-          <a:p>
-            <a:r>
-              <a:rPr sz="1300" b="1">
-                <a:solidFill>
-                  <a:srgbClr val="1A56A8"/>
-                </a:solidFill>
-              </a:rPr>
-              <a:t>Near-term (straightforward)</a:t>
-            </a:r>
-          </a:p>
-        </p:txBody>
-      </p:sp>
-      <p:sp>
-        <p:nvSpPr>
-          <p:cNvPr id="10" name="TextBox 9"/>
-          <p:cNvSpPr txBox="1"/>
-          <p:nvPr/>
-        </p:nvSpPr>
-        <p:spPr>
-          <a:xfrm>
-            <a:off x="457200" y="1170432"/>
-            <a:ext cx="5303520" cy="2286000"/>
-          </a:xfrm>
-          <a:prstGeom prst="rect">
-            <a:avLst/>
-          </a:prstGeom>
-          <a:noFill/>
-        </p:spPr>
-        <p:txBody>
-          <a:bodyPr wrap="square">
-            <a:spAutoFit/>
-          </a:bodyPr>
-          <a:lstStyle/>
-          <a:p>
-            <a:pPr>
-              <a:spcBef>
-                <a:spcPts val="300"/>
-              </a:spcBef>
-            </a:pPr>
-            <a:r>
-              <a:rPr sz="1250">
-                <a:solidFill>
-                  <a:srgbClr val="1A1A1A"/>
-                </a:solidFill>
-              </a:rPr>
-              <a:t>• Fix CRF notebook (_tied_weights_keys = {}) and run full training</a:t>
-            </a:r>
-          </a:p>
-          <a:p>
-            <a:pPr>
-              <a:spcBef>
-                <a:spcPts val="300"/>
-              </a:spcBef>
-            </a:pPr>
-            <a:r>
-              <a:rPr sz="1250">
-                <a:solidFill>
-                  <a:srgbClr val="1A1A1A"/>
-                </a:solidFill>
-              </a:rPr>
-              <a:t>• Add random seeds to all BERT notebooks for reproducibility</a:t>
-            </a:r>
-          </a:p>
-          <a:p>
-            <a:pPr>
-              <a:spcBef>
-                <a:spcPts val="300"/>
-              </a:spcBef>
-            </a:pPr>
-            <a:r>
-              <a:rPr sz="1250">
-                <a:solidFill>
-                  <a:srgbClr val="1A1A1A"/>
-                </a:solidFill>
-              </a:rPr>
-              <a:t>• Run MedGemma NER for 3 full epochs with quantitative seqeval F1</a:t>
-            </a:r>
-          </a:p>
-          <a:p>
-            <a:pPr>
-              <a:spcBef>
-                <a:spcPts val="300"/>
-              </a:spcBef>
-            </a:pPr>
-            <a:r>
-              <a:rPr sz="1250">
-                <a:solidFill>
-                  <a:srgbClr val="1A1A1A"/>
-                </a:solidFill>
-              </a:rPr>
-              <a:t>• Add constrained decoding for QA (force output to A/B/C/D)</a:t>
-            </a:r>
-          </a:p>
-          <a:p>
-            <a:pPr>
-              <a:spcBef>
-                <a:spcPts val="300"/>
-              </a:spcBef>
-            </a:pPr>
-            <a:r>
-              <a:rPr sz="1250">
-                <a:solidFill>
-                  <a:srgbClr val="1A1A1A"/>
-                </a:solidFill>
-              </a:rPr>
-              <a:t>• Evaluate BERT QA with Longformer (longer context window)</a:t>
-            </a:r>
-          </a:p>
-          <a:p>
-            <a:pPr>
-              <a:spcBef>
-                <a:spcPts val="300"/>
-              </a:spcBef>
-            </a:pPr>
-            <a:r>
-              <a:rPr sz="1250">
-                <a:solidFill>
-                  <a:srgbClr val="1A1A1A"/>
-                </a:solidFill>
-              </a:rPr>
-              <a:t>• Add confusion matrix and per-class breakdown to all result tables</a:t>
-            </a:r>
-          </a:p>
-        </p:txBody>
-      </p:sp>
-      <p:sp>
-        <p:nvSpPr>
-          <p:cNvPr id="11" name="TextBox 10"/>
-          <p:cNvSpPr txBox="1"/>
-          <p:nvPr/>
-        </p:nvSpPr>
-        <p:spPr>
-          <a:xfrm>
-            <a:off x="6217920" y="868680"/>
-            <a:ext cx="4572000" cy="256032"/>
-          </a:xfrm>
-          <a:prstGeom prst="rect">
-            <a:avLst/>
-          </a:prstGeom>
-          <a:noFill/>
-        </p:spPr>
-        <p:txBody>
-          <a:bodyPr wrap="none">
-            <a:spAutoFit/>
-          </a:bodyPr>
-          <a:lstStyle/>
-          <a:p>
-            <a:r>
-              <a:rPr sz="1300" b="1">
-                <a:solidFill>
-                  <a:srgbClr val="1A56A8"/>
-                </a:solidFill>
-              </a:rPr>
-              <a:t>Medium-term (research directions)</a:t>
-            </a:r>
-          </a:p>
-        </p:txBody>
-      </p:sp>
-      <p:sp>
-        <p:nvSpPr>
-          <p:cNvPr id="12" name="TextBox 11"/>
-          <p:cNvSpPr txBox="1"/>
-          <p:nvPr/>
-        </p:nvSpPr>
-        <p:spPr>
-          <a:xfrm>
-            <a:off x="6217920" y="1170432"/>
-            <a:ext cx="5486400" cy="2286000"/>
-          </a:xfrm>
-          <a:prstGeom prst="rect">
-            <a:avLst/>
-          </a:prstGeom>
-          <a:noFill/>
-        </p:spPr>
-        <p:txBody>
-          <a:bodyPr wrap="square">
-            <a:spAutoFit/>
-          </a:bodyPr>
-          <a:lstStyle/>
-          <a:p>
-            <a:pPr>
-              <a:spcBef>
-                <a:spcPts val="300"/>
-              </a:spcBef>
-            </a:pPr>
-            <a:r>
-              <a:rPr sz="1250">
-                <a:solidFill>
-                  <a:srgbClr val="1A1A1A"/>
-                </a:solidFill>
-              </a:rPr>
-              <a:t>• RAG: retrieve UMLS definitions to augment NER context at inference</a:t>
-            </a:r>
-          </a:p>
-          <a:p>
-            <a:pPr>
-              <a:spcBef>
-                <a:spcPts val="300"/>
-              </a:spcBef>
-            </a:pPr>
-            <a:r>
-              <a:rPr sz="1250">
-                <a:solidFill>
-                  <a:srgbClr val="1A1A1A"/>
-                </a:solidFill>
-              </a:rPr>
-              <a:t>• Chain-of-thought prompting for QA reasoning steps</a:t>
-            </a:r>
-          </a:p>
-          <a:p>
-            <a:pPr>
-              <a:spcBef>
-                <a:spcPts val="300"/>
-              </a:spcBef>
-            </a:pPr>
-            <a:r>
-              <a:rPr sz="1250">
-                <a:solidFill>
-                  <a:srgbClr val="1A1A1A"/>
-                </a:solidFill>
-              </a:rPr>
-              <a:t>• Higher LoRA rank (32-64) + structured output (JSON schema)</a:t>
-            </a:r>
-          </a:p>
-          <a:p>
-            <a:pPr>
-              <a:spcBef>
-                <a:spcPts val="300"/>
-              </a:spcBef>
-            </a:pPr>
-            <a:r>
-              <a:rPr sz="1250">
-                <a:solidFill>
-                  <a:srgbClr val="1A1A1A"/>
-                </a:solidFill>
-              </a:rPr>
-              <a:t>• Medical summarization task (originally proposed, not implemented)</a:t>
-            </a:r>
-          </a:p>
-          <a:p>
-            <a:pPr>
-              <a:spcBef>
-                <a:spcPts val="300"/>
-              </a:spcBef>
-            </a:pPr>
-            <a:r>
-              <a:rPr sz="1250">
-                <a:solidFill>
-                  <a:srgbClr val="1A1A1A"/>
-                </a:solidFill>
-              </a:rPr>
-              <a:t>• PubMedBERT as third NER model (originally planned, dropped)</a:t>
-            </a:r>
-          </a:p>
-          <a:p>
-            <a:pPr>
-              <a:spcBef>
-                <a:spcPts val="300"/>
-              </a:spcBef>
-            </a:pPr>
-            <a:r>
-              <a:rPr sz="1250">
-                <a:solidFill>
-                  <a:srgbClr val="1A1A1A"/>
-                </a:solidFill>
-              </a:rPr>
-              <a:t>• Test on MIMIC-IV notes for real-world deployment evaluation</a:t>
-            </a:r>
-          </a:p>
-          <a:p>
-            <a:pPr>
-              <a:spcBef>
-                <a:spcPts val="300"/>
-              </a:spcBef>
-            </a:pPr>
-            <a:r>
-              <a:rPr sz="1250">
-                <a:solidFill>
-                  <a:srgbClr val="1A1A1A"/>
-                </a:solidFill>
-              </a:rPr>
-              <a:t>• Build lightweight agent combining NER + QA pipelines</a:t>
-            </a:r>
-          </a:p>
-        </p:txBody>
-      </p:sp>
-      <p:sp>
-        <p:nvSpPr>
-          <p:cNvPr id="13" name="Rectangle 12"/>
-          <p:cNvSpPr/>
-          <p:nvPr/>
-        </p:nvSpPr>
-        <p:spPr>
-          <a:xfrm>
-            <a:off x="457200" y="3566160"/>
-            <a:ext cx="41148" cy="566928"/>
-          </a:xfrm>
-          <a:prstGeom prst="rect">
-            <a:avLst/>
-          </a:prstGeom>
-          <a:solidFill>
-            <a:srgbClr val="1A56A8"/>
-          </a:solidFill>
-          <a:ln>
-            <a:noFill/>
-          </a:ln>
-        </p:spPr>
-        <p:style>
-          <a:lnRef idx="1">
-            <a:schemeClr val="accent1"/>
-          </a:lnRef>
-          <a:fillRef idx="3">
-            <a:schemeClr val="accent1"/>
-          </a:fillRef>
-          <a:effectRef idx="2">
-            <a:schemeClr val="accent1"/>
-          </a:effectRef>
-          <a:fontRef idx="minor">
-            <a:schemeClr val="lt1"/>
-          </a:fontRef>
-        </p:style>
-        <p:txBody>
-          <a:bodyPr rtlCol="0" anchor="ctr"/>
-          <a:lstStyle/>
-          <a:p>
-            <a:pPr algn="ctr"/>
-            <a:endParaRPr/>
-          </a:p>
-        </p:txBody>
-      </p:sp>
-      <p:sp>
-        <p:nvSpPr>
-          <p:cNvPr id="14" name="Rectangle 13"/>
-          <p:cNvSpPr/>
-          <p:nvPr/>
-        </p:nvSpPr>
-        <p:spPr>
-          <a:xfrm>
-            <a:off x="498348" y="3566160"/>
-            <a:ext cx="11233404" cy="566928"/>
-          </a:xfrm>
-          <a:prstGeom prst="rect">
-            <a:avLst/>
-          </a:prstGeom>
-          <a:solidFill>
-            <a:srgbClr val="E8F0FB"/>
-          </a:solidFill>
-          <a:ln>
-            <a:noFill/>
-          </a:ln>
-        </p:spPr>
-        <p:style>
-          <a:lnRef idx="1">
-            <a:schemeClr val="accent1"/>
-          </a:lnRef>
-          <a:fillRef idx="3">
-            <a:schemeClr val="accent1"/>
-          </a:fillRef>
-          <a:effectRef idx="2">
-            <a:schemeClr val="accent1"/>
-          </a:effectRef>
-          <a:fontRef idx="minor">
-            <a:schemeClr val="lt1"/>
-          </a:fontRef>
-        </p:style>
-        <p:txBody>
-          <a:bodyPr rtlCol="0" anchor="ctr"/>
-          <a:lstStyle/>
-          <a:p>
-            <a:pPr algn="ctr"/>
-            <a:endParaRPr/>
-          </a:p>
-        </p:txBody>
-      </p:sp>
-      <p:sp>
-        <p:nvSpPr>
-          <p:cNvPr id="15" name="TextBox 14"/>
-          <p:cNvSpPr txBox="1"/>
-          <p:nvPr/>
-        </p:nvSpPr>
-        <p:spPr>
-          <a:xfrm>
-            <a:off x="566928" y="3639312"/>
-            <a:ext cx="11073384" cy="457200"/>
-          </a:xfrm>
-          <a:prstGeom prst="rect">
-            <a:avLst/>
-          </a:prstGeom>
-          <a:noFill/>
-        </p:spPr>
-        <p:txBody>
-          <a:bodyPr wrap="square">
-            <a:spAutoFit/>
-          </a:bodyPr>
-          <a:lstStyle/>
-          <a:p>
-            <a:r>
-              <a:rPr sz="1200">
-                <a:solidFill>
-                  <a:srgbClr val="1A1A1A"/>
-                </a:solidFill>
-              </a:rPr>
-              <a:t>The most impactful single improvement: run MedGemma NER for a full epoch with quantitative evaluation - this would give a valid head-to-head comparison.</a:t>
-            </a:r>
-          </a:p>
-        </p:txBody>
-      </p:sp>
-      <p:sp>
-        <p:nvSpPr>
-          <p:cNvPr id="16" name="Rectangle 15"/>
-          <p:cNvSpPr/>
-          <p:nvPr/>
-        </p:nvSpPr>
-        <p:spPr>
-          <a:xfrm>
-            <a:off x="457200" y="4206240"/>
-            <a:ext cx="41148" cy="566928"/>
-          </a:xfrm>
-          <a:prstGeom prst="rect">
-            <a:avLst/>
-          </a:prstGeom>
-          <a:solidFill>
-            <a:srgbClr val="1A7A40"/>
-          </a:solidFill>
-          <a:ln>
-            <a:noFill/>
-          </a:ln>
-        </p:spPr>
-        <p:style>
-          <a:lnRef idx="1">
-            <a:schemeClr val="accent1"/>
-          </a:lnRef>
-          <a:fillRef idx="3">
-            <a:schemeClr val="accent1"/>
-          </a:fillRef>
-          <a:effectRef idx="2">
-            <a:schemeClr val="accent1"/>
-          </a:effectRef>
-          <a:fontRef idx="minor">
-            <a:schemeClr val="lt1"/>
-          </a:fontRef>
-        </p:style>
-        <p:txBody>
-          <a:bodyPr rtlCol="0" anchor="ctr"/>
-          <a:lstStyle/>
-          <a:p>
-            <a:pPr algn="ctr"/>
-            <a:endParaRPr/>
-          </a:p>
-        </p:txBody>
-      </p:sp>
-      <p:sp>
-        <p:nvSpPr>
-          <p:cNvPr id="17" name="Rectangle 16"/>
-          <p:cNvSpPr/>
-          <p:nvPr/>
-        </p:nvSpPr>
-        <p:spPr>
-          <a:xfrm>
-            <a:off x="498348" y="4206240"/>
-            <a:ext cx="11233404" cy="566928"/>
-          </a:xfrm>
-          <a:prstGeom prst="rect">
-            <a:avLst/>
-          </a:prstGeom>
-          <a:solidFill>
-            <a:srgbClr val="E6F7EE"/>
-          </a:solidFill>
-          <a:ln>
-            <a:noFill/>
-          </a:ln>
-        </p:spPr>
-        <p:style>
-          <a:lnRef idx="1">
-            <a:schemeClr val="accent1"/>
-          </a:lnRef>
-          <a:fillRef idx="3">
-            <a:schemeClr val="accent1"/>
-          </a:fillRef>
-          <a:effectRef idx="2">
-            <a:schemeClr val="accent1"/>
-          </a:effectRef>
-          <a:fontRef idx="minor">
-            <a:schemeClr val="lt1"/>
-          </a:fontRef>
-        </p:style>
-        <p:txBody>
-          <a:bodyPr rtlCol="0" anchor="ctr"/>
-          <a:lstStyle/>
-          <a:p>
-            <a:pPr algn="ctr"/>
-            <a:endParaRPr/>
-          </a:p>
-        </p:txBody>
-      </p:sp>
-      <p:sp>
-        <p:nvSpPr>
-          <p:cNvPr id="18" name="TextBox 17"/>
-          <p:cNvSpPr txBox="1"/>
-          <p:nvPr/>
-        </p:nvSpPr>
-        <p:spPr>
-          <a:xfrm>
-            <a:off x="566928" y="4279392"/>
-            <a:ext cx="11073384" cy="457200"/>
-          </a:xfrm>
-          <a:prstGeom prst="rect">
-            <a:avLst/>
-          </a:prstGeom>
-          <a:noFill/>
-        </p:spPr>
-        <p:txBody>
-          <a:bodyPr wrap="square">
-            <a:spAutoFit/>
-          </a:bodyPr>
-          <a:lstStyle/>
-          <a:p>
-            <a:r>
-              <a:rPr sz="1200">
-                <a:solidFill>
-                  <a:srgbClr val="1A1A1A"/>
-                </a:solidFill>
-              </a:rPr>
-              <a:t>Consider using the pre-trained MedGemma (no fine-tuning) for QA with few-shot prompting - may outperform the fine-tuned version.</a:t>
-            </a:r>
-          </a:p>
-        </p:txBody>
-      </p:sp>
-    </p:spTree>
-  </p:cSld>
-  <p:clrMapOvr>
-    <a:masterClrMapping/>
-  </p:clrMapOvr>
-</p:sld>
-</file>
-
-<file path=ppt/slides/slide18.xml><?xml version="1.0" encoding="utf-8"?>
-<p:sld xmlns:a="http://schemas.openxmlformats.org/drawingml/2006/main" xmlns:r="http://schemas.openxmlformats.org/officeDocument/2006/relationships" xmlns:p="http://schemas.openxmlformats.org/presentationml/2006/main">
-  <p:cSld>
-    <p:spTree>
-      <p:nvGrpSpPr>
-        <p:cNvPr id="1" name=""/>
-        <p:cNvGrpSpPr/>
-        <p:nvPr/>
-      </p:nvGrpSpPr>
-      <p:grpSpPr>
-        <a:xfrm>
-          <a:off x="0" y="0"/>
-          <a:ext cx="0" cy="0"/>
-          <a:chOff x="0" y="0"/>
-          <a:chExt cx="0" cy="0"/>
-        </a:xfrm>
-      </p:grpSpPr>
-      <p:sp>
-        <p:nvSpPr>
-          <p:cNvPr id="2" name="Rectangle 1"/>
-          <p:cNvSpPr/>
-          <p:nvPr/>
-        </p:nvSpPr>
-        <p:spPr>
-          <a:xfrm>
-            <a:off x="0" y="0"/>
-            <a:ext cx="12188952" cy="6858000"/>
-          </a:xfrm>
-          <a:prstGeom prst="rect">
-            <a:avLst/>
-          </a:prstGeom>
-          <a:solidFill>
-            <a:srgbClr val="F0F6FF"/>
-          </a:solidFill>
-          <a:ln>
-            <a:noFill/>
-          </a:ln>
-        </p:spPr>
-        <p:style>
-          <a:lnRef idx="1">
-            <a:schemeClr val="accent1"/>
-          </a:lnRef>
-          <a:fillRef idx="3">
-            <a:schemeClr val="accent1"/>
-          </a:fillRef>
-          <a:effectRef idx="2">
-            <a:schemeClr val="accent1"/>
-          </a:effectRef>
-          <a:fontRef idx="minor">
-            <a:schemeClr val="lt1"/>
-          </a:fontRef>
-        </p:style>
-        <p:txBody>
-          <a:bodyPr rtlCol="0" anchor="ctr"/>
-          <a:lstStyle/>
-          <a:p>
-            <a:pPr algn="ctr"/>
-            <a:endParaRPr/>
-          </a:p>
-        </p:txBody>
-      </p:sp>
-      <p:sp>
-        <p:nvSpPr>
-          <p:cNvPr id="3" name="Rectangle 2"/>
-          <p:cNvSpPr/>
-          <p:nvPr/>
-        </p:nvSpPr>
-        <p:spPr>
-          <a:xfrm>
-            <a:off x="0" y="0"/>
-            <a:ext cx="12188952" cy="91440"/>
-          </a:xfrm>
-          <a:prstGeom prst="rect">
-            <a:avLst/>
-          </a:prstGeom>
-          <a:solidFill>
-            <a:srgbClr val="1A56A8"/>
-          </a:solidFill>
-          <a:ln>
-            <a:noFill/>
-          </a:ln>
-        </p:spPr>
-        <p:style>
-          <a:lnRef idx="1">
-            <a:schemeClr val="accent1"/>
-          </a:lnRef>
-          <a:fillRef idx="3">
-            <a:schemeClr val="accent1"/>
-          </a:fillRef>
-          <a:effectRef idx="2">
-            <a:schemeClr val="accent1"/>
-          </a:effectRef>
-          <a:fontRef idx="minor">
-            <a:schemeClr val="lt1"/>
-          </a:fontRef>
-        </p:style>
-        <p:txBody>
-          <a:bodyPr rtlCol="0" anchor="ctr"/>
-          <a:lstStyle/>
-          <a:p>
-            <a:pPr algn="ctr"/>
-            <a:endParaRPr/>
-          </a:p>
-        </p:txBody>
-      </p:sp>
-      <p:sp>
-        <p:nvSpPr>
-          <p:cNvPr id="4" name="TextBox 3"/>
-          <p:cNvSpPr txBox="1"/>
-          <p:nvPr/>
-        </p:nvSpPr>
-        <p:spPr>
-          <a:xfrm>
-            <a:off x="731520" y="502920"/>
-            <a:ext cx="10725912" cy="292608"/>
-          </a:xfrm>
-          <a:prstGeom prst="rect">
-            <a:avLst/>
-          </a:prstGeom>
-          <a:noFill/>
-        </p:spPr>
-        <p:txBody>
-          <a:bodyPr wrap="square">
-            <a:spAutoFit/>
-          </a:bodyPr>
-          <a:lstStyle/>
-          <a:p>
-            <a:pPr algn="l"/>
-            <a:r>
-              <a:rPr sz="1100" b="0">
-                <a:solidFill>
-                  <a:srgbClr val="666666"/>
-                </a:solidFill>
-              </a:rPr>
-              <a:t>CSCI E-222 · Foundations of Large Language Models · Final Project</a:t>
-            </a:r>
-          </a:p>
-        </p:txBody>
-      </p:sp>
-      <p:sp>
-        <p:nvSpPr>
-          <p:cNvPr id="5" name="TextBox 4"/>
-          <p:cNvSpPr txBox="1"/>
-          <p:nvPr/>
-        </p:nvSpPr>
-        <p:spPr>
-          <a:xfrm>
-            <a:off x="731520" y="1005840"/>
-            <a:ext cx="10725912" cy="731520"/>
-          </a:xfrm>
-          <a:prstGeom prst="rect">
-            <a:avLst/>
-          </a:prstGeom>
-          <a:noFill/>
-        </p:spPr>
-        <p:txBody>
-          <a:bodyPr wrap="square">
-            <a:spAutoFit/>
-          </a:bodyPr>
-          <a:lstStyle/>
-          <a:p>
-            <a:pPr algn="l"/>
-            <a:r>
-              <a:rPr sz="3600" b="1">
-                <a:solidFill>
-                  <a:srgbClr val="1A56A8"/>
-                </a:solidFill>
-              </a:rPr>
-              <a:t>Thank You</a:t>
-            </a:r>
-          </a:p>
-        </p:txBody>
-      </p:sp>
-      <p:sp>
-        <p:nvSpPr>
-          <p:cNvPr id="6" name="TextBox 5"/>
-          <p:cNvSpPr txBox="1"/>
-          <p:nvPr/>
-        </p:nvSpPr>
-        <p:spPr>
-          <a:xfrm>
-            <a:off x="731520" y="1783080"/>
-            <a:ext cx="10725912" cy="365760"/>
-          </a:xfrm>
-          <a:prstGeom prst="rect">
-            <a:avLst/>
-          </a:prstGeom>
-          <a:noFill/>
-        </p:spPr>
-        <p:txBody>
-          <a:bodyPr wrap="square">
-            <a:spAutoFit/>
-          </a:bodyPr>
-          <a:lstStyle/>
-          <a:p>
-            <a:pPr algn="l"/>
-            <a:r>
-              <a:rPr sz="1600" b="0">
-                <a:solidFill>
-                  <a:srgbClr val="666666"/>
-                </a:solidFill>
-              </a:rPr>
-              <a:t>NLP for Healthcare: Medical Text Analysis</a:t>
-            </a:r>
-          </a:p>
-        </p:txBody>
-      </p:sp>
-      <p:sp>
-        <p:nvSpPr>
-          <p:cNvPr id="7" name="Rectangle 6"/>
-          <p:cNvSpPr/>
-          <p:nvPr/>
-        </p:nvSpPr>
-        <p:spPr>
-          <a:xfrm>
-            <a:off x="731520" y="2423160"/>
-            <a:ext cx="41148" cy="804672"/>
-          </a:xfrm>
-          <a:prstGeom prst="rect">
-            <a:avLst/>
-          </a:prstGeom>
-          <a:solidFill>
-            <a:srgbClr val="1A56A8"/>
-          </a:solidFill>
-          <a:ln>
-            <a:noFill/>
-          </a:ln>
-        </p:spPr>
-        <p:style>
-          <a:lnRef idx="1">
-            <a:schemeClr val="accent1"/>
-          </a:lnRef>
-          <a:fillRef idx="3">
-            <a:schemeClr val="accent1"/>
-          </a:fillRef>
-          <a:effectRef idx="2">
-            <a:schemeClr val="accent1"/>
-          </a:effectRef>
-          <a:fontRef idx="minor">
-            <a:schemeClr val="lt1"/>
-          </a:fontRef>
-        </p:style>
-        <p:txBody>
-          <a:bodyPr rtlCol="0" anchor="ctr"/>
-          <a:lstStyle/>
-          <a:p>
-            <a:pPr algn="ctr"/>
-            <a:endParaRPr/>
-          </a:p>
-        </p:txBody>
-      </p:sp>
-      <p:sp>
-        <p:nvSpPr>
-          <p:cNvPr id="8" name="Rectangle 7"/>
-          <p:cNvSpPr/>
-          <p:nvPr/>
-        </p:nvSpPr>
-        <p:spPr>
-          <a:xfrm>
-            <a:off x="772668" y="2423160"/>
-            <a:ext cx="4988052" cy="804672"/>
-          </a:xfrm>
-          <a:prstGeom prst="rect">
-            <a:avLst/>
-          </a:prstGeom>
-          <a:solidFill>
-            <a:srgbClr val="E8F0FB"/>
-          </a:solidFill>
-          <a:ln>
-            <a:noFill/>
-          </a:ln>
-        </p:spPr>
-        <p:style>
-          <a:lnRef idx="1">
-            <a:schemeClr val="accent1"/>
-          </a:lnRef>
-          <a:fillRef idx="3">
-            <a:schemeClr val="accent1"/>
-          </a:fillRef>
-          <a:effectRef idx="2">
-            <a:schemeClr val="accent1"/>
-          </a:effectRef>
-          <a:fontRef idx="minor">
-            <a:schemeClr val="lt1"/>
-          </a:fontRef>
-        </p:style>
-        <p:txBody>
-          <a:bodyPr rtlCol="0" anchor="ctr"/>
-          <a:lstStyle/>
-          <a:p>
-            <a:pPr algn="ctr"/>
-            <a:endParaRPr/>
-          </a:p>
-        </p:txBody>
-      </p:sp>
-      <p:sp>
-        <p:nvSpPr>
-          <p:cNvPr id="9" name="TextBox 8"/>
-          <p:cNvSpPr txBox="1"/>
-          <p:nvPr/>
-        </p:nvSpPr>
-        <p:spPr>
-          <a:xfrm>
-            <a:off x="841248" y="2496312"/>
-            <a:ext cx="4828032" cy="694944"/>
-          </a:xfrm>
-          <a:prstGeom prst="rect">
-            <a:avLst/>
-          </a:prstGeom>
-          <a:noFill/>
-        </p:spPr>
-        <p:txBody>
-          <a:bodyPr wrap="square">
-            <a:spAutoFit/>
-          </a:bodyPr>
-          <a:lstStyle/>
-          <a:p>
-            <a:r>
-              <a:rPr sz="1200">
+            <a:r>
+              <a:rPr sz="1200" dirty="0">
                 <a:solidFill>
                   <a:srgbClr val="1A1A1A"/>
                 </a:solidFill>
               </a:rPr>
               <a:t>Code &amp; Models
-huggingface.co/alexd063
-Checkpoints for all 4 fine-tuned models</a:t>
-            </a:r>
+</a:t>
+            </a:r>
+            <a:r>
+              <a:rPr sz="1200" dirty="0" err="1">
+                <a:solidFill>
+                  <a:srgbClr val="1A1A1A"/>
+                </a:solidFill>
+              </a:rPr>
+              <a:t>huggingface.co</a:t>
+            </a:r>
+            <a:r>
+              <a:rPr sz="1200" dirty="0">
+                <a:solidFill>
+                  <a:srgbClr val="1A1A1A"/>
+                </a:solidFill>
+              </a:rPr>
+              <a:t>/alexd063
+</a:t>
+            </a:r>
+            <a:r>
+              <a:rPr lang="en-US" sz="1200" dirty="0">
+                <a:solidFill>
+                  <a:srgbClr val="1A1A1A"/>
+                </a:solidFill>
+              </a:rPr>
+              <a:t>https://</a:t>
+            </a:r>
+            <a:r>
+              <a:rPr lang="en-US" sz="1200" dirty="0" err="1">
+                <a:solidFill>
+                  <a:srgbClr val="1A1A1A"/>
+                </a:solidFill>
+              </a:rPr>
+              <a:t>github.com</a:t>
+            </a:r>
+            <a:r>
+              <a:rPr lang="en-US" sz="1200" dirty="0">
+                <a:solidFill>
+                  <a:srgbClr val="1A1A1A"/>
+                </a:solidFill>
+              </a:rPr>
+              <a:t>/</a:t>
+            </a:r>
+            <a:r>
+              <a:rPr lang="en-US" sz="1200" dirty="0" err="1">
+                <a:solidFill>
+                  <a:srgbClr val="1A1A1A"/>
+                </a:solidFill>
+              </a:rPr>
+              <a:t>vonKleve</a:t>
+            </a:r>
+            <a:r>
+              <a:rPr lang="en-US" sz="1200" dirty="0">
+                <a:solidFill>
+                  <a:srgbClr val="1A1A1A"/>
+                </a:solidFill>
+              </a:rPr>
+              <a:t>/csci-e222-final-project/tree/master</a:t>
+            </a:r>
+            <a:endParaRPr sz="1200" dirty="0">
+              <a:solidFill>
+                <a:srgbClr val="1A1A1A"/>
+              </a:solidFill>
+            </a:endParaRPr>
           </a:p>
         </p:txBody>
       </p:sp>
@@ -10421,46 +9596,12 @@
           <a:p>
             <a:pPr algn="ctr"/>
             <a:r>
-              <a:rPr sz="2000" b="1">
+              <a:rPr sz="2000" b="1" dirty="0">
                 <a:solidFill>
                   <a:srgbClr val="1A56A8"/>
                 </a:solidFill>
               </a:rPr>
               <a:t>[ INSERT VIDEO URL HERE ]</a:t>
-            </a:r>
-          </a:p>
-        </p:txBody>
-      </p:sp>
-      <p:sp>
-        <p:nvSpPr>
-          <p:cNvPr id="16" name="TextBox 15"/>
-          <p:cNvSpPr txBox="1"/>
-          <p:nvPr/>
-        </p:nvSpPr>
-        <p:spPr>
-          <a:xfrm>
-            <a:off x="914400" y="4315968"/>
-            <a:ext cx="10360152" cy="256032"/>
-          </a:xfrm>
-          <a:prstGeom prst="rect">
-            <a:avLst/>
-          </a:prstGeom>
-          <a:noFill/>
-        </p:spPr>
-        <p:txBody>
-          <a:bodyPr wrap="square">
-            <a:spAutoFit/>
-          </a:bodyPr>
-          <a:lstStyle/>
-          <a:p>
-            <a:pPr algn="ctr"/>
-            <a:r>
-              <a:rPr sz="1000" b="0" dirty="0">
-                <a:solidFill>
-                  <a:srgbClr val="666666"/>
-                </a:solidFill>
-              </a:rPr>
-              <a:t>Required: 7-15 minute video covering problem, models, demo, results, and takeaways</a:t>
             </a:r>
           </a:p>
         </p:txBody>
@@ -10576,7 +9717,7 @@
         </p:nvSpPr>
         <p:spPr>
           <a:xfrm>
-            <a:off x="548640" y="164592"/>
+            <a:off x="548576" y="292608"/>
             <a:ext cx="11091672" cy="502920"/>
           </a:xfrm>
           <a:prstGeom prst="rect">
@@ -12021,7 +11162,7 @@
         <p:spPr>
           <a:xfrm>
             <a:off x="6217920" y="868680"/>
-            <a:ext cx="4572000" cy="256032"/>
+            <a:ext cx="2835520" cy="292388"/>
           </a:xfrm>
           <a:prstGeom prst="rect">
             <a:avLst/>
@@ -12035,12 +11176,44 @@
           <a:lstStyle/>
           <a:p>
             <a:r>
-              <a:rPr sz="1300" b="1">
+              <a:rPr sz="1300" b="1" dirty="0">
                 <a:solidFill>
                   <a:srgbClr val="1A56A8"/>
                 </a:solidFill>
               </a:rPr>
-              <a:t>Task 2 · QA - MedQA USMLE-4-options</a:t>
+              <a:t>Task 2 · QA - </a:t>
+            </a:r>
+            <a:r>
+              <a:rPr sz="1300" b="1" dirty="0" err="1">
+                <a:solidFill>
+                  <a:srgbClr val="1A56A8"/>
+                </a:solidFill>
+              </a:rPr>
+              <a:t>MedQA</a:t>
+            </a:r>
+            <a:r>
+              <a:rPr sz="1300" b="1" dirty="0">
+                <a:solidFill>
+                  <a:srgbClr val="1A56A8"/>
+                </a:solidFill>
+              </a:rPr>
+              <a:t> U</a:t>
+            </a:r>
+            <a:r>
+              <a:rPr lang="en-US" sz="1300" b="1" dirty="0">
+                <a:solidFill>
+                  <a:srgbClr val="1A56A8"/>
+                </a:solidFill>
+              </a:rPr>
+              <a:t>SMLE</a:t>
+            </a:r>
+            <a:r>
+              <a:rPr sz="1300" b="1" dirty="0">
+                <a:solidFill>
+                  <a:srgbClr val="1A56A8"/>
+                </a:solidFill>
+              </a:rPr>
+              <a:t>-4-options</a:t>
             </a:r>
           </a:p>
         </p:txBody>
@@ -12285,7 +11458,23 @@
                   <a:srgbClr val="1A1A1A"/>
                 </a:solidFill>
               </a:rPr>
-              <a:t>• Random baseline: 25% · Human expert: ~90%</a:t>
+              <a:t>• </a:t>
+            </a:r>
+            <a:r>
+              <a:rPr lang="en-US" sz="1250" dirty="0">
+                <a:solidFill>
+                  <a:srgbClr val="1A1A1A"/>
+                </a:solidFill>
+              </a:rPr>
+              <a:t>Random baseline: 25% · </a:t>
+            </a:r>
+            <a:r>
+              <a:rPr sz="1250" dirty="0">
+                <a:solidFill>
+                  <a:srgbClr val="1A1A1A"/>
+                </a:solidFill>
+              </a:rPr>
+              <a:t>Human expert: ~90%</a:t>
             </a:r>
             <a:endParaRPr lang="en-US" sz="1250" dirty="0">
               <a:solidFill>
@@ -13945,7 +13134,7 @@
         <p:spPr>
           <a:xfrm>
             <a:off x="548640" y="164592"/>
-            <a:ext cx="11091672" cy="502920"/>
+            <a:ext cx="2327817" cy="430887"/>
           </a:xfrm>
           <a:prstGeom prst="rect">
             <a:avLst/>
@@ -13959,13 +13148,26 @@
           <a:lstStyle/>
           <a:p>
             <a:r>
-              <a:rPr sz="2200" b="1">
+              <a:rPr sz="2200" b="1" dirty="0">
                 <a:solidFill>
                   <a:srgbClr val="1A56A8"/>
                 </a:solidFill>
               </a:rPr>
-              <a:t>Task 1 - NER: Implementation Pipeline</a:t>
-            </a:r>
+              <a:t>Task 1 - NER: </a:t>
+            </a:r>
+            <a:r>
+              <a:rPr lang="en-US" sz="2200" b="1" dirty="0">
+                <a:solidFill>
+                  <a:srgbClr val="1A56A8"/>
+                </a:solidFill>
+              </a:rPr>
+              <a:t>BERT</a:t>
+            </a:r>
+            <a:endParaRPr sz="2200" b="1" dirty="0">
+              <a:solidFill>
+                <a:srgbClr val="1A56A8"/>
+              </a:solidFill>
+            </a:endParaRPr>
           </a:p>
         </p:txBody>
       </p:sp>
@@ -15088,7 +14290,7 @@
         <p:spPr>
           <a:xfrm>
             <a:off x="457200" y="1874519"/>
-            <a:ext cx="4572000" cy="256032"/>
+            <a:ext cx="1719702" cy="292388"/>
           </a:xfrm>
           <a:prstGeom prst="rect">
             <a:avLst/>
@@ -15102,219 +14304,13 @@
           <a:lstStyle/>
           <a:p>
             <a:r>
-              <a:rPr sz="1300" b="1">
+              <a:rPr lang="en-US" sz="1300" b="1" dirty="0">
                 <a:solidFill>
                   <a:srgbClr val="1A56A8"/>
                 </a:solidFill>
               </a:rPr>
-              <a:t>Key Engineering Decisions</a:t>
-            </a:r>
-          </a:p>
-        </p:txBody>
-      </p:sp>
-      <p:sp>
-        <p:nvSpPr>
-          <p:cNvPr id="33" name="TextBox 32"/>
-          <p:cNvSpPr txBox="1"/>
-          <p:nvPr/>
-        </p:nvSpPr>
-        <p:spPr>
-          <a:xfrm>
-            <a:off x="457200" y="2176272"/>
-            <a:ext cx="5303520" cy="1438855"/>
-          </a:xfrm>
-          <a:prstGeom prst="rect">
-            <a:avLst/>
-          </a:prstGeom>
-          <a:noFill/>
-        </p:spPr>
-        <p:txBody>
-          <a:bodyPr wrap="square">
-            <a:spAutoFit/>
-          </a:bodyPr>
-          <a:lstStyle/>
-          <a:p>
-            <a:pPr>
-              <a:spcBef>
-                <a:spcPts val="300"/>
-              </a:spcBef>
-            </a:pPr>
-            <a:r>
-              <a:rPr sz="1250" dirty="0">
-                <a:solidFill>
-                  <a:srgbClr val="1A1A1A"/>
-                </a:solidFill>
-              </a:rPr>
-              <a:t>• </a:t>
-            </a:r>
-            <a:r>
-              <a:rPr sz="1250" dirty="0" err="1">
-                <a:solidFill>
-                  <a:srgbClr val="1A1A1A"/>
-                </a:solidFill>
-              </a:rPr>
-              <a:t>Subword</a:t>
-            </a:r>
-            <a:r>
-              <a:rPr sz="1250" dirty="0">
-                <a:solidFill>
-                  <a:srgbClr val="1A1A1A"/>
-                </a:solidFill>
-              </a:rPr>
-              <a:t> tokens </a:t>
-            </a:r>
-            <a:r>
-              <a:rPr lang="en-US" sz="1250" dirty="0">
-                <a:solidFill>
-                  <a:srgbClr val="1A1A1A"/>
-                </a:solidFill>
-              </a:rPr>
-              <a:t>-&gt;</a:t>
-            </a:r>
-            <a:r>
-              <a:rPr sz="1250" dirty="0">
-                <a:solidFill>
-                  <a:srgbClr val="1A1A1A"/>
-                </a:solidFill>
-              </a:rPr>
-              <a:t> -100 label (ignored in cross-entropy loss)</a:t>
-            </a:r>
-          </a:p>
-          <a:p>
-            <a:pPr>
-              <a:spcBef>
-                <a:spcPts val="300"/>
-              </a:spcBef>
-            </a:pPr>
-            <a:r>
-              <a:rPr sz="1250" dirty="0">
-                <a:solidFill>
-                  <a:srgbClr val="1A1A1A"/>
-                </a:solidFill>
-              </a:rPr>
-              <a:t>• Exponential class weights: exp(−</a:t>
-            </a:r>
-            <a:r>
-              <a:rPr sz="1250" dirty="0" err="1">
-                <a:solidFill>
-                  <a:srgbClr val="1A1A1A"/>
-                </a:solidFill>
-              </a:rPr>
-              <a:t>nC</a:t>
-            </a:r>
-            <a:r>
-              <a:rPr sz="1250" dirty="0">
-                <a:solidFill>
-                  <a:srgbClr val="1A1A1A"/>
-                </a:solidFill>
-              </a:rPr>
-              <a:t>/N)×100, O-class fixed at 0.5</a:t>
-            </a:r>
-          </a:p>
-          <a:p>
-            <a:pPr>
-              <a:spcBef>
-                <a:spcPts val="300"/>
-              </a:spcBef>
-            </a:pPr>
-            <a:r>
-              <a:rPr sz="1250" dirty="0">
-                <a:solidFill>
-                  <a:srgbClr val="1A1A1A"/>
-                </a:solidFill>
-              </a:rPr>
-              <a:t>• Custom </a:t>
-            </a:r>
-            <a:r>
-              <a:rPr sz="1250" dirty="0" err="1">
-                <a:solidFill>
-                  <a:srgbClr val="1A1A1A"/>
-                </a:solidFill>
-              </a:rPr>
-              <a:t>WeightedTrainer</a:t>
-            </a:r>
-            <a:r>
-              <a:rPr sz="1250" dirty="0">
-                <a:solidFill>
-                  <a:srgbClr val="1A1A1A"/>
-                </a:solidFill>
-              </a:rPr>
-              <a:t> injects per-class loss weights</a:t>
-            </a:r>
-          </a:p>
-          <a:p>
-            <a:pPr>
-              <a:spcBef>
-                <a:spcPts val="300"/>
-              </a:spcBef>
-            </a:pPr>
-            <a:r>
-              <a:rPr sz="1250" dirty="0">
-                <a:solidFill>
-                  <a:srgbClr val="1A1A1A"/>
-                </a:solidFill>
-              </a:rPr>
-              <a:t>• Cosine LR schedule with 10% warmup, LR = 6e-5</a:t>
-            </a:r>
-          </a:p>
-          <a:p>
-            <a:pPr>
-              <a:spcBef>
-                <a:spcPts val="300"/>
-              </a:spcBef>
-            </a:pPr>
-            <a:r>
-              <a:rPr sz="1250" dirty="0">
-                <a:solidFill>
-                  <a:srgbClr val="1A1A1A"/>
-                </a:solidFill>
-              </a:rPr>
-              <a:t>• Early stopping on macro F1 (patience=3 baseline / patience=2 weighted)</a:t>
-            </a:r>
-          </a:p>
-          <a:p>
-            <a:pPr>
-              <a:spcBef>
-                <a:spcPts val="300"/>
-              </a:spcBef>
-            </a:pPr>
-            <a:r>
-              <a:rPr sz="1250" dirty="0">
-                <a:solidFill>
-                  <a:srgbClr val="1A1A1A"/>
-                </a:solidFill>
-              </a:rPr>
-              <a:t>• Checkpoints: alexd063/bio-</a:t>
-            </a:r>
-            <a:r>
-              <a:rPr sz="1250" dirty="0" err="1">
-                <a:solidFill>
-                  <a:srgbClr val="1A1A1A"/>
-                </a:solidFill>
-              </a:rPr>
-              <a:t>clinicalbert</a:t>
-            </a:r>
-            <a:r>
-              <a:rPr sz="1250" dirty="0">
-                <a:solidFill>
-                  <a:srgbClr val="1A1A1A"/>
-                </a:solidFill>
-              </a:rPr>
-              <a:t>-finetuned-</a:t>
-            </a:r>
-            <a:r>
-              <a:rPr sz="1250" dirty="0" err="1">
-                <a:solidFill>
-                  <a:srgbClr val="1A1A1A"/>
-                </a:solidFill>
-              </a:rPr>
-              <a:t>medmentions</a:t>
-            </a:r>
-            <a:endParaRPr sz="1250" dirty="0">
-              <a:solidFill>
-                <a:srgbClr val="1A1A1A"/>
-              </a:solidFill>
-            </a:endParaRPr>
+              <a:t>Training Configuration</a:t>
+            </a:r>
           </a:p>
         </p:txBody>
       </p:sp>
@@ -15327,7 +14323,7 @@
         <p:spPr>
           <a:xfrm>
             <a:off x="6217920" y="1874519"/>
-            <a:ext cx="4572000" cy="256032"/>
+            <a:ext cx="1375889" cy="292388"/>
           </a:xfrm>
           <a:prstGeom prst="rect">
             <a:avLst/>
@@ -15341,12 +14337,20 @@
           <a:lstStyle/>
           <a:p>
             <a:r>
-              <a:rPr sz="1300" b="1">
+              <a:rPr lang="en-US" sz="1300" b="1" dirty="0">
                 <a:solidFill>
                   <a:srgbClr val="1A56A8"/>
                 </a:solidFill>
               </a:rPr>
-              <a:t>Three Experiments</a:t>
+              <a:t>Two</a:t>
+            </a:r>
+            <a:r>
+              <a:rPr sz="1300" b="1" dirty="0">
+                <a:solidFill>
+                  <a:srgbClr val="1A56A8"/>
+                </a:solidFill>
+              </a:rPr>
+              <a:t> Experiments</a:t>
             </a:r>
           </a:p>
         </p:txBody>
@@ -15360,14 +14364,14 @@
           <p:nvPr>
             <p:extLst>
               <p:ext uri="{D42A27DB-BD31-4B8C-83A1-F6EECF244321}">
-                <p14:modId xmlns:p14="http://schemas.microsoft.com/office/powerpoint/2010/main" val="660774460"/>
+                <p14:modId xmlns:p14="http://schemas.microsoft.com/office/powerpoint/2010/main" val="2044490171"/>
               </p:ext>
             </p:extLst>
           </p:nvPr>
         </p:nvGraphicFramePr>
         <p:xfrm>
           <a:off x="6217920" y="2176272"/>
-          <a:ext cx="5486400" cy="809244"/>
+          <a:ext cx="5486400" cy="1626108"/>
         </p:xfrm>
         <a:graphic>
           <a:graphicData uri="http://schemas.openxmlformats.org/drawingml/2006/table">
@@ -15405,7 +14409,7 @@
                     <a:lstStyle/>
                     <a:p>
                       <a:r>
-                        <a:rPr sz="1100" b="1">
+                        <a:rPr sz="1100" b="1" dirty="0">
                           <a:solidFill>
                             <a:srgbClr val="FFFFFF"/>
                           </a:solidFill>
@@ -15447,13 +14451,18 @@
                     <a:lstStyle/>
                     <a:p>
                       <a:r>
-                        <a:rPr sz="1100" b="1">
+                        <a:rPr lang="en-US" sz="1100" b="1" dirty="0">
                           <a:solidFill>
                             <a:srgbClr val="FFFFFF"/>
                           </a:solidFill>
                         </a:rPr>
-                        <a:t>Status</a:t>
+                        <a:t>Checkpoint</a:t>
                       </a:r>
+                      <a:endParaRPr sz="1100" b="1" dirty="0">
+                        <a:solidFill>
+                          <a:srgbClr val="FFFFFF"/>
+                        </a:solidFill>
+                      </a:endParaRPr>
                     </a:p>
                   </a:txBody>
                   <a:tcPr>
@@ -15475,7 +14484,7 @@
                     <a:lstStyle/>
                     <a:p>
                       <a:r>
-                        <a:rPr sz="1100">
+                        <a:rPr sz="1100" dirty="0">
                           <a:solidFill>
                             <a:srgbClr val="1A1A1A"/>
                           </a:solidFill>
@@ -15492,7 +14501,7 @@
                     <a:lstStyle/>
                     <a:p>
                       <a:r>
-                        <a:rPr sz="1100">
+                        <a:rPr sz="1100" dirty="0">
                           <a:solidFill>
                             <a:srgbClr val="1A1A1A"/>
                           </a:solidFill>
@@ -15508,14 +14517,87 @@
                     <a:bodyPr/>
                     <a:lstStyle/>
                     <a:p>
+                      <a:pPr marL="0" marR="0" lvl="0" indent="0" algn="l" defTabSz="457200" rtl="0" eaLnBrk="1" fontAlgn="auto" latinLnBrk="0" hangingPunct="1">
+                        <a:lnSpc>
+                          <a:spcPct val="100000"/>
+                        </a:lnSpc>
+                        <a:spcBef>
+                          <a:spcPts val="0"/>
+                        </a:spcBef>
+                        <a:spcAft>
+                          <a:spcPts val="0"/>
+                        </a:spcAft>
+                        <a:buClrTx/>
+                        <a:buSzTx/>
+                        <a:buFontTx/>
+                        <a:buNone/>
+                        <a:tabLst/>
+                        <a:defRPr/>
+                      </a:pPr>
                       <a:r>
-                        <a:rPr sz="1100">
+                        <a:rPr lang="en-US" sz="1100" b="0" i="0" kern="1200" dirty="0">
                           <a:solidFill>
-                            <a:srgbClr val="1A1A1A"/>
+                            <a:schemeClr val="dk1"/>
                           </a:solidFill>
+                          <a:effectLst/>
+                          <a:latin typeface="+mn-lt"/>
+                          <a:ea typeface="+mn-ea"/>
+                          <a:cs typeface="+mn-cs"/>
                         </a:rPr>
-                        <a:t>✓ Complete</a:t>
+                        <a:t>alexd063/bio-</a:t>
                       </a:r>
+                      <a:r>
+                        <a:rPr lang="en-US" sz="1100" b="0" i="0" kern="1200" dirty="0" err="1">
+                          <a:solidFill>
+                            <a:schemeClr val="dk1"/>
+                          </a:solidFill>
+                          <a:effectLst/>
+                          <a:latin typeface="+mn-lt"/>
+                          <a:ea typeface="+mn-ea"/>
+                          <a:cs typeface="+mn-cs"/>
+                        </a:rPr>
+                        <a:t>clinicalbert</a:t>
+                      </a:r>
+                      <a:r>
+                        <a:rPr lang="en-US" sz="1100" b="0" i="0" kern="1200" dirty="0">
+                          <a:solidFill>
+                            <a:schemeClr val="dk1"/>
+                          </a:solidFill>
+                          <a:effectLst/>
+                          <a:latin typeface="+mn-lt"/>
+                          <a:ea typeface="+mn-ea"/>
+                          <a:cs typeface="+mn-cs"/>
+                        </a:rPr>
+                        <a:t>-finetuned-</a:t>
+                      </a:r>
+                      <a:r>
+                        <a:rPr lang="en-US" sz="1100" b="0" i="0" kern="1200" dirty="0" err="1">
+                          <a:solidFill>
+                            <a:schemeClr val="dk1"/>
+                          </a:solidFill>
+                          <a:effectLst/>
+                          <a:latin typeface="+mn-lt"/>
+                          <a:ea typeface="+mn-ea"/>
+                          <a:cs typeface="+mn-cs"/>
+                        </a:rPr>
+                        <a:t>medmentions</a:t>
+                      </a:r>
+                      <a:endParaRPr lang="en-US" sz="1100" b="0" i="0" kern="1200" dirty="0">
+                        <a:solidFill>
+                          <a:schemeClr val="dk1"/>
+                        </a:solidFill>
+                        <a:effectLst/>
+                        <a:latin typeface="+mn-lt"/>
+                        <a:ea typeface="+mn-ea"/>
+                        <a:cs typeface="+mn-cs"/>
+                      </a:endParaRPr>
+                    </a:p>
+                    <a:p>
+                      <a:endParaRPr sz="1100" dirty="0">
+                        <a:solidFill>
+                          <a:srgbClr val="1A1A1A"/>
+                        </a:solidFill>
+                      </a:endParaRPr>
                     </a:p>
                   </a:txBody>
                   <a:tcPr/>
@@ -15554,12 +14636,12 @@
                     <a:lstStyle/>
                     <a:p>
                       <a:r>
-                        <a:rPr sz="1100">
+                        <a:rPr sz="1100" dirty="0">
                           <a:solidFill>
                             <a:srgbClr val="1A1A1A"/>
                           </a:solidFill>
                         </a:rPr>
-                        <a:t>+ Class weights, cosine LR</a:t>
+                        <a:t>Class weights</a:t>
                       </a:r>
                     </a:p>
                   </a:txBody>
@@ -15575,13 +14657,22 @@
                     <a:lstStyle/>
                     <a:p>
                       <a:r>
-                        <a:rPr sz="1100" dirty="0">
+                        <a:rPr lang="en-US" sz="1100" b="0" i="0" kern="1200" dirty="0">
                           <a:solidFill>
-                            <a:srgbClr val="1A1A1A"/>
+                            <a:schemeClr val="dk1"/>
                           </a:solidFill>
+                          <a:effectLst/>
+                          <a:latin typeface="+mn-lt"/>
+                          <a:ea typeface="+mn-ea"/>
+                          <a:cs typeface="+mn-cs"/>
                         </a:rPr>
-                        <a:t>✓ Complete</a:t>
+                        <a:t>alexd063/bio-clinicalbert-finetuned-medmentions-v1</a:t>
                       </a:r>
+                      <a:endParaRPr sz="1100" dirty="0">
+                        <a:solidFill>
+                          <a:srgbClr val="1A1A1A"/>
+                        </a:solidFill>
+                      </a:endParaRPr>
                     </a:p>
                   </a:txBody>
                   <a:tcPr>
@@ -15716,11 +14807,914 @@
                   <a:srgbClr val="1A1A1A"/>
                 </a:solidFill>
               </a:rPr>
-              <a:t>Class weighting was the single most impactful engineering decision - without it the model collapses to predicting 'O' for all tokens.</a:t>
-            </a:r>
-          </a:p>
-        </p:txBody>
-      </p:sp>
+              <a:t>Class weighting was the single most impactful decision - without it the model collapses to predicting 'O' for all tokens.</a:t>
+            </a:r>
+          </a:p>
+        </p:txBody>
+      </p:sp>
+      <p:graphicFrame>
+        <p:nvGraphicFramePr>
+          <p:cNvPr id="42" name="Table 41">
+            <a:extLst>
+              <a:ext uri="{FF2B5EF4-FFF2-40B4-BE49-F238E27FC236}">
+                <a16:creationId xmlns:a16="http://schemas.microsoft.com/office/drawing/2014/main" id="{535EF6DA-0606-E1D0-D871-CE4FC4658CC9}"/>
+              </a:ext>
+            </a:extLst>
+          </p:cNvPr>
+          <p:cNvGraphicFramePr>
+            <a:graphicFrameLocks noGrp="1"/>
+          </p:cNvGraphicFramePr>
+          <p:nvPr>
+            <p:extLst>
+              <p:ext uri="{D42A27DB-BD31-4B8C-83A1-F6EECF244321}">
+                <p14:modId xmlns:p14="http://schemas.microsoft.com/office/powerpoint/2010/main" val="1417758727"/>
+              </p:ext>
+            </p:extLst>
+          </p:nvPr>
+        </p:nvGraphicFramePr>
+        <p:xfrm>
+          <a:off x="548640" y="2216844"/>
+          <a:ext cx="5348838" cy="1632780"/>
+        </p:xfrm>
+        <a:graphic>
+          <a:graphicData uri="http://schemas.openxmlformats.org/drawingml/2006/table">
+            <a:tbl>
+              <a:tblPr bandRow="1">
+                <a:tableStyleId>{5C22544A-7EE6-4342-B048-85BDC9FD1C3A}</a:tableStyleId>
+              </a:tblPr>
+              <a:tblGrid>
+                <a:gridCol w="1782946">
+                  <a:extLst>
+                    <a:ext uri="{9D8B030D-6E8A-4147-A177-3AD203B41FA5}">
+                      <a16:colId xmlns:a16="http://schemas.microsoft.com/office/drawing/2014/main" val="211335415"/>
+                    </a:ext>
+                  </a:extLst>
+                </a:gridCol>
+                <a:gridCol w="1782946">
+                  <a:extLst>
+                    <a:ext uri="{9D8B030D-6E8A-4147-A177-3AD203B41FA5}">
+                      <a16:colId xmlns:a16="http://schemas.microsoft.com/office/drawing/2014/main" val="2694271668"/>
+                    </a:ext>
+                  </a:extLst>
+                </a:gridCol>
+                <a:gridCol w="1782946">
+                  <a:extLst>
+                    <a:ext uri="{9D8B030D-6E8A-4147-A177-3AD203B41FA5}">
+                      <a16:colId xmlns:a16="http://schemas.microsoft.com/office/drawing/2014/main" val="832196674"/>
+                    </a:ext>
+                  </a:extLst>
+                </a:gridCol>
+              </a:tblGrid>
+              <a:tr h="0">
+                <a:tc>
+                  <a:txBody>
+                    <a:bodyPr/>
+                    <a:lstStyle/>
+                    <a:p>
+                      <a:pPr marL="0" marR="0" algn="ctr">
+                        <a:lnSpc>
+                          <a:spcPct val="115000"/>
+                        </a:lnSpc>
+                        <a:spcAft>
+                          <a:spcPts val="1000"/>
+                        </a:spcAft>
+                        <a:buNone/>
+                      </a:pPr>
+                      <a:r>
+                        <a:rPr lang="en-US" sz="1100">
+                          <a:effectLst/>
+                        </a:rPr>
+                        <a:t>Model</a:t>
+                      </a:r>
+                      <a:endParaRPr lang="en-US" sz="1100">
+                        <a:effectLst/>
+                        <a:latin typeface="Calibri" panose="020F0502020204030204" pitchFamily="34" charset="0"/>
+                        <a:ea typeface="Calibri" panose="020F0502020204030204" pitchFamily="34" charset="0"/>
+                      </a:endParaRPr>
+                    </a:p>
+                  </a:txBody>
+                  <a:tcPr marL="68580" marR="68580" marT="0" marB="0"/>
+                </a:tc>
+                <a:tc>
+                  <a:txBody>
+                    <a:bodyPr/>
+                    <a:lstStyle/>
+                    <a:p>
+                      <a:pPr marL="0" marR="0" algn="ctr">
+                        <a:lnSpc>
+                          <a:spcPct val="115000"/>
+                        </a:lnSpc>
+                        <a:spcAft>
+                          <a:spcPts val="1000"/>
+                        </a:spcAft>
+                        <a:buNone/>
+                      </a:pPr>
+                      <a:r>
+                        <a:rPr lang="en-US" sz="1100">
+                          <a:effectLst/>
+                        </a:rPr>
+                        <a:t>Hyperparameter</a:t>
+                      </a:r>
+                      <a:endParaRPr lang="en-US" sz="1100">
+                        <a:effectLst/>
+                        <a:latin typeface="Calibri" panose="020F0502020204030204" pitchFamily="34" charset="0"/>
+                        <a:ea typeface="Calibri" panose="020F0502020204030204" pitchFamily="34" charset="0"/>
+                      </a:endParaRPr>
+                    </a:p>
+                  </a:txBody>
+                  <a:tcPr marL="68580" marR="68580" marT="0" marB="0"/>
+                </a:tc>
+                <a:tc>
+                  <a:txBody>
+                    <a:bodyPr/>
+                    <a:lstStyle/>
+                    <a:p>
+                      <a:pPr marL="0" marR="0" algn="ctr">
+                        <a:lnSpc>
+                          <a:spcPct val="115000"/>
+                        </a:lnSpc>
+                        <a:spcAft>
+                          <a:spcPts val="1000"/>
+                        </a:spcAft>
+                        <a:buNone/>
+                      </a:pPr>
+                      <a:r>
+                        <a:rPr lang="en-US" sz="1100" dirty="0">
+                          <a:effectLst/>
+                        </a:rPr>
+                        <a:t>Value</a:t>
+                      </a:r>
+                      <a:endParaRPr lang="en-US" sz="1100" dirty="0">
+                        <a:effectLst/>
+                        <a:latin typeface="Calibri" panose="020F0502020204030204" pitchFamily="34" charset="0"/>
+                        <a:ea typeface="Calibri" panose="020F0502020204030204" pitchFamily="34" charset="0"/>
+                      </a:endParaRPr>
+                    </a:p>
+                  </a:txBody>
+                  <a:tcPr marL="68580" marR="68580" marT="0" marB="0"/>
+                </a:tc>
+                <a:extLst>
+                  <a:ext uri="{0D108BD9-81ED-4DB2-BD59-A6C34878D82A}">
+                    <a16:rowId xmlns:a16="http://schemas.microsoft.com/office/drawing/2014/main" val="1357929677"/>
+                  </a:ext>
+                </a:extLst>
+              </a:tr>
+              <a:tr h="0">
+                <a:tc>
+                  <a:txBody>
+                    <a:bodyPr/>
+                    <a:lstStyle/>
+                    <a:p>
+                      <a:pPr marL="0" marR="0" algn="ctr">
+                        <a:lnSpc>
+                          <a:spcPct val="115000"/>
+                        </a:lnSpc>
+                        <a:spcAft>
+                          <a:spcPts val="1000"/>
+                        </a:spcAft>
+                        <a:buNone/>
+                      </a:pPr>
+                      <a:r>
+                        <a:rPr lang="en-US" sz="1100">
+                          <a:effectLst/>
+                        </a:rPr>
+                        <a:t>Baseline &amp; Weighted</a:t>
+                      </a:r>
+                      <a:endParaRPr lang="en-US" sz="1100">
+                        <a:effectLst/>
+                        <a:latin typeface="Calibri" panose="020F0502020204030204" pitchFamily="34" charset="0"/>
+                        <a:ea typeface="Calibri" panose="020F0502020204030204" pitchFamily="34" charset="0"/>
+                      </a:endParaRPr>
+                    </a:p>
+                  </a:txBody>
+                  <a:tcPr marL="68580" marR="68580" marT="0" marB="0"/>
+                </a:tc>
+                <a:tc>
+                  <a:txBody>
+                    <a:bodyPr/>
+                    <a:lstStyle/>
+                    <a:p>
+                      <a:pPr marL="0" marR="0" algn="ctr">
+                        <a:lnSpc>
+                          <a:spcPct val="115000"/>
+                        </a:lnSpc>
+                        <a:spcAft>
+                          <a:spcPts val="1000"/>
+                        </a:spcAft>
+                        <a:buNone/>
+                      </a:pPr>
+                      <a:r>
+                        <a:rPr lang="en-US" sz="1100">
+                          <a:effectLst/>
+                        </a:rPr>
+                        <a:t>MAX_LENGTH</a:t>
+                      </a:r>
+                      <a:endParaRPr lang="en-US" sz="1100">
+                        <a:effectLst/>
+                        <a:latin typeface="Calibri" panose="020F0502020204030204" pitchFamily="34" charset="0"/>
+                        <a:ea typeface="Calibri" panose="020F0502020204030204" pitchFamily="34" charset="0"/>
+                      </a:endParaRPr>
+                    </a:p>
+                  </a:txBody>
+                  <a:tcPr marL="68580" marR="68580" marT="0" marB="0"/>
+                </a:tc>
+                <a:tc>
+                  <a:txBody>
+                    <a:bodyPr/>
+                    <a:lstStyle/>
+                    <a:p>
+                      <a:pPr marL="0" marR="0" algn="ctr">
+                        <a:lnSpc>
+                          <a:spcPct val="115000"/>
+                        </a:lnSpc>
+                        <a:spcAft>
+                          <a:spcPts val="1000"/>
+                        </a:spcAft>
+                        <a:buNone/>
+                      </a:pPr>
+                      <a:r>
+                        <a:rPr lang="en-US" sz="1100">
+                          <a:effectLst/>
+                        </a:rPr>
+                        <a:t>512</a:t>
+                      </a:r>
+                      <a:endParaRPr lang="en-US" sz="1100">
+                        <a:effectLst/>
+                        <a:latin typeface="Calibri" panose="020F0502020204030204" pitchFamily="34" charset="0"/>
+                        <a:ea typeface="Calibri" panose="020F0502020204030204" pitchFamily="34" charset="0"/>
+                      </a:endParaRPr>
+                    </a:p>
+                  </a:txBody>
+                  <a:tcPr marL="68580" marR="68580" marT="0" marB="0"/>
+                </a:tc>
+                <a:extLst>
+                  <a:ext uri="{0D108BD9-81ED-4DB2-BD59-A6C34878D82A}">
+                    <a16:rowId xmlns:a16="http://schemas.microsoft.com/office/drawing/2014/main" val="98612714"/>
+                  </a:ext>
+                </a:extLst>
+              </a:tr>
+              <a:tr h="0">
+                <a:tc>
+                  <a:txBody>
+                    <a:bodyPr/>
+                    <a:lstStyle/>
+                    <a:p>
+                      <a:pPr marL="0" marR="0" algn="ctr">
+                        <a:lnSpc>
+                          <a:spcPct val="115000"/>
+                        </a:lnSpc>
+                        <a:spcAft>
+                          <a:spcPts val="1000"/>
+                        </a:spcAft>
+                        <a:buNone/>
+                      </a:pPr>
+                      <a:r>
+                        <a:rPr lang="en-US" sz="1100">
+                          <a:effectLst/>
+                        </a:rPr>
+                        <a:t>Baseline &amp; Weighted</a:t>
+                      </a:r>
+                      <a:endParaRPr lang="en-US" sz="1100">
+                        <a:effectLst/>
+                        <a:latin typeface="Calibri" panose="020F0502020204030204" pitchFamily="34" charset="0"/>
+                        <a:ea typeface="Calibri" panose="020F0502020204030204" pitchFamily="34" charset="0"/>
+                      </a:endParaRPr>
+                    </a:p>
+                  </a:txBody>
+                  <a:tcPr marL="68580" marR="68580" marT="0" marB="0"/>
+                </a:tc>
+                <a:tc>
+                  <a:txBody>
+                    <a:bodyPr/>
+                    <a:lstStyle/>
+                    <a:p>
+                      <a:pPr marL="0" marR="0" algn="ctr">
+                        <a:lnSpc>
+                          <a:spcPct val="115000"/>
+                        </a:lnSpc>
+                        <a:spcAft>
+                          <a:spcPts val="1000"/>
+                        </a:spcAft>
+                        <a:buNone/>
+                      </a:pPr>
+                      <a:r>
+                        <a:rPr lang="en-US" sz="1100">
+                          <a:effectLst/>
+                        </a:rPr>
+                        <a:t>BATCH_SIZE</a:t>
+                      </a:r>
+                      <a:endParaRPr lang="en-US" sz="1100">
+                        <a:effectLst/>
+                        <a:latin typeface="Calibri" panose="020F0502020204030204" pitchFamily="34" charset="0"/>
+                        <a:ea typeface="Calibri" panose="020F0502020204030204" pitchFamily="34" charset="0"/>
+                      </a:endParaRPr>
+                    </a:p>
+                  </a:txBody>
+                  <a:tcPr marL="68580" marR="68580" marT="0" marB="0"/>
+                </a:tc>
+                <a:tc>
+                  <a:txBody>
+                    <a:bodyPr/>
+                    <a:lstStyle/>
+                    <a:p>
+                      <a:pPr marL="0" marR="0" algn="ctr">
+                        <a:lnSpc>
+                          <a:spcPct val="115000"/>
+                        </a:lnSpc>
+                        <a:spcAft>
+                          <a:spcPts val="1000"/>
+                        </a:spcAft>
+                        <a:buNone/>
+                      </a:pPr>
+                      <a:r>
+                        <a:rPr lang="en-US" sz="1100">
+                          <a:effectLst/>
+                        </a:rPr>
+                        <a:t>16</a:t>
+                      </a:r>
+                      <a:endParaRPr lang="en-US" sz="1100">
+                        <a:effectLst/>
+                        <a:latin typeface="Calibri" panose="020F0502020204030204" pitchFamily="34" charset="0"/>
+                        <a:ea typeface="Calibri" panose="020F0502020204030204" pitchFamily="34" charset="0"/>
+                      </a:endParaRPr>
+                    </a:p>
+                  </a:txBody>
+                  <a:tcPr marL="68580" marR="68580" marT="0" marB="0"/>
+                </a:tc>
+                <a:extLst>
+                  <a:ext uri="{0D108BD9-81ED-4DB2-BD59-A6C34878D82A}">
+                    <a16:rowId xmlns:a16="http://schemas.microsoft.com/office/drawing/2014/main" val="136771094"/>
+                  </a:ext>
+                </a:extLst>
+              </a:tr>
+              <a:tr h="0">
+                <a:tc>
+                  <a:txBody>
+                    <a:bodyPr/>
+                    <a:lstStyle/>
+                    <a:p>
+                      <a:pPr marL="0" marR="0" algn="ctr">
+                        <a:lnSpc>
+                          <a:spcPct val="115000"/>
+                        </a:lnSpc>
+                        <a:spcAft>
+                          <a:spcPts val="1000"/>
+                        </a:spcAft>
+                        <a:buNone/>
+                      </a:pPr>
+                      <a:r>
+                        <a:rPr lang="en-US" sz="1100">
+                          <a:effectLst/>
+                        </a:rPr>
+                        <a:t>Baseline &amp; Weighted</a:t>
+                      </a:r>
+                      <a:endParaRPr lang="en-US" sz="1100">
+                        <a:effectLst/>
+                        <a:latin typeface="Calibri" panose="020F0502020204030204" pitchFamily="34" charset="0"/>
+                        <a:ea typeface="Calibri" panose="020F0502020204030204" pitchFamily="34" charset="0"/>
+                      </a:endParaRPr>
+                    </a:p>
+                  </a:txBody>
+                  <a:tcPr marL="68580" marR="68580" marT="0" marB="0"/>
+                </a:tc>
+                <a:tc>
+                  <a:txBody>
+                    <a:bodyPr/>
+                    <a:lstStyle/>
+                    <a:p>
+                      <a:pPr marL="0" marR="0" algn="ctr">
+                        <a:lnSpc>
+                          <a:spcPct val="115000"/>
+                        </a:lnSpc>
+                        <a:spcAft>
+                          <a:spcPts val="1000"/>
+                        </a:spcAft>
+                        <a:buNone/>
+                      </a:pPr>
+                      <a:r>
+                        <a:rPr lang="en-US" sz="1100">
+                          <a:effectLst/>
+                        </a:rPr>
+                        <a:t>EPOCHS</a:t>
+                      </a:r>
+                      <a:endParaRPr lang="en-US" sz="1100">
+                        <a:effectLst/>
+                        <a:latin typeface="Calibri" panose="020F0502020204030204" pitchFamily="34" charset="0"/>
+                        <a:ea typeface="Calibri" panose="020F0502020204030204" pitchFamily="34" charset="0"/>
+                      </a:endParaRPr>
+                    </a:p>
+                  </a:txBody>
+                  <a:tcPr marL="68580" marR="68580" marT="0" marB="0"/>
+                </a:tc>
+                <a:tc>
+                  <a:txBody>
+                    <a:bodyPr/>
+                    <a:lstStyle/>
+                    <a:p>
+                      <a:pPr marL="0" marR="0" algn="ctr">
+                        <a:lnSpc>
+                          <a:spcPct val="115000"/>
+                        </a:lnSpc>
+                        <a:spcAft>
+                          <a:spcPts val="1000"/>
+                        </a:spcAft>
+                        <a:buNone/>
+                      </a:pPr>
+                      <a:r>
+                        <a:rPr lang="en-US" sz="1100">
+                          <a:effectLst/>
+                        </a:rPr>
+                        <a:t>20</a:t>
+                      </a:r>
+                      <a:endParaRPr lang="en-US" sz="1100">
+                        <a:effectLst/>
+                        <a:latin typeface="Calibri" panose="020F0502020204030204" pitchFamily="34" charset="0"/>
+                        <a:ea typeface="Calibri" panose="020F0502020204030204" pitchFamily="34" charset="0"/>
+                      </a:endParaRPr>
+                    </a:p>
+                  </a:txBody>
+                  <a:tcPr marL="68580" marR="68580" marT="0" marB="0"/>
+                </a:tc>
+                <a:extLst>
+                  <a:ext uri="{0D108BD9-81ED-4DB2-BD59-A6C34878D82A}">
+                    <a16:rowId xmlns:a16="http://schemas.microsoft.com/office/drawing/2014/main" val="3068494599"/>
+                  </a:ext>
+                </a:extLst>
+              </a:tr>
+              <a:tr h="0">
+                <a:tc>
+                  <a:txBody>
+                    <a:bodyPr/>
+                    <a:lstStyle/>
+                    <a:p>
+                      <a:pPr marL="0" marR="0" algn="ctr">
+                        <a:lnSpc>
+                          <a:spcPct val="115000"/>
+                        </a:lnSpc>
+                        <a:spcAft>
+                          <a:spcPts val="1000"/>
+                        </a:spcAft>
+                        <a:buNone/>
+                      </a:pPr>
+                      <a:r>
+                        <a:rPr lang="en-US" sz="1100">
+                          <a:effectLst/>
+                        </a:rPr>
+                        <a:t>Baseline &amp; Weighted</a:t>
+                      </a:r>
+                      <a:endParaRPr lang="en-US" sz="1100">
+                        <a:effectLst/>
+                        <a:latin typeface="Calibri" panose="020F0502020204030204" pitchFamily="34" charset="0"/>
+                        <a:ea typeface="Calibri" panose="020F0502020204030204" pitchFamily="34" charset="0"/>
+                      </a:endParaRPr>
+                    </a:p>
+                  </a:txBody>
+                  <a:tcPr marL="68580" marR="68580" marT="0" marB="0"/>
+                </a:tc>
+                <a:tc>
+                  <a:txBody>
+                    <a:bodyPr/>
+                    <a:lstStyle/>
+                    <a:p>
+                      <a:pPr marL="0" marR="0" algn="ctr">
+                        <a:lnSpc>
+                          <a:spcPct val="115000"/>
+                        </a:lnSpc>
+                        <a:spcAft>
+                          <a:spcPts val="1000"/>
+                        </a:spcAft>
+                        <a:buNone/>
+                      </a:pPr>
+                      <a:r>
+                        <a:rPr lang="en-US" sz="1100">
+                          <a:effectLst/>
+                        </a:rPr>
+                        <a:t>WARMUP_RATIO</a:t>
+                      </a:r>
+                      <a:endParaRPr lang="en-US" sz="1100">
+                        <a:effectLst/>
+                        <a:latin typeface="Calibri" panose="020F0502020204030204" pitchFamily="34" charset="0"/>
+                        <a:ea typeface="Calibri" panose="020F0502020204030204" pitchFamily="34" charset="0"/>
+                      </a:endParaRPr>
+                    </a:p>
+                  </a:txBody>
+                  <a:tcPr marL="68580" marR="68580" marT="0" marB="0"/>
+                </a:tc>
+                <a:tc>
+                  <a:txBody>
+                    <a:bodyPr/>
+                    <a:lstStyle/>
+                    <a:p>
+                      <a:pPr marL="0" marR="0" algn="ctr">
+                        <a:lnSpc>
+                          <a:spcPct val="115000"/>
+                        </a:lnSpc>
+                        <a:spcAft>
+                          <a:spcPts val="1000"/>
+                        </a:spcAft>
+                        <a:buNone/>
+                      </a:pPr>
+                      <a:r>
+                        <a:rPr lang="en-US" sz="1100">
+                          <a:effectLst/>
+                        </a:rPr>
+                        <a:t>0.1</a:t>
+                      </a:r>
+                      <a:endParaRPr lang="en-US" sz="1100">
+                        <a:effectLst/>
+                        <a:latin typeface="Calibri" panose="020F0502020204030204" pitchFamily="34" charset="0"/>
+                        <a:ea typeface="Calibri" panose="020F0502020204030204" pitchFamily="34" charset="0"/>
+                      </a:endParaRPr>
+                    </a:p>
+                  </a:txBody>
+                  <a:tcPr marL="68580" marR="68580" marT="0" marB="0"/>
+                </a:tc>
+                <a:extLst>
+                  <a:ext uri="{0D108BD9-81ED-4DB2-BD59-A6C34878D82A}">
+                    <a16:rowId xmlns:a16="http://schemas.microsoft.com/office/drawing/2014/main" val="3285514511"/>
+                  </a:ext>
+                </a:extLst>
+              </a:tr>
+              <a:tr h="0">
+                <a:tc>
+                  <a:txBody>
+                    <a:bodyPr/>
+                    <a:lstStyle/>
+                    <a:p>
+                      <a:pPr marL="0" marR="0" algn="ctr">
+                        <a:lnSpc>
+                          <a:spcPct val="115000"/>
+                        </a:lnSpc>
+                        <a:spcAft>
+                          <a:spcPts val="1000"/>
+                        </a:spcAft>
+                        <a:buNone/>
+                      </a:pPr>
+                      <a:r>
+                        <a:rPr lang="en-US" sz="1100">
+                          <a:effectLst/>
+                        </a:rPr>
+                        <a:t>Baseline &amp; Weighted</a:t>
+                      </a:r>
+                      <a:endParaRPr lang="en-US" sz="1100">
+                        <a:effectLst/>
+                        <a:latin typeface="Calibri" panose="020F0502020204030204" pitchFamily="34" charset="0"/>
+                        <a:ea typeface="Calibri" panose="020F0502020204030204" pitchFamily="34" charset="0"/>
+                      </a:endParaRPr>
+                    </a:p>
+                  </a:txBody>
+                  <a:tcPr marL="68580" marR="68580" marT="0" marB="0"/>
+                </a:tc>
+                <a:tc>
+                  <a:txBody>
+                    <a:bodyPr/>
+                    <a:lstStyle/>
+                    <a:p>
+                      <a:pPr marL="0" marR="0" algn="ctr">
+                        <a:lnSpc>
+                          <a:spcPct val="115000"/>
+                        </a:lnSpc>
+                        <a:spcAft>
+                          <a:spcPts val="1000"/>
+                        </a:spcAft>
+                        <a:buNone/>
+                      </a:pPr>
+                      <a:r>
+                        <a:rPr lang="en-US" sz="1100">
+                          <a:effectLst/>
+                        </a:rPr>
+                        <a:t>WEIGHT_DECAY</a:t>
+                      </a:r>
+                      <a:endParaRPr lang="en-US" sz="1100">
+                        <a:effectLst/>
+                        <a:latin typeface="Calibri" panose="020F0502020204030204" pitchFamily="34" charset="0"/>
+                        <a:ea typeface="Calibri" panose="020F0502020204030204" pitchFamily="34" charset="0"/>
+                      </a:endParaRPr>
+                    </a:p>
+                  </a:txBody>
+                  <a:tcPr marL="68580" marR="68580" marT="0" marB="0"/>
+                </a:tc>
+                <a:tc>
+                  <a:txBody>
+                    <a:bodyPr/>
+                    <a:lstStyle/>
+                    <a:p>
+                      <a:pPr marL="0" marR="0" algn="ctr">
+                        <a:lnSpc>
+                          <a:spcPct val="115000"/>
+                        </a:lnSpc>
+                        <a:spcAft>
+                          <a:spcPts val="1000"/>
+                        </a:spcAft>
+                        <a:buNone/>
+                      </a:pPr>
+                      <a:r>
+                        <a:rPr lang="en-US" sz="1100">
+                          <a:effectLst/>
+                        </a:rPr>
+                        <a:t>0.01</a:t>
+                      </a:r>
+                      <a:endParaRPr lang="en-US" sz="1100">
+                        <a:effectLst/>
+                        <a:latin typeface="Calibri" panose="020F0502020204030204" pitchFamily="34" charset="0"/>
+                        <a:ea typeface="Calibri" panose="020F0502020204030204" pitchFamily="34" charset="0"/>
+                      </a:endParaRPr>
+                    </a:p>
+                  </a:txBody>
+                  <a:tcPr marL="68580" marR="68580" marT="0" marB="0"/>
+                </a:tc>
+                <a:extLst>
+                  <a:ext uri="{0D108BD9-81ED-4DB2-BD59-A6C34878D82A}">
+                    <a16:rowId xmlns:a16="http://schemas.microsoft.com/office/drawing/2014/main" val="3716087994"/>
+                  </a:ext>
+                </a:extLst>
+              </a:tr>
+              <a:tr h="0">
+                <a:tc>
+                  <a:txBody>
+                    <a:bodyPr/>
+                    <a:lstStyle/>
+                    <a:p>
+                      <a:pPr marL="0" marR="0" algn="ctr">
+                        <a:lnSpc>
+                          <a:spcPct val="115000"/>
+                        </a:lnSpc>
+                        <a:spcAft>
+                          <a:spcPts val="1000"/>
+                        </a:spcAft>
+                        <a:buNone/>
+                      </a:pPr>
+                      <a:r>
+                        <a:rPr lang="en-US" sz="1100">
+                          <a:effectLst/>
+                        </a:rPr>
+                        <a:t>Baseline</a:t>
+                      </a:r>
+                      <a:endParaRPr lang="en-US" sz="1100">
+                        <a:effectLst/>
+                        <a:latin typeface="Calibri" panose="020F0502020204030204" pitchFamily="34" charset="0"/>
+                        <a:ea typeface="Calibri" panose="020F0502020204030204" pitchFamily="34" charset="0"/>
+                      </a:endParaRPr>
+                    </a:p>
+                  </a:txBody>
+                  <a:tcPr marL="68580" marR="68580" marT="0" marB="0"/>
+                </a:tc>
+                <a:tc>
+                  <a:txBody>
+                    <a:bodyPr/>
+                    <a:lstStyle/>
+                    <a:p>
+                      <a:pPr marL="0" marR="0" algn="ctr">
+                        <a:lnSpc>
+                          <a:spcPct val="115000"/>
+                        </a:lnSpc>
+                        <a:spcAft>
+                          <a:spcPts val="1000"/>
+                        </a:spcAft>
+                        <a:buNone/>
+                      </a:pPr>
+                      <a:r>
+                        <a:rPr lang="en-US" sz="1100">
+                          <a:effectLst/>
+                        </a:rPr>
+                        <a:t>LEARNING_RATE</a:t>
+                      </a:r>
+                      <a:endParaRPr lang="en-US" sz="1100">
+                        <a:effectLst/>
+                        <a:latin typeface="Calibri" panose="020F0502020204030204" pitchFamily="34" charset="0"/>
+                        <a:ea typeface="Calibri" panose="020F0502020204030204" pitchFamily="34" charset="0"/>
+                      </a:endParaRPr>
+                    </a:p>
+                  </a:txBody>
+                  <a:tcPr marL="68580" marR="68580" marT="0" marB="0"/>
+                </a:tc>
+                <a:tc>
+                  <a:txBody>
+                    <a:bodyPr/>
+                    <a:lstStyle/>
+                    <a:p>
+                      <a:pPr marL="0" marR="0" algn="ctr">
+                        <a:lnSpc>
+                          <a:spcPct val="115000"/>
+                        </a:lnSpc>
+                        <a:spcAft>
+                          <a:spcPts val="1000"/>
+                        </a:spcAft>
+                        <a:buNone/>
+                      </a:pPr>
+                      <a:r>
+                        <a:rPr lang="en-US" sz="1100">
+                          <a:effectLst/>
+                        </a:rPr>
+                        <a:t>2e-5</a:t>
+                      </a:r>
+                      <a:endParaRPr lang="en-US" sz="1100">
+                        <a:effectLst/>
+                        <a:latin typeface="Calibri" panose="020F0502020204030204" pitchFamily="34" charset="0"/>
+                        <a:ea typeface="Calibri" panose="020F0502020204030204" pitchFamily="34" charset="0"/>
+                      </a:endParaRPr>
+                    </a:p>
+                  </a:txBody>
+                  <a:tcPr marL="68580" marR="68580" marT="0" marB="0"/>
+                </a:tc>
+                <a:extLst>
+                  <a:ext uri="{0D108BD9-81ED-4DB2-BD59-A6C34878D82A}">
+                    <a16:rowId xmlns:a16="http://schemas.microsoft.com/office/drawing/2014/main" val="2778804449"/>
+                  </a:ext>
+                </a:extLst>
+              </a:tr>
+              <a:tr h="0">
+                <a:tc>
+                  <a:txBody>
+                    <a:bodyPr/>
+                    <a:lstStyle/>
+                    <a:p>
+                      <a:pPr marL="0" marR="0" algn="ctr">
+                        <a:lnSpc>
+                          <a:spcPct val="115000"/>
+                        </a:lnSpc>
+                        <a:spcAft>
+                          <a:spcPts val="1000"/>
+                        </a:spcAft>
+                        <a:buNone/>
+                      </a:pPr>
+                      <a:r>
+                        <a:rPr lang="en-US" sz="1100">
+                          <a:effectLst/>
+                        </a:rPr>
+                        <a:t>Weighted</a:t>
+                      </a:r>
+                      <a:endParaRPr lang="en-US" sz="1100">
+                        <a:effectLst/>
+                        <a:latin typeface="Calibri" panose="020F0502020204030204" pitchFamily="34" charset="0"/>
+                        <a:ea typeface="Calibri" panose="020F0502020204030204" pitchFamily="34" charset="0"/>
+                      </a:endParaRPr>
+                    </a:p>
+                  </a:txBody>
+                  <a:tcPr marL="68580" marR="68580" marT="0" marB="0"/>
+                </a:tc>
+                <a:tc>
+                  <a:txBody>
+                    <a:bodyPr/>
+                    <a:lstStyle/>
+                    <a:p>
+                      <a:pPr marL="0" marR="0" algn="ctr">
+                        <a:lnSpc>
+                          <a:spcPct val="115000"/>
+                        </a:lnSpc>
+                        <a:spcAft>
+                          <a:spcPts val="1000"/>
+                        </a:spcAft>
+                        <a:buNone/>
+                      </a:pPr>
+                      <a:r>
+                        <a:rPr lang="en-US" sz="1100">
+                          <a:effectLst/>
+                        </a:rPr>
+                        <a:t>LEARNING_RATE</a:t>
+                      </a:r>
+                      <a:endParaRPr lang="en-US" sz="1100">
+                        <a:effectLst/>
+                        <a:latin typeface="Calibri" panose="020F0502020204030204" pitchFamily="34" charset="0"/>
+                        <a:ea typeface="Calibri" panose="020F0502020204030204" pitchFamily="34" charset="0"/>
+                      </a:endParaRPr>
+                    </a:p>
+                  </a:txBody>
+                  <a:tcPr marL="68580" marR="68580" marT="0" marB="0"/>
+                </a:tc>
+                <a:tc>
+                  <a:txBody>
+                    <a:bodyPr/>
+                    <a:lstStyle/>
+                    <a:p>
+                      <a:pPr marL="0" marR="0" algn="ctr">
+                        <a:lnSpc>
+                          <a:spcPct val="115000"/>
+                        </a:lnSpc>
+                        <a:spcAft>
+                          <a:spcPts val="1000"/>
+                        </a:spcAft>
+                        <a:buNone/>
+                      </a:pPr>
+                      <a:r>
+                        <a:rPr lang="en-US" sz="1100">
+                          <a:effectLst/>
+                        </a:rPr>
+                        <a:t>6e-5</a:t>
+                      </a:r>
+                      <a:endParaRPr lang="en-US" sz="1100">
+                        <a:effectLst/>
+                        <a:latin typeface="Calibri" panose="020F0502020204030204" pitchFamily="34" charset="0"/>
+                        <a:ea typeface="Calibri" panose="020F0502020204030204" pitchFamily="34" charset="0"/>
+                      </a:endParaRPr>
+                    </a:p>
+                  </a:txBody>
+                  <a:tcPr marL="68580" marR="68580" marT="0" marB="0"/>
+                </a:tc>
+                <a:extLst>
+                  <a:ext uri="{0D108BD9-81ED-4DB2-BD59-A6C34878D82A}">
+                    <a16:rowId xmlns:a16="http://schemas.microsoft.com/office/drawing/2014/main" val="3028002117"/>
+                  </a:ext>
+                </a:extLst>
+              </a:tr>
+              <a:tr h="0">
+                <a:tc>
+                  <a:txBody>
+                    <a:bodyPr/>
+                    <a:lstStyle/>
+                    <a:p>
+                      <a:pPr marL="0" marR="0" algn="ctr">
+                        <a:lnSpc>
+                          <a:spcPct val="115000"/>
+                        </a:lnSpc>
+                        <a:spcAft>
+                          <a:spcPts val="1000"/>
+                        </a:spcAft>
+                        <a:buNone/>
+                      </a:pPr>
+                      <a:r>
+                        <a:rPr lang="en-US" sz="1100">
+                          <a:effectLst/>
+                        </a:rPr>
+                        <a:t>Baseline &amp; Weighted</a:t>
+                      </a:r>
+                      <a:endParaRPr lang="en-US" sz="1100">
+                        <a:effectLst/>
+                        <a:latin typeface="Calibri" panose="020F0502020204030204" pitchFamily="34" charset="0"/>
+                        <a:ea typeface="Calibri" panose="020F0502020204030204" pitchFamily="34" charset="0"/>
+                      </a:endParaRPr>
+                    </a:p>
+                  </a:txBody>
+                  <a:tcPr marL="68580" marR="68580" marT="0" marB="0"/>
+                </a:tc>
+                <a:tc>
+                  <a:txBody>
+                    <a:bodyPr/>
+                    <a:lstStyle/>
+                    <a:p>
+                      <a:pPr marL="0" marR="0" algn="ctr">
+                        <a:lnSpc>
+                          <a:spcPct val="115000"/>
+                        </a:lnSpc>
+                        <a:spcAft>
+                          <a:spcPts val="1000"/>
+                        </a:spcAft>
+                        <a:buNone/>
+                      </a:pPr>
+                      <a:r>
+                        <a:rPr lang="en-US" sz="1100">
+                          <a:effectLst/>
+                        </a:rPr>
+                        <a:t>LR_SCHEDULER</a:t>
+                      </a:r>
+                      <a:endParaRPr lang="en-US" sz="1100">
+                        <a:effectLst/>
+                        <a:latin typeface="Calibri" panose="020F0502020204030204" pitchFamily="34" charset="0"/>
+                        <a:ea typeface="Calibri" panose="020F0502020204030204" pitchFamily="34" charset="0"/>
+                      </a:endParaRPr>
+                    </a:p>
+                  </a:txBody>
+                  <a:tcPr marL="68580" marR="68580" marT="0" marB="0"/>
+                </a:tc>
+                <a:tc>
+                  <a:txBody>
+                    <a:bodyPr/>
+                    <a:lstStyle/>
+                    <a:p>
+                      <a:pPr marL="0" marR="0" algn="ctr">
+                        <a:lnSpc>
+                          <a:spcPct val="115000"/>
+                        </a:lnSpc>
+                        <a:spcAft>
+                          <a:spcPts val="1000"/>
+                        </a:spcAft>
+                        <a:buNone/>
+                      </a:pPr>
+                      <a:r>
+                        <a:rPr lang="en-US" sz="1100" dirty="0">
+                          <a:effectLst/>
+                        </a:rPr>
+                        <a:t>cosine</a:t>
+                      </a:r>
+                      <a:endParaRPr lang="en-US" sz="1100" dirty="0">
+                        <a:effectLst/>
+                        <a:latin typeface="Calibri" panose="020F0502020204030204" pitchFamily="34" charset="0"/>
+                        <a:ea typeface="Calibri" panose="020F0502020204030204" pitchFamily="34" charset="0"/>
+                      </a:endParaRPr>
+                    </a:p>
+                  </a:txBody>
+                  <a:tcPr marL="68580" marR="68580" marT="0" marB="0"/>
+                </a:tc>
+                <a:extLst>
+                  <a:ext uri="{0D108BD9-81ED-4DB2-BD59-A6C34878D82A}">
+                    <a16:rowId xmlns:a16="http://schemas.microsoft.com/office/drawing/2014/main" val="3597047939"/>
+                  </a:ext>
+                </a:extLst>
+              </a:tr>
+            </a:tbl>
+          </a:graphicData>
+        </a:graphic>
+      </p:graphicFrame>
     </p:spTree>
   </p:cSld>
   <p:clrMapOvr>
@@ -16153,7 +16147,7 @@
         <p:spPr>
           <a:xfrm>
             <a:off x="566928" y="1216152"/>
-            <a:ext cx="5285232" cy="731520"/>
+            <a:ext cx="5285232" cy="646331"/>
           </a:xfrm>
           <a:prstGeom prst="rect">
             <a:avLst/>
@@ -16167,12 +16161,28 @@
           <a:lstStyle/>
           <a:p>
             <a:r>
-              <a:rPr sz="1200">
-                <a:solidFill>
-                  <a:srgbClr val="1A1A1A"/>
-                </a:solidFill>
-              </a:rPr>
-              <a:t>Unlike token classification, MedGemma generates a free-text sequence:
+              <a:rPr sz="1200" dirty="0">
+                <a:solidFill>
+                  <a:srgbClr val="1A1A1A"/>
+                </a:solidFill>
+              </a:rPr>
+              <a:t>Unlike token classification, </a:t>
+            </a:r>
+            <a:r>
+              <a:rPr sz="1200" dirty="0" err="1">
+                <a:solidFill>
+                  <a:srgbClr val="1A1A1A"/>
+                </a:solidFill>
+              </a:rPr>
+              <a:t>MedGemma</a:t>
+            </a:r>
+            <a:r>
+              <a:rPr sz="1200" dirty="0">
+                <a:solidFill>
+                  <a:srgbClr val="1A1A1A"/>
+                </a:solidFill>
+              </a:rPr>
+              <a:t> generates a text sequence:
 "aspirin: B-T103, prescribed: O, daily: O, …"
 Each token is explicitly labelled in the output text.</a:t>
             </a:r>
@@ -16187,7 +16197,7 @@
         </p:nvSpPr>
         <p:spPr>
           <a:xfrm>
-            <a:off x="457200" y="2103120"/>
+            <a:off x="457200" y="2112264"/>
             <a:ext cx="4572000" cy="256032"/>
           </a:xfrm>
           <a:prstGeom prst="rect">
@@ -16202,7 +16212,7 @@
           <a:lstStyle/>
           <a:p>
             <a:r>
-              <a:rPr sz="1300" b="1">
+              <a:rPr sz="1300" b="1" dirty="0">
                 <a:solidFill>
                   <a:srgbClr val="1A56A8"/>
                 </a:solidFill>
@@ -16220,8 +16230,8 @@
         </p:nvSpPr>
         <p:spPr>
           <a:xfrm>
-            <a:off x="457200" y="2404872"/>
-            <a:ext cx="5303520" cy="1828800"/>
+            <a:off x="443484" y="5005111"/>
+            <a:ext cx="5303520" cy="284693"/>
           </a:xfrm>
           <a:prstGeom prst="rect">
             <a:avLst/>
@@ -16240,88 +16250,42 @@
               </a:spcBef>
             </a:pPr>
             <a:r>
-              <a:rPr sz="1250">
-                <a:solidFill>
-                  <a:srgbClr val="1A1A1A"/>
-                </a:solidFill>
-              </a:rPr>
-              <a:t>• QLoRA: 4-bit NF4, rank 16, alpha 16, no dropout</a:t>
-            </a:r>
-          </a:p>
-          <a:p>
-            <a:pPr>
-              <a:spcBef>
-                <a:spcPts val="300"/>
-              </a:spcBef>
-            </a:pPr>
-            <a:r>
-              <a:rPr sz="1250">
-                <a:solidFill>
-                  <a:srgbClr val="1A1A1A"/>
-                </a:solidFill>
-              </a:rPr>
-              <a:t>• Unsloth for 2× training speed</a:t>
-            </a:r>
-          </a:p>
-          <a:p>
-            <a:pPr>
-              <a:spcBef>
-                <a:spcPts val="300"/>
-              </a:spcBef>
-            </a:pPr>
-            <a:r>
-              <a:rPr sz="1250">
-                <a:solidFill>
-                  <a:srgbClr val="1A1A1A"/>
-                </a:solidFill>
-              </a:rPr>
-              <a:t>• SFTTrainer, max 300 steps (≈ 20% of 1 epoch)</a:t>
-            </a:r>
-          </a:p>
-          <a:p>
-            <a:pPr>
-              <a:spcBef>
-                <a:spcPts val="300"/>
-              </a:spcBef>
-            </a:pPr>
-            <a:r>
-              <a:rPr sz="1250">
-                <a:solidFill>
-                  <a:srgbClr val="1A1A1A"/>
-                </a:solidFill>
-              </a:rPr>
-              <a:t>• LR = 2e-4, batch = 4, grad accum = 4 (eff. batch 16)</a:t>
-            </a:r>
-          </a:p>
-          <a:p>
-            <a:pPr>
-              <a:spcBef>
-                <a:spcPts val="300"/>
-              </a:spcBef>
-            </a:pPr>
-            <a:r>
-              <a:rPr sz="1250">
-                <a:solidFill>
-                  <a:srgbClr val="1A1A1A"/>
-                </a:solidFill>
-              </a:rPr>
-              <a:t>• Evaluation: qualitative inspection of 3 validation samples only</a:t>
-            </a:r>
-          </a:p>
-          <a:p>
-            <a:pPr>
-              <a:spcBef>
-                <a:spcPts val="300"/>
-              </a:spcBef>
-            </a:pPr>
-            <a:r>
-              <a:rPr sz="1250">
-                <a:solidFill>
-                  <a:srgbClr val="1A1A1A"/>
-                </a:solidFill>
-              </a:rPr>
-              <a:t>• Checkpoint: alexd063/bio-gemma4bit-finetuned-medmentions</a:t>
-            </a:r>
+              <a:rPr sz="1200" dirty="0">
+                <a:solidFill>
+                  <a:srgbClr val="1A1A1A"/>
+                </a:solidFill>
+              </a:rPr>
+              <a:t>• Checkpoint: </a:t>
+            </a:r>
+            <a:r>
+              <a:rPr lang="en-US" sz="1200" dirty="0"/>
+              <a:t>alexd063/</a:t>
+            </a:r>
+            <a:r>
+              <a:rPr lang="en-US" sz="1200" dirty="0" err="1"/>
+              <a:t>medgemma</a:t>
+            </a:r>
+            <a:r>
+              <a:rPr lang="en-US" sz="1200" dirty="0"/>
+              <a:t>-finetuned-</a:t>
+            </a:r>
+            <a:r>
+              <a:rPr lang="en-US" sz="1200" dirty="0" err="1"/>
+              <a:t>medmentions</a:t>
+            </a:r>
+            <a:r>
+              <a:rPr lang="en-US" sz="1200" dirty="0"/>
+              <a:t>-</a:t>
+            </a:r>
+            <a:r>
+              <a:rPr lang="en-US" sz="1200" dirty="0" err="1"/>
+              <a:t>ner</a:t>
+            </a:r>
+            <a:endParaRPr sz="1200" dirty="0">
+              <a:solidFill>
+                <a:srgbClr val="1A1A1A"/>
+              </a:solidFill>
+            </a:endParaRPr>
           </a:p>
         </p:txBody>
       </p:sp>
@@ -16333,7 +16297,7 @@
         </p:nvSpPr>
         <p:spPr>
           <a:xfrm>
-            <a:off x="457200" y="4315968"/>
+            <a:off x="443484" y="5601259"/>
             <a:ext cx="41148" cy="621792"/>
           </a:xfrm>
           <a:prstGeom prst="rect">
@@ -16377,7 +16341,7 @@
         </p:nvSpPr>
         <p:spPr>
           <a:xfrm>
-            <a:off x="498348" y="4315968"/>
+            <a:off x="498348" y="5582412"/>
             <a:ext cx="5445252" cy="621792"/>
           </a:xfrm>
           <a:prstGeom prst="rect">
@@ -16421,7 +16385,7 @@
         </p:nvSpPr>
         <p:spPr>
           <a:xfrm>
-            <a:off x="566928" y="4389120"/>
+            <a:off x="566928" y="5696712"/>
             <a:ext cx="5285232" cy="430887"/>
           </a:xfrm>
           <a:prstGeom prst="rect">
@@ -16442,7 +16406,23 @@
                 </a:solidFill>
               </a:rPr>
               <a:t>Only 300 of ~1,462 steps trained (underfitting).
-Parsing 'token: tag' format from free text is fragile.</a:t>
+Parsing 'token: tag' format from free text is </a:t>
+            </a:r>
+            <a:r>
+              <a:rPr lang="en-US" sz="1100" dirty="0">
+                <a:solidFill>
+                  <a:srgbClr val="1A1A1A"/>
+                </a:solidFill>
+              </a:rPr>
+              <a:t>unreliable</a:t>
+            </a:r>
+            <a:r>
+              <a:rPr sz="1100" dirty="0">
+                <a:solidFill>
+                  <a:srgbClr val="1A1A1A"/>
+                </a:solidFill>
+              </a:rPr>
+              <a:t>.</a:t>
             </a:r>
           </a:p>
         </p:txBody>
@@ -16550,7 +16530,7 @@
           <a:p>
             <a:pPr algn="l"/>
             <a:r>
-              <a:rPr sz="1050" b="0">
+              <a:rPr sz="1050" b="0" dirty="0">
                 <a:solidFill>
                   <a:srgbClr val="1A1A1A"/>
                 </a:solidFill>
@@ -16739,6 +16719,901 @@
           </a:p>
         </p:txBody>
       </p:sp>
+      <p:graphicFrame>
+        <p:nvGraphicFramePr>
+          <p:cNvPr id="25" name="Table 24">
+            <a:extLst>
+              <a:ext uri="{FF2B5EF4-FFF2-40B4-BE49-F238E27FC236}">
+                <a16:creationId xmlns:a16="http://schemas.microsoft.com/office/drawing/2014/main" id="{B3E9E521-E935-8243-8643-41EAD2E24B76}"/>
+              </a:ext>
+            </a:extLst>
+          </p:cNvPr>
+          <p:cNvGraphicFramePr>
+            <a:graphicFrameLocks noGrp="1"/>
+          </p:cNvGraphicFramePr>
+          <p:nvPr>
+            <p:extLst>
+              <p:ext uri="{D42A27DB-BD31-4B8C-83A1-F6EECF244321}">
+                <p14:modId xmlns:p14="http://schemas.microsoft.com/office/powerpoint/2010/main" val="635918601"/>
+              </p:ext>
+            </p:extLst>
+          </p:nvPr>
+        </p:nvGraphicFramePr>
+        <p:xfrm>
+          <a:off x="499110" y="2395728"/>
+          <a:ext cx="3981450" cy="2358460"/>
+        </p:xfrm>
+        <a:graphic>
+          <a:graphicData uri="http://schemas.openxmlformats.org/drawingml/2006/table">
+            <a:tbl>
+              <a:tblPr bandRow="1">
+                <a:tableStyleId>{5C22544A-7EE6-4342-B048-85BDC9FD1C3A}</a:tableStyleId>
+              </a:tblPr>
+              <a:tblGrid>
+                <a:gridCol w="1990725">
+                  <a:extLst>
+                    <a:ext uri="{9D8B030D-6E8A-4147-A177-3AD203B41FA5}">
+                      <a16:colId xmlns:a16="http://schemas.microsoft.com/office/drawing/2014/main" val="1217685546"/>
+                    </a:ext>
+                  </a:extLst>
+                </a:gridCol>
+                <a:gridCol w="1990725">
+                  <a:extLst>
+                    <a:ext uri="{9D8B030D-6E8A-4147-A177-3AD203B41FA5}">
+                      <a16:colId xmlns:a16="http://schemas.microsoft.com/office/drawing/2014/main" val="1040245924"/>
+                    </a:ext>
+                  </a:extLst>
+                </a:gridCol>
+              </a:tblGrid>
+              <a:tr h="0">
+                <a:tc>
+                  <a:txBody>
+                    <a:bodyPr/>
+                    <a:lstStyle/>
+                    <a:p>
+                      <a:pPr marL="0" marR="0" algn="ctr">
+                        <a:lnSpc>
+                          <a:spcPct val="115000"/>
+                        </a:lnSpc>
+                        <a:spcAft>
+                          <a:spcPts val="1000"/>
+                        </a:spcAft>
+                        <a:buNone/>
+                      </a:pPr>
+                      <a:r>
+                        <a:rPr lang="en-US" sz="1100">
+                          <a:effectLst/>
+                        </a:rPr>
+                        <a:t>Hyperparameter</a:t>
+                      </a:r>
+                      <a:endParaRPr lang="en-US" sz="1100">
+                        <a:effectLst/>
+                        <a:latin typeface="Calibri" panose="020F0502020204030204" pitchFamily="34" charset="0"/>
+                        <a:ea typeface="Calibri" panose="020F0502020204030204" pitchFamily="34" charset="0"/>
+                      </a:endParaRPr>
+                    </a:p>
+                  </a:txBody>
+                  <a:tcPr marL="68580" marR="68580" marT="0" marB="0"/>
+                </a:tc>
+                <a:tc>
+                  <a:txBody>
+                    <a:bodyPr/>
+                    <a:lstStyle/>
+                    <a:p>
+                      <a:pPr marL="0" marR="0" algn="ctr">
+                        <a:lnSpc>
+                          <a:spcPct val="115000"/>
+                        </a:lnSpc>
+                        <a:spcAft>
+                          <a:spcPts val="1000"/>
+                        </a:spcAft>
+                        <a:buNone/>
+                      </a:pPr>
+                      <a:r>
+                        <a:rPr lang="en-US" sz="1100">
+                          <a:effectLst/>
+                        </a:rPr>
+                        <a:t>Value</a:t>
+                      </a:r>
+                      <a:endParaRPr lang="en-US" sz="1100">
+                        <a:effectLst/>
+                        <a:latin typeface="Calibri" panose="020F0502020204030204" pitchFamily="34" charset="0"/>
+                        <a:ea typeface="Calibri" panose="020F0502020204030204" pitchFamily="34" charset="0"/>
+                      </a:endParaRPr>
+                    </a:p>
+                  </a:txBody>
+                  <a:tcPr marL="68580" marR="68580" marT="0" marB="0"/>
+                </a:tc>
+                <a:extLst>
+                  <a:ext uri="{0D108BD9-81ED-4DB2-BD59-A6C34878D82A}">
+                    <a16:rowId xmlns:a16="http://schemas.microsoft.com/office/drawing/2014/main" val="2095194431"/>
+                  </a:ext>
+                </a:extLst>
+              </a:tr>
+              <a:tr h="0">
+                <a:tc>
+                  <a:txBody>
+                    <a:bodyPr/>
+                    <a:lstStyle/>
+                    <a:p>
+                      <a:pPr marL="0" marR="0" algn="ctr">
+                        <a:lnSpc>
+                          <a:spcPct val="115000"/>
+                        </a:lnSpc>
+                        <a:spcAft>
+                          <a:spcPts val="1000"/>
+                        </a:spcAft>
+                        <a:buNone/>
+                      </a:pPr>
+                      <a:r>
+                        <a:rPr lang="en-US" sz="1100">
+                          <a:effectLst/>
+                        </a:rPr>
+                        <a:t>MAX_SEQ_LENGTH</a:t>
+                      </a:r>
+                      <a:endParaRPr lang="en-US" sz="1100">
+                        <a:effectLst/>
+                        <a:latin typeface="Calibri" panose="020F0502020204030204" pitchFamily="34" charset="0"/>
+                        <a:ea typeface="Calibri" panose="020F0502020204030204" pitchFamily="34" charset="0"/>
+                      </a:endParaRPr>
+                    </a:p>
+                  </a:txBody>
+                  <a:tcPr marL="68580" marR="68580" marT="0" marB="0"/>
+                </a:tc>
+                <a:tc>
+                  <a:txBody>
+                    <a:bodyPr/>
+                    <a:lstStyle/>
+                    <a:p>
+                      <a:pPr marL="0" marR="0" algn="ctr">
+                        <a:lnSpc>
+                          <a:spcPct val="115000"/>
+                        </a:lnSpc>
+                        <a:spcAft>
+                          <a:spcPts val="1000"/>
+                        </a:spcAft>
+                        <a:buNone/>
+                      </a:pPr>
+                      <a:r>
+                        <a:rPr lang="en-US" sz="1100">
+                          <a:effectLst/>
+                        </a:rPr>
+                        <a:t>512</a:t>
+                      </a:r>
+                      <a:endParaRPr lang="en-US" sz="1100">
+                        <a:effectLst/>
+                        <a:latin typeface="Calibri" panose="020F0502020204030204" pitchFamily="34" charset="0"/>
+                        <a:ea typeface="Calibri" panose="020F0502020204030204" pitchFamily="34" charset="0"/>
+                      </a:endParaRPr>
+                    </a:p>
+                  </a:txBody>
+                  <a:tcPr marL="68580" marR="68580" marT="0" marB="0"/>
+                </a:tc>
+                <a:extLst>
+                  <a:ext uri="{0D108BD9-81ED-4DB2-BD59-A6C34878D82A}">
+                    <a16:rowId xmlns:a16="http://schemas.microsoft.com/office/drawing/2014/main" val="2281021271"/>
+                  </a:ext>
+                </a:extLst>
+              </a:tr>
+              <a:tr h="0">
+                <a:tc>
+                  <a:txBody>
+                    <a:bodyPr/>
+                    <a:lstStyle/>
+                    <a:p>
+                      <a:pPr marL="0" marR="0" algn="ctr">
+                        <a:lnSpc>
+                          <a:spcPct val="115000"/>
+                        </a:lnSpc>
+                        <a:spcAft>
+                          <a:spcPts val="1000"/>
+                        </a:spcAft>
+                        <a:buNone/>
+                      </a:pPr>
+                      <a:r>
+                        <a:rPr lang="en-US" sz="1100">
+                          <a:effectLst/>
+                        </a:rPr>
+                        <a:t>LORA_R</a:t>
+                      </a:r>
+                      <a:endParaRPr lang="en-US" sz="1100">
+                        <a:effectLst/>
+                        <a:latin typeface="Calibri" panose="020F0502020204030204" pitchFamily="34" charset="0"/>
+                        <a:ea typeface="Calibri" panose="020F0502020204030204" pitchFamily="34" charset="0"/>
+                      </a:endParaRPr>
+                    </a:p>
+                  </a:txBody>
+                  <a:tcPr marL="68580" marR="68580" marT="0" marB="0"/>
+                </a:tc>
+                <a:tc>
+                  <a:txBody>
+                    <a:bodyPr/>
+                    <a:lstStyle/>
+                    <a:p>
+                      <a:pPr marL="0" marR="0" algn="ctr">
+                        <a:lnSpc>
+                          <a:spcPct val="115000"/>
+                        </a:lnSpc>
+                        <a:spcAft>
+                          <a:spcPts val="1000"/>
+                        </a:spcAft>
+                        <a:buNone/>
+                      </a:pPr>
+                      <a:r>
+                        <a:rPr lang="en-US" sz="1100">
+                          <a:effectLst/>
+                        </a:rPr>
+                        <a:t>16</a:t>
+                      </a:r>
+                      <a:endParaRPr lang="en-US" sz="1100">
+                        <a:effectLst/>
+                        <a:latin typeface="Calibri" panose="020F0502020204030204" pitchFamily="34" charset="0"/>
+                        <a:ea typeface="Calibri" panose="020F0502020204030204" pitchFamily="34" charset="0"/>
+                      </a:endParaRPr>
+                    </a:p>
+                  </a:txBody>
+                  <a:tcPr marL="68580" marR="68580" marT="0" marB="0"/>
+                </a:tc>
+                <a:extLst>
+                  <a:ext uri="{0D108BD9-81ED-4DB2-BD59-A6C34878D82A}">
+                    <a16:rowId xmlns:a16="http://schemas.microsoft.com/office/drawing/2014/main" val="271333810"/>
+                  </a:ext>
+                </a:extLst>
+              </a:tr>
+              <a:tr h="0">
+                <a:tc>
+                  <a:txBody>
+                    <a:bodyPr/>
+                    <a:lstStyle/>
+                    <a:p>
+                      <a:pPr marL="0" marR="0" algn="ctr">
+                        <a:lnSpc>
+                          <a:spcPct val="115000"/>
+                        </a:lnSpc>
+                        <a:spcAft>
+                          <a:spcPts val="1000"/>
+                        </a:spcAft>
+                        <a:buNone/>
+                      </a:pPr>
+                      <a:r>
+                        <a:rPr lang="en-US" sz="1100">
+                          <a:effectLst/>
+                        </a:rPr>
+                        <a:t>LORA_ALPHA</a:t>
+                      </a:r>
+                      <a:endParaRPr lang="en-US" sz="1100">
+                        <a:effectLst/>
+                        <a:latin typeface="Calibri" panose="020F0502020204030204" pitchFamily="34" charset="0"/>
+                        <a:ea typeface="Calibri" panose="020F0502020204030204" pitchFamily="34" charset="0"/>
+                      </a:endParaRPr>
+                    </a:p>
+                  </a:txBody>
+                  <a:tcPr marL="68580" marR="68580" marT="0" marB="0"/>
+                </a:tc>
+                <a:tc>
+                  <a:txBody>
+                    <a:bodyPr/>
+                    <a:lstStyle/>
+                    <a:p>
+                      <a:pPr marL="0" marR="0" algn="ctr">
+                        <a:lnSpc>
+                          <a:spcPct val="115000"/>
+                        </a:lnSpc>
+                        <a:spcAft>
+                          <a:spcPts val="1000"/>
+                        </a:spcAft>
+                        <a:buNone/>
+                      </a:pPr>
+                      <a:r>
+                        <a:rPr lang="en-US" sz="1100">
+                          <a:effectLst/>
+                        </a:rPr>
+                        <a:t>16</a:t>
+                      </a:r>
+                      <a:endParaRPr lang="en-US" sz="1100">
+                        <a:effectLst/>
+                        <a:latin typeface="Calibri" panose="020F0502020204030204" pitchFamily="34" charset="0"/>
+                        <a:ea typeface="Calibri" panose="020F0502020204030204" pitchFamily="34" charset="0"/>
+                      </a:endParaRPr>
+                    </a:p>
+                  </a:txBody>
+                  <a:tcPr marL="68580" marR="68580" marT="0" marB="0"/>
+                </a:tc>
+                <a:extLst>
+                  <a:ext uri="{0D108BD9-81ED-4DB2-BD59-A6C34878D82A}">
+                    <a16:rowId xmlns:a16="http://schemas.microsoft.com/office/drawing/2014/main" val="938178139"/>
+                  </a:ext>
+                </a:extLst>
+              </a:tr>
+              <a:tr h="0">
+                <a:tc>
+                  <a:txBody>
+                    <a:bodyPr/>
+                    <a:lstStyle/>
+                    <a:p>
+                      <a:pPr marL="0" marR="0" algn="ctr">
+                        <a:lnSpc>
+                          <a:spcPct val="115000"/>
+                        </a:lnSpc>
+                        <a:spcAft>
+                          <a:spcPts val="1000"/>
+                        </a:spcAft>
+                        <a:buNone/>
+                      </a:pPr>
+                      <a:r>
+                        <a:rPr lang="en-US" sz="1100">
+                          <a:effectLst/>
+                        </a:rPr>
+                        <a:t>LORA_DROPOUT</a:t>
+                      </a:r>
+                      <a:endParaRPr lang="en-US" sz="1100">
+                        <a:effectLst/>
+                        <a:latin typeface="Calibri" panose="020F0502020204030204" pitchFamily="34" charset="0"/>
+                        <a:ea typeface="Calibri" panose="020F0502020204030204" pitchFamily="34" charset="0"/>
+                      </a:endParaRPr>
+                    </a:p>
+                  </a:txBody>
+                  <a:tcPr marL="68580" marR="68580" marT="0" marB="0"/>
+                </a:tc>
+                <a:tc>
+                  <a:txBody>
+                    <a:bodyPr/>
+                    <a:lstStyle/>
+                    <a:p>
+                      <a:pPr marL="0" marR="0" algn="ctr">
+                        <a:lnSpc>
+                          <a:spcPct val="115000"/>
+                        </a:lnSpc>
+                        <a:spcAft>
+                          <a:spcPts val="1000"/>
+                        </a:spcAft>
+                        <a:buNone/>
+                      </a:pPr>
+                      <a:r>
+                        <a:rPr lang="en-US" sz="1100">
+                          <a:effectLst/>
+                        </a:rPr>
+                        <a:t>0</a:t>
+                      </a:r>
+                      <a:endParaRPr lang="en-US" sz="1100">
+                        <a:effectLst/>
+                        <a:latin typeface="Calibri" panose="020F0502020204030204" pitchFamily="34" charset="0"/>
+                        <a:ea typeface="Calibri" panose="020F0502020204030204" pitchFamily="34" charset="0"/>
+                      </a:endParaRPr>
+                    </a:p>
+                  </a:txBody>
+                  <a:tcPr marL="68580" marR="68580" marT="0" marB="0"/>
+                </a:tc>
+                <a:extLst>
+                  <a:ext uri="{0D108BD9-81ED-4DB2-BD59-A6C34878D82A}">
+                    <a16:rowId xmlns:a16="http://schemas.microsoft.com/office/drawing/2014/main" val="2338477558"/>
+                  </a:ext>
+                </a:extLst>
+              </a:tr>
+              <a:tr h="0">
+                <a:tc>
+                  <a:txBody>
+                    <a:bodyPr/>
+                    <a:lstStyle/>
+                    <a:p>
+                      <a:pPr marL="0" marR="0" algn="ctr">
+                        <a:lnSpc>
+                          <a:spcPct val="115000"/>
+                        </a:lnSpc>
+                        <a:spcAft>
+                          <a:spcPts val="1000"/>
+                        </a:spcAft>
+                        <a:buNone/>
+                      </a:pPr>
+                      <a:r>
+                        <a:rPr lang="en-US" sz="1100">
+                          <a:effectLst/>
+                        </a:rPr>
+                        <a:t>BATCH_SIZE</a:t>
+                      </a:r>
+                      <a:endParaRPr lang="en-US" sz="1100">
+                        <a:effectLst/>
+                        <a:latin typeface="Calibri" panose="020F0502020204030204" pitchFamily="34" charset="0"/>
+                        <a:ea typeface="Calibri" panose="020F0502020204030204" pitchFamily="34" charset="0"/>
+                      </a:endParaRPr>
+                    </a:p>
+                  </a:txBody>
+                  <a:tcPr marL="68580" marR="68580" marT="0" marB="0"/>
+                </a:tc>
+                <a:tc>
+                  <a:txBody>
+                    <a:bodyPr/>
+                    <a:lstStyle/>
+                    <a:p>
+                      <a:pPr marL="0" marR="0" algn="ctr">
+                        <a:lnSpc>
+                          <a:spcPct val="115000"/>
+                        </a:lnSpc>
+                        <a:spcAft>
+                          <a:spcPts val="1000"/>
+                        </a:spcAft>
+                        <a:buNone/>
+                      </a:pPr>
+                      <a:r>
+                        <a:rPr lang="en-US" sz="1100">
+                          <a:effectLst/>
+                        </a:rPr>
+                        <a:t>4</a:t>
+                      </a:r>
+                      <a:endParaRPr lang="en-US" sz="1100">
+                        <a:effectLst/>
+                        <a:latin typeface="Calibri" panose="020F0502020204030204" pitchFamily="34" charset="0"/>
+                        <a:ea typeface="Calibri" panose="020F0502020204030204" pitchFamily="34" charset="0"/>
+                      </a:endParaRPr>
+                    </a:p>
+                  </a:txBody>
+                  <a:tcPr marL="68580" marR="68580" marT="0" marB="0"/>
+                </a:tc>
+                <a:extLst>
+                  <a:ext uri="{0D108BD9-81ED-4DB2-BD59-A6C34878D82A}">
+                    <a16:rowId xmlns:a16="http://schemas.microsoft.com/office/drawing/2014/main" val="205379488"/>
+                  </a:ext>
+                </a:extLst>
+              </a:tr>
+              <a:tr h="0">
+                <a:tc>
+                  <a:txBody>
+                    <a:bodyPr/>
+                    <a:lstStyle/>
+                    <a:p>
+                      <a:pPr marL="0" marR="0" algn="ctr">
+                        <a:lnSpc>
+                          <a:spcPct val="115000"/>
+                        </a:lnSpc>
+                        <a:spcAft>
+                          <a:spcPts val="1000"/>
+                        </a:spcAft>
+                        <a:buNone/>
+                      </a:pPr>
+                      <a:r>
+                        <a:rPr lang="en-US" sz="1100">
+                          <a:effectLst/>
+                        </a:rPr>
+                        <a:t>GRAD_ACCUM_STEPS</a:t>
+                      </a:r>
+                      <a:endParaRPr lang="en-US" sz="1100">
+                        <a:effectLst/>
+                        <a:latin typeface="Calibri" panose="020F0502020204030204" pitchFamily="34" charset="0"/>
+                        <a:ea typeface="Calibri" panose="020F0502020204030204" pitchFamily="34" charset="0"/>
+                      </a:endParaRPr>
+                    </a:p>
+                  </a:txBody>
+                  <a:tcPr marL="68580" marR="68580" marT="0" marB="0"/>
+                </a:tc>
+                <a:tc>
+                  <a:txBody>
+                    <a:bodyPr/>
+                    <a:lstStyle/>
+                    <a:p>
+                      <a:pPr marL="0" marR="0" algn="ctr">
+                        <a:lnSpc>
+                          <a:spcPct val="115000"/>
+                        </a:lnSpc>
+                        <a:spcAft>
+                          <a:spcPts val="1000"/>
+                        </a:spcAft>
+                        <a:buNone/>
+                      </a:pPr>
+                      <a:r>
+                        <a:rPr lang="en-US" sz="1100">
+                          <a:effectLst/>
+                        </a:rPr>
+                        <a:t>4</a:t>
+                      </a:r>
+                      <a:endParaRPr lang="en-US" sz="1100">
+                        <a:effectLst/>
+                        <a:latin typeface="Calibri" panose="020F0502020204030204" pitchFamily="34" charset="0"/>
+                        <a:ea typeface="Calibri" panose="020F0502020204030204" pitchFamily="34" charset="0"/>
+                      </a:endParaRPr>
+                    </a:p>
+                  </a:txBody>
+                  <a:tcPr marL="68580" marR="68580" marT="0" marB="0"/>
+                </a:tc>
+                <a:extLst>
+                  <a:ext uri="{0D108BD9-81ED-4DB2-BD59-A6C34878D82A}">
+                    <a16:rowId xmlns:a16="http://schemas.microsoft.com/office/drawing/2014/main" val="4192219730"/>
+                  </a:ext>
+                </a:extLst>
+              </a:tr>
+              <a:tr h="0">
+                <a:tc>
+                  <a:txBody>
+                    <a:bodyPr/>
+                    <a:lstStyle/>
+                    <a:p>
+                      <a:pPr marL="0" marR="0" algn="ctr">
+                        <a:lnSpc>
+                          <a:spcPct val="115000"/>
+                        </a:lnSpc>
+                        <a:spcAft>
+                          <a:spcPts val="1000"/>
+                        </a:spcAft>
+                        <a:buNone/>
+                      </a:pPr>
+                      <a:r>
+                        <a:rPr lang="en-US" sz="1100">
+                          <a:effectLst/>
+                        </a:rPr>
+                        <a:t>LEARNING_RATE</a:t>
+                      </a:r>
+                      <a:endParaRPr lang="en-US" sz="1100">
+                        <a:effectLst/>
+                        <a:latin typeface="Calibri" panose="020F0502020204030204" pitchFamily="34" charset="0"/>
+                        <a:ea typeface="Calibri" panose="020F0502020204030204" pitchFamily="34" charset="0"/>
+                      </a:endParaRPr>
+                    </a:p>
+                  </a:txBody>
+                  <a:tcPr marL="68580" marR="68580" marT="0" marB="0"/>
+                </a:tc>
+                <a:tc>
+                  <a:txBody>
+                    <a:bodyPr/>
+                    <a:lstStyle/>
+                    <a:p>
+                      <a:pPr marL="0" marR="0" algn="ctr">
+                        <a:lnSpc>
+                          <a:spcPct val="115000"/>
+                        </a:lnSpc>
+                        <a:spcAft>
+                          <a:spcPts val="1000"/>
+                        </a:spcAft>
+                        <a:buNone/>
+                      </a:pPr>
+                      <a:r>
+                        <a:rPr lang="en-US" sz="1100">
+                          <a:effectLst/>
+                        </a:rPr>
+                        <a:t>2e-4</a:t>
+                      </a:r>
+                      <a:endParaRPr lang="en-US" sz="1100">
+                        <a:effectLst/>
+                        <a:latin typeface="Calibri" panose="020F0502020204030204" pitchFamily="34" charset="0"/>
+                        <a:ea typeface="Calibri" panose="020F0502020204030204" pitchFamily="34" charset="0"/>
+                      </a:endParaRPr>
+                    </a:p>
+                  </a:txBody>
+                  <a:tcPr marL="68580" marR="68580" marT="0" marB="0"/>
+                </a:tc>
+                <a:extLst>
+                  <a:ext uri="{0D108BD9-81ED-4DB2-BD59-A6C34878D82A}">
+                    <a16:rowId xmlns:a16="http://schemas.microsoft.com/office/drawing/2014/main" val="832156372"/>
+                  </a:ext>
+                </a:extLst>
+              </a:tr>
+              <a:tr h="0">
+                <a:tc>
+                  <a:txBody>
+                    <a:bodyPr/>
+                    <a:lstStyle/>
+                    <a:p>
+                      <a:pPr marL="0" marR="0" algn="ctr">
+                        <a:lnSpc>
+                          <a:spcPct val="115000"/>
+                        </a:lnSpc>
+                        <a:spcAft>
+                          <a:spcPts val="1000"/>
+                        </a:spcAft>
+                        <a:buNone/>
+                      </a:pPr>
+                      <a:r>
+                        <a:rPr lang="en-US" sz="1100">
+                          <a:effectLst/>
+                        </a:rPr>
+                        <a:t>MAX_STEPS</a:t>
+                      </a:r>
+                      <a:endParaRPr lang="en-US" sz="1100">
+                        <a:effectLst/>
+                        <a:latin typeface="Calibri" panose="020F0502020204030204" pitchFamily="34" charset="0"/>
+                        <a:ea typeface="Calibri" panose="020F0502020204030204" pitchFamily="34" charset="0"/>
+                      </a:endParaRPr>
+                    </a:p>
+                  </a:txBody>
+                  <a:tcPr marL="68580" marR="68580" marT="0" marB="0"/>
+                </a:tc>
+                <a:tc>
+                  <a:txBody>
+                    <a:bodyPr/>
+                    <a:lstStyle/>
+                    <a:p>
+                      <a:pPr marL="0" marR="0" algn="ctr">
+                        <a:lnSpc>
+                          <a:spcPct val="115000"/>
+                        </a:lnSpc>
+                        <a:spcAft>
+                          <a:spcPts val="1000"/>
+                        </a:spcAft>
+                        <a:buNone/>
+                      </a:pPr>
+                      <a:r>
+                        <a:rPr lang="en-US" sz="1100">
+                          <a:effectLst/>
+                        </a:rPr>
+                        <a:t>300</a:t>
+                      </a:r>
+                      <a:endParaRPr lang="en-US" sz="1100">
+                        <a:effectLst/>
+                        <a:latin typeface="Calibri" panose="020F0502020204030204" pitchFamily="34" charset="0"/>
+                        <a:ea typeface="Calibri" panose="020F0502020204030204" pitchFamily="34" charset="0"/>
+                      </a:endParaRPr>
+                    </a:p>
+                  </a:txBody>
+                  <a:tcPr marL="68580" marR="68580" marT="0" marB="0"/>
+                </a:tc>
+                <a:extLst>
+                  <a:ext uri="{0D108BD9-81ED-4DB2-BD59-A6C34878D82A}">
+                    <a16:rowId xmlns:a16="http://schemas.microsoft.com/office/drawing/2014/main" val="1736554491"/>
+                  </a:ext>
+                </a:extLst>
+              </a:tr>
+              <a:tr h="0">
+                <a:tc>
+                  <a:txBody>
+                    <a:bodyPr/>
+                    <a:lstStyle/>
+                    <a:p>
+                      <a:pPr marL="0" marR="0" algn="ctr">
+                        <a:lnSpc>
+                          <a:spcPct val="115000"/>
+                        </a:lnSpc>
+                        <a:spcAft>
+                          <a:spcPts val="1000"/>
+                        </a:spcAft>
+                        <a:buNone/>
+                      </a:pPr>
+                      <a:r>
+                        <a:rPr lang="en-US" sz="1100">
+                          <a:effectLst/>
+                        </a:rPr>
+                        <a:t>WARMUP_STEPS</a:t>
+                      </a:r>
+                      <a:endParaRPr lang="en-US" sz="1100">
+                        <a:effectLst/>
+                        <a:latin typeface="Calibri" panose="020F0502020204030204" pitchFamily="34" charset="0"/>
+                        <a:ea typeface="Calibri" panose="020F0502020204030204" pitchFamily="34" charset="0"/>
+                      </a:endParaRPr>
+                    </a:p>
+                  </a:txBody>
+                  <a:tcPr marL="68580" marR="68580" marT="0" marB="0"/>
+                </a:tc>
+                <a:tc>
+                  <a:txBody>
+                    <a:bodyPr/>
+                    <a:lstStyle/>
+                    <a:p>
+                      <a:pPr marL="0" marR="0" algn="ctr">
+                        <a:lnSpc>
+                          <a:spcPct val="115000"/>
+                        </a:lnSpc>
+                        <a:spcAft>
+                          <a:spcPts val="1000"/>
+                        </a:spcAft>
+                        <a:buNone/>
+                      </a:pPr>
+                      <a:r>
+                        <a:rPr lang="en-US" sz="1100">
+                          <a:effectLst/>
+                        </a:rPr>
+                        <a:t>30</a:t>
+                      </a:r>
+                      <a:endParaRPr lang="en-US" sz="1100">
+                        <a:effectLst/>
+                        <a:latin typeface="Calibri" panose="020F0502020204030204" pitchFamily="34" charset="0"/>
+                        <a:ea typeface="Calibri" panose="020F0502020204030204" pitchFamily="34" charset="0"/>
+                      </a:endParaRPr>
+                    </a:p>
+                  </a:txBody>
+                  <a:tcPr marL="68580" marR="68580" marT="0" marB="0"/>
+                </a:tc>
+                <a:extLst>
+                  <a:ext uri="{0D108BD9-81ED-4DB2-BD59-A6C34878D82A}">
+                    <a16:rowId xmlns:a16="http://schemas.microsoft.com/office/drawing/2014/main" val="4163438424"/>
+                  </a:ext>
+                </a:extLst>
+              </a:tr>
+              <a:tr h="0">
+                <a:tc>
+                  <a:txBody>
+                    <a:bodyPr/>
+                    <a:lstStyle/>
+                    <a:p>
+                      <a:pPr marL="0" marR="0" algn="ctr">
+                        <a:lnSpc>
+                          <a:spcPct val="115000"/>
+                        </a:lnSpc>
+                        <a:spcAft>
+                          <a:spcPts val="1000"/>
+                        </a:spcAft>
+                        <a:buNone/>
+                      </a:pPr>
+                      <a:r>
+                        <a:rPr lang="en-US" sz="1100">
+                          <a:effectLst/>
+                        </a:rPr>
+                        <a:t>WEIGHT_DECAY</a:t>
+                      </a:r>
+                      <a:endParaRPr lang="en-US" sz="1100">
+                        <a:effectLst/>
+                        <a:latin typeface="Calibri" panose="020F0502020204030204" pitchFamily="34" charset="0"/>
+                        <a:ea typeface="Calibri" panose="020F0502020204030204" pitchFamily="34" charset="0"/>
+                      </a:endParaRPr>
+                    </a:p>
+                  </a:txBody>
+                  <a:tcPr marL="68580" marR="68580" marT="0" marB="0"/>
+                </a:tc>
+                <a:tc>
+                  <a:txBody>
+                    <a:bodyPr/>
+                    <a:lstStyle/>
+                    <a:p>
+                      <a:pPr marL="0" marR="0" algn="ctr">
+                        <a:lnSpc>
+                          <a:spcPct val="115000"/>
+                        </a:lnSpc>
+                        <a:spcAft>
+                          <a:spcPts val="1000"/>
+                        </a:spcAft>
+                        <a:buNone/>
+                      </a:pPr>
+                      <a:r>
+                        <a:rPr lang="en-US" sz="1100">
+                          <a:effectLst/>
+                        </a:rPr>
+                        <a:t>0.01</a:t>
+                      </a:r>
+                      <a:endParaRPr lang="en-US" sz="1100">
+                        <a:effectLst/>
+                        <a:latin typeface="Calibri" panose="020F0502020204030204" pitchFamily="34" charset="0"/>
+                        <a:ea typeface="Calibri" panose="020F0502020204030204" pitchFamily="34" charset="0"/>
+                      </a:endParaRPr>
+                    </a:p>
+                  </a:txBody>
+                  <a:tcPr marL="68580" marR="68580" marT="0" marB="0"/>
+                </a:tc>
+                <a:extLst>
+                  <a:ext uri="{0D108BD9-81ED-4DB2-BD59-A6C34878D82A}">
+                    <a16:rowId xmlns:a16="http://schemas.microsoft.com/office/drawing/2014/main" val="2294378239"/>
+                  </a:ext>
+                </a:extLst>
+              </a:tr>
+              <a:tr h="0">
+                <a:tc>
+                  <a:txBody>
+                    <a:bodyPr/>
+                    <a:lstStyle/>
+                    <a:p>
+                      <a:pPr marL="0" marR="0" algn="ctr">
+                        <a:lnSpc>
+                          <a:spcPct val="115000"/>
+                        </a:lnSpc>
+                        <a:spcAft>
+                          <a:spcPts val="1000"/>
+                        </a:spcAft>
+                        <a:buNone/>
+                      </a:pPr>
+                      <a:r>
+                        <a:rPr lang="en-US" sz="1100">
+                          <a:effectLst/>
+                        </a:rPr>
+                        <a:t>TARGET_MODULES (LORA)</a:t>
+                      </a:r>
+                      <a:endParaRPr lang="en-US" sz="1100">
+                        <a:effectLst/>
+                        <a:latin typeface="Calibri" panose="020F0502020204030204" pitchFamily="34" charset="0"/>
+                        <a:ea typeface="Calibri" panose="020F0502020204030204" pitchFamily="34" charset="0"/>
+                      </a:endParaRPr>
+                    </a:p>
+                  </a:txBody>
+                  <a:tcPr marL="68580" marR="68580" marT="0" marB="0"/>
+                </a:tc>
+                <a:tc>
+                  <a:txBody>
+                    <a:bodyPr/>
+                    <a:lstStyle/>
+                    <a:p>
+                      <a:pPr marL="0" marR="0" algn="ctr">
+                        <a:lnSpc>
+                          <a:spcPct val="115000"/>
+                        </a:lnSpc>
+                        <a:spcAft>
+                          <a:spcPts val="1000"/>
+                        </a:spcAft>
+                        <a:buNone/>
+                      </a:pPr>
+                      <a:r>
+                        <a:rPr lang="en-US" sz="1100">
+                          <a:effectLst/>
+                        </a:rPr>
+                        <a:t>q_proj, v_proj, k_proj, o_proj</a:t>
+                      </a:r>
+                      <a:endParaRPr lang="en-US" sz="1100">
+                        <a:effectLst/>
+                        <a:latin typeface="Calibri" panose="020F0502020204030204" pitchFamily="34" charset="0"/>
+                        <a:ea typeface="Calibri" panose="020F0502020204030204" pitchFamily="34" charset="0"/>
+                      </a:endParaRPr>
+                    </a:p>
+                  </a:txBody>
+                  <a:tcPr marL="68580" marR="68580" marT="0" marB="0"/>
+                </a:tc>
+                <a:extLst>
+                  <a:ext uri="{0D108BD9-81ED-4DB2-BD59-A6C34878D82A}">
+                    <a16:rowId xmlns:a16="http://schemas.microsoft.com/office/drawing/2014/main" val="1447844027"/>
+                  </a:ext>
+                </a:extLst>
+              </a:tr>
+              <a:tr h="0">
+                <a:tc>
+                  <a:txBody>
+                    <a:bodyPr/>
+                    <a:lstStyle/>
+                    <a:p>
+                      <a:pPr marL="0" marR="0" algn="ctr">
+                        <a:lnSpc>
+                          <a:spcPct val="115000"/>
+                        </a:lnSpc>
+                        <a:spcAft>
+                          <a:spcPts val="1000"/>
+                        </a:spcAft>
+                        <a:buNone/>
+                      </a:pPr>
+                      <a:r>
+                        <a:rPr lang="en-US" sz="1100" dirty="0">
+                          <a:effectLst/>
+                        </a:rPr>
+                        <a:t>LR_SCHEDULER_TYPE</a:t>
+                      </a:r>
+                      <a:endParaRPr lang="en-US" sz="1100" dirty="0">
+                        <a:effectLst/>
+                        <a:latin typeface="Calibri" panose="020F0502020204030204" pitchFamily="34" charset="0"/>
+                        <a:ea typeface="Calibri" panose="020F0502020204030204" pitchFamily="34" charset="0"/>
+                      </a:endParaRPr>
+                    </a:p>
+                  </a:txBody>
+                  <a:tcPr marL="68580" marR="68580" marT="0" marB="0"/>
+                </a:tc>
+                <a:tc>
+                  <a:txBody>
+                    <a:bodyPr/>
+                    <a:lstStyle/>
+                    <a:p>
+                      <a:pPr marL="0" marR="0" algn="ctr">
+                        <a:lnSpc>
+                          <a:spcPct val="115000"/>
+                        </a:lnSpc>
+                        <a:spcAft>
+                          <a:spcPts val="1000"/>
+                        </a:spcAft>
+                        <a:buNone/>
+                      </a:pPr>
+                      <a:r>
+                        <a:rPr lang="en-US" sz="1100" dirty="0">
+                          <a:effectLst/>
+                        </a:rPr>
+                        <a:t>cosine</a:t>
+                      </a:r>
+                      <a:endParaRPr lang="en-US" sz="1100" dirty="0">
+                        <a:effectLst/>
+                        <a:latin typeface="Calibri" panose="020F0502020204030204" pitchFamily="34" charset="0"/>
+                        <a:ea typeface="Calibri" panose="020F0502020204030204" pitchFamily="34" charset="0"/>
+                      </a:endParaRPr>
+                    </a:p>
+                  </a:txBody>
+                  <a:tcPr marL="68580" marR="68580" marT="0" marB="0"/>
+                </a:tc>
+                <a:extLst>
+                  <a:ext uri="{0D108BD9-81ED-4DB2-BD59-A6C34878D82A}">
+                    <a16:rowId xmlns:a16="http://schemas.microsoft.com/office/drawing/2014/main" val="2426274095"/>
+                  </a:ext>
+                </a:extLst>
+              </a:tr>
+            </a:tbl>
+          </a:graphicData>
+        </a:graphic>
+      </p:graphicFrame>
     </p:spTree>
   </p:cSld>
   <p:clrMapOvr>
@@ -16836,7 +17711,7 @@
                   <a:srgbClr val="1A56A8"/>
                 </a:solidFill>
               </a:rPr>
-              <a:t>Task 2 - QA: Implementation Pipeline</a:t>
+              <a:t>Results - Task 1: Named Entity Recognition</a:t>
             </a:r>
           </a:p>
         </p:txBody>
@@ -17031,1106 +17906,20 @@
           <a:p>
             <a:pPr algn="r"/>
             <a:r>
-              <a:rPr sz="900" b="0">
+              <a:rPr lang="en-US" sz="900" dirty="0">
                 <a:solidFill>
                   <a:srgbClr val="666666"/>
                 </a:solidFill>
               </a:rPr>
-              <a:t>7 / 19</a:t>
-            </a:r>
-          </a:p>
-        </p:txBody>
-      </p:sp>
-      <p:sp>
-        <p:nvSpPr>
-          <p:cNvPr id="9" name="TextBox 8"/>
-          <p:cNvSpPr txBox="1"/>
-          <p:nvPr/>
-        </p:nvSpPr>
-        <p:spPr>
-          <a:xfrm>
-            <a:off x="457200" y="868680"/>
-            <a:ext cx="4572000" cy="256032"/>
-          </a:xfrm>
-          <a:prstGeom prst="rect">
-            <a:avLst/>
-          </a:prstGeom>
-          <a:noFill/>
-        </p:spPr>
-        <p:txBody>
-          <a:bodyPr wrap="none">
-            <a:spAutoFit/>
-          </a:bodyPr>
-          <a:lstStyle/>
-          <a:p>
-            <a:r>
-              <a:rPr sz="1300" b="1">
-                <a:solidFill>
-                  <a:srgbClr val="1A56A8"/>
-                </a:solidFill>
-              </a:rPr>
-              <a:t>BioClinicalBERT Multiple-Choice</a:t>
-            </a:r>
-          </a:p>
-        </p:txBody>
-      </p:sp>
-      <p:sp>
-        <p:nvSpPr>
-          <p:cNvPr id="10" name="Rectangle 9"/>
-          <p:cNvSpPr/>
-          <p:nvPr/>
-        </p:nvSpPr>
-        <p:spPr>
-          <a:xfrm>
-            <a:off x="457200" y="1143000"/>
-            <a:ext cx="41148" cy="347472"/>
-          </a:xfrm>
-          <a:prstGeom prst="rect">
-            <a:avLst/>
-          </a:prstGeom>
-          <a:solidFill>
-            <a:srgbClr val="1A56A8"/>
-          </a:solidFill>
-          <a:ln>
-            <a:noFill/>
-          </a:ln>
-        </p:spPr>
-        <p:style>
-          <a:lnRef idx="1">
-            <a:schemeClr val="accent1"/>
-          </a:lnRef>
-          <a:fillRef idx="3">
-            <a:schemeClr val="accent1"/>
-          </a:fillRef>
-          <a:effectRef idx="2">
-            <a:schemeClr val="accent1"/>
-          </a:effectRef>
-          <a:fontRef idx="minor">
-            <a:schemeClr val="lt1"/>
-          </a:fontRef>
-        </p:style>
-        <p:txBody>
-          <a:bodyPr rtlCol="0" anchor="ctr"/>
-          <a:lstStyle/>
-          <a:p>
-            <a:pPr algn="ctr"/>
-            <a:endParaRPr/>
-          </a:p>
-        </p:txBody>
-      </p:sp>
-      <p:sp>
-        <p:nvSpPr>
-          <p:cNvPr id="11" name="Rectangle 10"/>
-          <p:cNvSpPr/>
-          <p:nvPr/>
-        </p:nvSpPr>
-        <p:spPr>
-          <a:xfrm>
-            <a:off x="498348" y="1143000"/>
-            <a:ext cx="5262372" cy="347472"/>
-          </a:xfrm>
-          <a:prstGeom prst="rect">
-            <a:avLst/>
-          </a:prstGeom>
-          <a:solidFill>
-            <a:srgbClr val="E8F0FB"/>
-          </a:solidFill>
-          <a:ln>
-            <a:noFill/>
-          </a:ln>
-        </p:spPr>
-        <p:style>
-          <a:lnRef idx="1">
-            <a:schemeClr val="accent1"/>
-          </a:lnRef>
-          <a:fillRef idx="3">
-            <a:schemeClr val="accent1"/>
-          </a:fillRef>
-          <a:effectRef idx="2">
-            <a:schemeClr val="accent1"/>
-          </a:effectRef>
-          <a:fontRef idx="minor">
-            <a:schemeClr val="lt1"/>
-          </a:fontRef>
-        </p:style>
-        <p:txBody>
-          <a:bodyPr rtlCol="0" anchor="ctr"/>
-          <a:lstStyle/>
-          <a:p>
-            <a:pPr algn="ctr"/>
-            <a:endParaRPr/>
-          </a:p>
-        </p:txBody>
-      </p:sp>
-      <p:sp>
-        <p:nvSpPr>
-          <p:cNvPr id="12" name="TextBox 11"/>
-          <p:cNvSpPr txBox="1"/>
-          <p:nvPr/>
-        </p:nvSpPr>
-        <p:spPr>
-          <a:xfrm>
-            <a:off x="566928" y="1216152"/>
-            <a:ext cx="5102352" cy="237744"/>
-          </a:xfrm>
-          <a:prstGeom prst="rect">
-            <a:avLst/>
-          </a:prstGeom>
-          <a:noFill/>
-        </p:spPr>
-        <p:txBody>
-          <a:bodyPr wrap="square">
-            <a:spAutoFit/>
-          </a:bodyPr>
-          <a:lstStyle/>
-          <a:p>
-            <a:r>
-              <a:rPr sz="1100">
-                <a:solidFill>
-                  <a:srgbClr val="1A1A1A"/>
-                </a:solidFill>
-              </a:rPr>
-              <a:t>(Q + Option A) → BERT → logit ×4 → softmax → argmax</a:t>
-            </a:r>
-          </a:p>
-        </p:txBody>
-      </p:sp>
-      <p:sp>
-        <p:nvSpPr>
-          <p:cNvPr id="13" name="TextBox 12"/>
-          <p:cNvSpPr txBox="1"/>
-          <p:nvPr/>
-        </p:nvSpPr>
-        <p:spPr>
-          <a:xfrm>
-            <a:off x="457200" y="1572768"/>
-            <a:ext cx="5303520" cy="2194560"/>
-          </a:xfrm>
-          <a:prstGeom prst="rect">
-            <a:avLst/>
-          </a:prstGeom>
-          <a:noFill/>
-        </p:spPr>
-        <p:txBody>
-          <a:bodyPr wrap="square">
-            <a:spAutoFit/>
-          </a:bodyPr>
-          <a:lstStyle/>
-          <a:p>
-            <a:pPr>
-              <a:spcBef>
-                <a:spcPts val="300"/>
-              </a:spcBef>
-            </a:pPr>
-            <a:r>
-              <a:rPr sz="1250">
-                <a:solidFill>
-                  <a:srgbClr val="1A1A1A"/>
-                </a:solidFill>
-              </a:rPr>
-              <a:t>• Custom DataCollatorForMultipleChoice</a:t>
-            </a:r>
-          </a:p>
-          <a:p>
-            <a:pPr>
-              <a:spcBef>
-                <a:spcPts val="300"/>
-              </a:spcBef>
-            </a:pPr>
-            <a:r>
-              <a:rPr sz="1250">
-                <a:solidFill>
-                  <a:srgbClr val="1A1A1A"/>
-                </a:solidFill>
-              </a:rPr>
-              <a:t>• 3 metrics: Accuracy, Macro F1, ECE (calibration)</a:t>
-            </a:r>
-          </a:p>
-          <a:p>
-            <a:pPr>
-              <a:spcBef>
-                <a:spcPts val="300"/>
-              </a:spcBef>
-            </a:pPr>
-            <a:r>
-              <a:rPr sz="1250">
-                <a:solidFill>
-                  <a:srgbClr val="1A1A1A"/>
-                </a:solidFill>
-              </a:rPr>
-              <a:t>• LR = 4e-5, cosine schedule, 10 epochs max</a:t>
-            </a:r>
-          </a:p>
-          <a:p>
-            <a:pPr>
-              <a:spcBef>
-                <a:spcPts val="300"/>
-              </a:spcBef>
-            </a:pPr>
-            <a:r>
-              <a:rPr sz="1250">
-                <a:solidFill>
-                  <a:srgbClr val="1A1A1A"/>
-                </a:solidFill>
-              </a:rPr>
-              <a:t>• Truncation side = left (preserves answer text)</a:t>
-            </a:r>
-          </a:p>
-          <a:p>
-            <a:pPr>
-              <a:spcBef>
-                <a:spcPts val="300"/>
-              </a:spcBef>
-            </a:pPr>
-            <a:r>
-              <a:rPr sz="1250">
-                <a:solidFill>
-                  <a:srgbClr val="1A1A1A"/>
-                </a:solidFill>
-              </a:rPr>
-              <a:t>• Early stopping patience = 2</a:t>
-            </a:r>
-          </a:p>
-          <a:p>
-            <a:pPr>
-              <a:spcBef>
-                <a:spcPts val="300"/>
-              </a:spcBef>
-            </a:pPr>
-            <a:r>
-              <a:rPr sz="1250">
-                <a:solidFill>
-                  <a:srgbClr val="1A1A1A"/>
-                </a:solidFill>
-              </a:rPr>
-              <a:t>• 90/10 train/val split with seed=42</a:t>
-            </a:r>
-          </a:p>
-          <a:p>
-            <a:pPr>
-              <a:spcBef>
-                <a:spcPts val="300"/>
-              </a:spcBef>
-            </a:pPr>
-            <a:r>
-              <a:rPr sz="1250">
-                <a:solidFill>
-                  <a:srgbClr val="1A1A1A"/>
-                </a:solidFill>
-              </a:rPr>
-              <a:t>• Checkpoint: alexd063/bio-clinicalbert-finetuned-medqa</a:t>
-            </a:r>
-          </a:p>
-        </p:txBody>
-      </p:sp>
-      <p:sp>
-        <p:nvSpPr>
-          <p:cNvPr id="14" name="Rectangle 13"/>
-          <p:cNvSpPr/>
-          <p:nvPr/>
-        </p:nvSpPr>
-        <p:spPr>
-          <a:xfrm>
-            <a:off x="457200" y="3858768"/>
-            <a:ext cx="41148" cy="594360"/>
-          </a:xfrm>
-          <a:prstGeom prst="rect">
-            <a:avLst/>
-          </a:prstGeom>
-          <a:solidFill>
-            <a:srgbClr val="1A7A40"/>
-          </a:solidFill>
-          <a:ln>
-            <a:noFill/>
-          </a:ln>
-        </p:spPr>
-        <p:style>
-          <a:lnRef idx="1">
-            <a:schemeClr val="accent1"/>
-          </a:lnRef>
-          <a:fillRef idx="3">
-            <a:schemeClr val="accent1"/>
-          </a:fillRef>
-          <a:effectRef idx="2">
-            <a:schemeClr val="accent1"/>
-          </a:effectRef>
-          <a:fontRef idx="minor">
-            <a:schemeClr val="lt1"/>
-          </a:fontRef>
-        </p:style>
-        <p:txBody>
-          <a:bodyPr rtlCol="0" anchor="ctr"/>
-          <a:lstStyle/>
-          <a:p>
-            <a:pPr algn="ctr"/>
-            <a:endParaRPr/>
-          </a:p>
-        </p:txBody>
-      </p:sp>
-      <p:sp>
-        <p:nvSpPr>
-          <p:cNvPr id="15" name="Rectangle 14"/>
-          <p:cNvSpPr/>
-          <p:nvPr/>
-        </p:nvSpPr>
-        <p:spPr>
-          <a:xfrm>
-            <a:off x="498348" y="3858768"/>
-            <a:ext cx="5262372" cy="594360"/>
-          </a:xfrm>
-          <a:prstGeom prst="rect">
-            <a:avLst/>
-          </a:prstGeom>
-          <a:solidFill>
-            <a:srgbClr val="E6F7EE"/>
-          </a:solidFill>
-          <a:ln>
-            <a:noFill/>
-          </a:ln>
-        </p:spPr>
-        <p:style>
-          <a:lnRef idx="1">
-            <a:schemeClr val="accent1"/>
-          </a:lnRef>
-          <a:fillRef idx="3">
-            <a:schemeClr val="accent1"/>
-          </a:fillRef>
-          <a:effectRef idx="2">
-            <a:schemeClr val="accent1"/>
-          </a:effectRef>
-          <a:fontRef idx="minor">
-            <a:schemeClr val="lt1"/>
-          </a:fontRef>
-        </p:style>
-        <p:txBody>
-          <a:bodyPr rtlCol="0" anchor="ctr"/>
-          <a:lstStyle/>
-          <a:p>
-            <a:pPr algn="ctr"/>
-            <a:endParaRPr/>
-          </a:p>
-        </p:txBody>
-      </p:sp>
-      <p:sp>
-        <p:nvSpPr>
-          <p:cNvPr id="16" name="TextBox 15"/>
-          <p:cNvSpPr txBox="1"/>
-          <p:nvPr/>
-        </p:nvSpPr>
-        <p:spPr>
-          <a:xfrm>
-            <a:off x="566928" y="3931920"/>
-            <a:ext cx="5102352" cy="484632"/>
-          </a:xfrm>
-          <a:prstGeom prst="rect">
-            <a:avLst/>
-          </a:prstGeom>
-          <a:noFill/>
-        </p:spPr>
-        <p:txBody>
-          <a:bodyPr wrap="square">
-            <a:spAutoFit/>
-          </a:bodyPr>
-          <a:lstStyle/>
-          <a:p>
-            <a:r>
-              <a:rPr sz="1100" dirty="0">
-                <a:solidFill>
-                  <a:srgbClr val="1A1A1A"/>
-                </a:solidFill>
-              </a:rPr>
-              <a:t>ECE (Expected Calibration Error) is an excellent addition - measures whether model confidence matches actual accuracy, beyond just raw metrics.</a:t>
-            </a:r>
-          </a:p>
-        </p:txBody>
-      </p:sp>
-      <p:sp>
-        <p:nvSpPr>
-          <p:cNvPr id="17" name="TextBox 16"/>
-          <p:cNvSpPr txBox="1"/>
-          <p:nvPr/>
-        </p:nvSpPr>
-        <p:spPr>
-          <a:xfrm>
-            <a:off x="6217920" y="868680"/>
-            <a:ext cx="4572000" cy="256032"/>
-          </a:xfrm>
-          <a:prstGeom prst="rect">
-            <a:avLst/>
-          </a:prstGeom>
-          <a:noFill/>
-        </p:spPr>
-        <p:txBody>
-          <a:bodyPr wrap="none">
-            <a:spAutoFit/>
-          </a:bodyPr>
-          <a:lstStyle/>
-          <a:p>
-            <a:r>
-              <a:rPr sz="1300" b="1">
-                <a:solidFill>
-                  <a:srgbClr val="1A56A8"/>
-                </a:solidFill>
-              </a:rPr>
-              <a:t>MedGemma Generative QA</a:t>
-            </a:r>
-          </a:p>
-        </p:txBody>
-      </p:sp>
-      <p:sp>
-        <p:nvSpPr>
-          <p:cNvPr id="18" name="Rectangle 17"/>
-          <p:cNvSpPr/>
-          <p:nvPr/>
-        </p:nvSpPr>
-        <p:spPr>
-          <a:xfrm>
-            <a:off x="6217920" y="1143000"/>
-            <a:ext cx="41148" cy="548640"/>
-          </a:xfrm>
-          <a:prstGeom prst="rect">
-            <a:avLst/>
-          </a:prstGeom>
-          <a:solidFill>
-            <a:srgbClr val="1A56A8"/>
-          </a:solidFill>
-          <a:ln>
-            <a:noFill/>
-          </a:ln>
-        </p:spPr>
-        <p:style>
-          <a:lnRef idx="1">
-            <a:schemeClr val="accent1"/>
-          </a:lnRef>
-          <a:fillRef idx="3">
-            <a:schemeClr val="accent1"/>
-          </a:fillRef>
-          <a:effectRef idx="2">
-            <a:schemeClr val="accent1"/>
-          </a:effectRef>
-          <a:fontRef idx="minor">
-            <a:schemeClr val="lt1"/>
-          </a:fontRef>
-        </p:style>
-        <p:txBody>
-          <a:bodyPr rtlCol="0" anchor="ctr"/>
-          <a:lstStyle/>
-          <a:p>
-            <a:pPr algn="ctr"/>
-            <a:endParaRPr/>
-          </a:p>
-        </p:txBody>
-      </p:sp>
-      <p:sp>
-        <p:nvSpPr>
-          <p:cNvPr id="19" name="Rectangle 18"/>
-          <p:cNvSpPr/>
-          <p:nvPr/>
-        </p:nvSpPr>
-        <p:spPr>
-          <a:xfrm>
-            <a:off x="6259068" y="1143000"/>
-            <a:ext cx="5445252" cy="548640"/>
-          </a:xfrm>
-          <a:prstGeom prst="rect">
-            <a:avLst/>
-          </a:prstGeom>
-          <a:solidFill>
-            <a:srgbClr val="E8F0FB"/>
-          </a:solidFill>
-          <a:ln>
-            <a:noFill/>
-          </a:ln>
-        </p:spPr>
-        <p:style>
-          <a:lnRef idx="1">
-            <a:schemeClr val="accent1"/>
-          </a:lnRef>
-          <a:fillRef idx="3">
-            <a:schemeClr val="accent1"/>
-          </a:fillRef>
-          <a:effectRef idx="2">
-            <a:schemeClr val="accent1"/>
-          </a:effectRef>
-          <a:fontRef idx="minor">
-            <a:schemeClr val="lt1"/>
-          </a:fontRef>
-        </p:style>
-        <p:txBody>
-          <a:bodyPr rtlCol="0" anchor="ctr"/>
-          <a:lstStyle/>
-          <a:p>
-            <a:pPr algn="ctr"/>
-            <a:endParaRPr/>
-          </a:p>
-        </p:txBody>
-      </p:sp>
-      <p:sp>
-        <p:nvSpPr>
-          <p:cNvPr id="20" name="TextBox 19"/>
-          <p:cNvSpPr txBox="1"/>
-          <p:nvPr/>
-        </p:nvSpPr>
-        <p:spPr>
-          <a:xfrm>
-            <a:off x="6327648" y="1216152"/>
-            <a:ext cx="5285232" cy="438912"/>
-          </a:xfrm>
-          <a:prstGeom prst="rect">
-            <a:avLst/>
-          </a:prstGeom>
-          <a:noFill/>
-        </p:spPr>
-        <p:txBody>
-          <a:bodyPr wrap="square">
-            <a:spAutoFit/>
-          </a:bodyPr>
-          <a:lstStyle/>
-          <a:p>
-            <a:r>
-              <a:rPr sz="1100">
-                <a:solidFill>
-                  <a:srgbClr val="1A1A1A"/>
-                </a:solidFill>
-              </a:rPr>
-              <a:t>Model sees full question + all 4 options and outputs a single letter.
-Instruction format: explicit EOS token appended to answer.</a:t>
-            </a:r>
-          </a:p>
-        </p:txBody>
-      </p:sp>
-      <p:sp>
-        <p:nvSpPr>
-          <p:cNvPr id="21" name="TextBox 20"/>
-          <p:cNvSpPr txBox="1"/>
-          <p:nvPr/>
-        </p:nvSpPr>
-        <p:spPr>
-          <a:xfrm>
-            <a:off x="6217920" y="1783080"/>
-            <a:ext cx="5486400" cy="1920240"/>
-          </a:xfrm>
-          <a:prstGeom prst="rect">
-            <a:avLst/>
-          </a:prstGeom>
-          <a:noFill/>
-        </p:spPr>
-        <p:txBody>
-          <a:bodyPr wrap="square">
-            <a:spAutoFit/>
-          </a:bodyPr>
-          <a:lstStyle/>
-          <a:p>
-            <a:pPr>
-              <a:spcBef>
-                <a:spcPts val="300"/>
-              </a:spcBef>
-            </a:pPr>
-            <a:r>
-              <a:rPr sz="1250">
-                <a:solidFill>
-                  <a:srgbClr val="1A1A1A"/>
-                </a:solidFill>
-              </a:rPr>
-              <a:t>• Custom MedicalQAEvaluationCallback - accuracy mid-training</a:t>
-            </a:r>
-          </a:p>
-          <a:p>
-            <a:pPr>
-              <a:spcBef>
-                <a:spcPts val="300"/>
-              </a:spcBef>
-            </a:pPr>
-            <a:r>
-              <a:rPr sz="1250">
-                <a:solidFill>
-                  <a:srgbClr val="1A1A1A"/>
-                </a:solidFill>
-              </a:rPr>
-              <a:t>• Temperature = 0.1 at inference (near-deterministic)</a:t>
-            </a:r>
-          </a:p>
-          <a:p>
-            <a:pPr>
-              <a:spcBef>
-                <a:spcPts val="300"/>
-              </a:spcBef>
-            </a:pPr>
-            <a:r>
-              <a:rPr sz="1250">
-                <a:solidFill>
-                  <a:srgbClr val="1A1A1A"/>
-                </a:solidFill>
-              </a:rPr>
-              <a:t>• 2 epochs, LR = 2e-4, LoRA rank 16 on all attention matrices</a:t>
-            </a:r>
-          </a:p>
-          <a:p>
-            <a:pPr>
-              <a:spcBef>
-                <a:spcPts val="300"/>
-              </a:spcBef>
-            </a:pPr>
-            <a:r>
-              <a:rPr sz="1250">
-                <a:solidFill>
-                  <a:srgbClr val="1A1A1A"/>
-                </a:solidFill>
-              </a:rPr>
-              <a:t>• Packing enabled for throughput</a:t>
-            </a:r>
-          </a:p>
-          <a:p>
-            <a:pPr>
-              <a:spcBef>
-                <a:spcPts val="300"/>
-              </a:spcBef>
-            </a:pPr>
-            <a:r>
-              <a:rPr sz="1250">
-                <a:solidFill>
-                  <a:srgbClr val="1A1A1A"/>
-                </a:solidFill>
-              </a:rPr>
-              <a:t>• 10 warmup steps (0.87% of total - too low)</a:t>
-            </a:r>
-          </a:p>
-          <a:p>
-            <a:pPr>
-              <a:spcBef>
-                <a:spcPts val="300"/>
-              </a:spcBef>
-            </a:pPr>
-            <a:r>
-              <a:rPr sz="1250">
-                <a:solidFill>
-                  <a:srgbClr val="1A1A1A"/>
-                </a:solidFill>
-              </a:rPr>
-              <a:t>• Checkpoint: alexd063/bio-gemma4bit-finetuned-medqa</a:t>
-            </a:r>
-          </a:p>
-        </p:txBody>
-      </p:sp>
-      <p:sp>
-        <p:nvSpPr>
-          <p:cNvPr id="22" name="Rectangle 21"/>
-          <p:cNvSpPr/>
-          <p:nvPr/>
-        </p:nvSpPr>
-        <p:spPr>
-          <a:xfrm>
-            <a:off x="6217920" y="3794760"/>
-            <a:ext cx="41148" cy="594360"/>
-          </a:xfrm>
-          <a:prstGeom prst="rect">
-            <a:avLst/>
-          </a:prstGeom>
-          <a:solidFill>
-            <a:srgbClr val="E67E22"/>
-          </a:solidFill>
-          <a:ln>
-            <a:noFill/>
-          </a:ln>
-        </p:spPr>
-        <p:style>
-          <a:lnRef idx="1">
-            <a:schemeClr val="accent1"/>
-          </a:lnRef>
-          <a:fillRef idx="3">
-            <a:schemeClr val="accent1"/>
-          </a:fillRef>
-          <a:effectRef idx="2">
-            <a:schemeClr val="accent1"/>
-          </a:effectRef>
-          <a:fontRef idx="minor">
-            <a:schemeClr val="lt1"/>
-          </a:fontRef>
-        </p:style>
-        <p:txBody>
-          <a:bodyPr rtlCol="0" anchor="ctr"/>
-          <a:lstStyle/>
-          <a:p>
-            <a:pPr algn="ctr"/>
-            <a:endParaRPr/>
-          </a:p>
-        </p:txBody>
-      </p:sp>
-      <p:sp>
-        <p:nvSpPr>
-          <p:cNvPr id="23" name="Rectangle 22"/>
-          <p:cNvSpPr/>
-          <p:nvPr/>
-        </p:nvSpPr>
-        <p:spPr>
-          <a:xfrm>
-            <a:off x="6259068" y="3794760"/>
-            <a:ext cx="5445252" cy="594360"/>
-          </a:xfrm>
-          <a:prstGeom prst="rect">
-            <a:avLst/>
-          </a:prstGeom>
-          <a:solidFill>
-            <a:srgbClr val="FFF3E0"/>
-          </a:solidFill>
-          <a:ln>
-            <a:noFill/>
-          </a:ln>
-        </p:spPr>
-        <p:style>
-          <a:lnRef idx="1">
-            <a:schemeClr val="accent1"/>
-          </a:lnRef>
-          <a:fillRef idx="3">
-            <a:schemeClr val="accent1"/>
-          </a:fillRef>
-          <a:effectRef idx="2">
-            <a:schemeClr val="accent1"/>
-          </a:effectRef>
-          <a:fontRef idx="minor">
-            <a:schemeClr val="lt1"/>
-          </a:fontRef>
-        </p:style>
-        <p:txBody>
-          <a:bodyPr rtlCol="0" anchor="ctr"/>
-          <a:lstStyle/>
-          <a:p>
-            <a:pPr algn="ctr"/>
-            <a:endParaRPr/>
-          </a:p>
-        </p:txBody>
-      </p:sp>
-      <p:sp>
-        <p:nvSpPr>
-          <p:cNvPr id="24" name="TextBox 23"/>
-          <p:cNvSpPr txBox="1"/>
-          <p:nvPr/>
-        </p:nvSpPr>
-        <p:spPr>
-          <a:xfrm>
-            <a:off x="6327648" y="3867912"/>
-            <a:ext cx="5285232" cy="484632"/>
-          </a:xfrm>
-          <a:prstGeom prst="rect">
-            <a:avLst/>
-          </a:prstGeom>
-          <a:noFill/>
-        </p:spPr>
-        <p:txBody>
-          <a:bodyPr wrap="square">
-            <a:spAutoFit/>
-          </a:bodyPr>
-          <a:lstStyle/>
-          <a:p>
-            <a:r>
-              <a:rPr sz="1100">
-                <a:solidFill>
-                  <a:srgbClr val="1A1A1A"/>
-                </a:solidFill>
-              </a:rPr>
-              <a:t>Only 2 epochs trained. Warmup = 10 steps is far too low for stable fine-tuning. No error analysis on incorrect predictions.</a:t>
-            </a:r>
-          </a:p>
-        </p:txBody>
-      </p:sp>
-    </p:spTree>
-  </p:cSld>
-  <p:clrMapOvr>
-    <a:masterClrMapping/>
-  </p:clrMapOvr>
-</p:sld>
-</file>
-
-<file path=ppt/slides/slide8.xml><?xml version="1.0" encoding="utf-8"?>
-<p:sld xmlns:a="http://schemas.openxmlformats.org/drawingml/2006/main" xmlns:r="http://schemas.openxmlformats.org/officeDocument/2006/relationships" xmlns:p="http://schemas.openxmlformats.org/presentationml/2006/main">
-  <p:cSld>
-    <p:spTree>
-      <p:nvGrpSpPr>
-        <p:cNvPr id="1" name=""/>
-        <p:cNvGrpSpPr/>
-        <p:nvPr/>
-      </p:nvGrpSpPr>
-      <p:grpSpPr>
-        <a:xfrm>
-          <a:off x="0" y="0"/>
-          <a:ext cx="0" cy="0"/>
-          <a:chOff x="0" y="0"/>
-          <a:chExt cx="0" cy="0"/>
-        </a:xfrm>
-      </p:grpSpPr>
-      <p:sp>
-        <p:nvSpPr>
-          <p:cNvPr id="2" name="Rectangle 1"/>
-          <p:cNvSpPr/>
-          <p:nvPr/>
-        </p:nvSpPr>
-        <p:spPr>
-          <a:xfrm>
-            <a:off x="0" y="0"/>
-            <a:ext cx="12188952" cy="64008"/>
-          </a:xfrm>
-          <a:prstGeom prst="rect">
-            <a:avLst/>
-          </a:prstGeom>
-          <a:solidFill>
-            <a:srgbClr val="1A56A8"/>
-          </a:solidFill>
-          <a:ln>
-            <a:noFill/>
-          </a:ln>
-        </p:spPr>
-        <p:style>
-          <a:lnRef idx="1">
-            <a:schemeClr val="accent1"/>
-          </a:lnRef>
-          <a:fillRef idx="3">
-            <a:schemeClr val="accent1"/>
-          </a:fillRef>
-          <a:effectRef idx="2">
-            <a:schemeClr val="accent1"/>
-          </a:effectRef>
-          <a:fontRef idx="minor">
-            <a:schemeClr val="lt1"/>
-          </a:fontRef>
-        </p:style>
-        <p:txBody>
-          <a:bodyPr rtlCol="0" anchor="ctr"/>
-          <a:lstStyle/>
-          <a:p>
-            <a:pPr algn="ctr"/>
-            <a:endParaRPr/>
-          </a:p>
-        </p:txBody>
-      </p:sp>
-      <p:sp>
-        <p:nvSpPr>
-          <p:cNvPr id="3" name="TextBox 2"/>
-          <p:cNvSpPr txBox="1"/>
-          <p:nvPr/>
-        </p:nvSpPr>
-        <p:spPr>
-          <a:xfrm>
-            <a:off x="548640" y="164592"/>
-            <a:ext cx="11091672" cy="502920"/>
-          </a:xfrm>
-          <a:prstGeom prst="rect">
-            <a:avLst/>
-          </a:prstGeom>
-          <a:noFill/>
-        </p:spPr>
-        <p:txBody>
-          <a:bodyPr wrap="none">
-            <a:spAutoFit/>
-          </a:bodyPr>
-          <a:lstStyle/>
-          <a:p>
-            <a:r>
-              <a:rPr sz="2200" b="1">
-                <a:solidFill>
-                  <a:srgbClr val="1A56A8"/>
-                </a:solidFill>
-              </a:rPr>
-              <a:t>Results - Task 1: Named Entity Recognition</a:t>
-            </a:r>
-          </a:p>
-        </p:txBody>
-      </p:sp>
-      <p:sp>
-        <p:nvSpPr>
-          <p:cNvPr id="4" name="Rectangle 3"/>
-          <p:cNvSpPr/>
-          <p:nvPr/>
-        </p:nvSpPr>
-        <p:spPr>
-          <a:xfrm>
-            <a:off x="548640" y="667512"/>
-            <a:ext cx="11091672" cy="22860"/>
-          </a:xfrm>
-          <a:prstGeom prst="rect">
-            <a:avLst/>
-          </a:prstGeom>
-          <a:solidFill>
-            <a:srgbClr val="E8F0FB"/>
-          </a:solidFill>
-          <a:ln>
-            <a:noFill/>
-          </a:ln>
-        </p:spPr>
-        <p:style>
-          <a:lnRef idx="1">
-            <a:schemeClr val="accent1"/>
-          </a:lnRef>
-          <a:fillRef idx="3">
-            <a:schemeClr val="accent1"/>
-          </a:fillRef>
-          <a:effectRef idx="2">
-            <a:schemeClr val="accent1"/>
-          </a:effectRef>
-          <a:fontRef idx="minor">
-            <a:schemeClr val="lt1"/>
-          </a:fontRef>
-        </p:style>
-        <p:txBody>
-          <a:bodyPr rtlCol="0" anchor="ctr"/>
-          <a:lstStyle/>
-          <a:p>
-            <a:pPr algn="ctr"/>
-            <a:endParaRPr/>
-          </a:p>
-        </p:txBody>
-      </p:sp>
-      <p:sp>
-        <p:nvSpPr>
-          <p:cNvPr id="5" name="Rectangle 4"/>
-          <p:cNvSpPr/>
-          <p:nvPr/>
-        </p:nvSpPr>
-        <p:spPr>
-          <a:xfrm>
-            <a:off x="0" y="6565392"/>
-            <a:ext cx="12188952" cy="292608"/>
-          </a:xfrm>
-          <a:prstGeom prst="rect">
-            <a:avLst/>
-          </a:prstGeom>
-          <a:solidFill>
-            <a:srgbClr val="F5F8FE"/>
-          </a:solidFill>
-          <a:ln>
-            <a:noFill/>
-          </a:ln>
-        </p:spPr>
-        <p:style>
-          <a:lnRef idx="1">
-            <a:schemeClr val="accent1"/>
-          </a:lnRef>
-          <a:fillRef idx="3">
-            <a:schemeClr val="accent1"/>
-          </a:fillRef>
-          <a:effectRef idx="2">
-            <a:schemeClr val="accent1"/>
-          </a:effectRef>
-          <a:fontRef idx="minor">
-            <a:schemeClr val="lt1"/>
-          </a:fontRef>
-        </p:style>
-        <p:txBody>
-          <a:bodyPr rtlCol="0" anchor="ctr"/>
-          <a:lstStyle/>
-          <a:p>
-            <a:pPr algn="ctr"/>
-            <a:endParaRPr/>
-          </a:p>
-        </p:txBody>
-      </p:sp>
-      <p:sp>
-        <p:nvSpPr>
-          <p:cNvPr id="6" name="Rectangle 5"/>
-          <p:cNvSpPr/>
-          <p:nvPr/>
-        </p:nvSpPr>
-        <p:spPr>
-          <a:xfrm>
-            <a:off x="0" y="6556248"/>
-            <a:ext cx="12188952" cy="9144"/>
-          </a:xfrm>
-          <a:prstGeom prst="rect">
-            <a:avLst/>
-          </a:prstGeom>
-          <a:solidFill>
-            <a:srgbClr val="D0E2F8"/>
-          </a:solidFill>
-          <a:ln>
-            <a:noFill/>
-          </a:ln>
-        </p:spPr>
-        <p:style>
-          <a:lnRef idx="1">
-            <a:schemeClr val="accent1"/>
-          </a:lnRef>
-          <a:fillRef idx="3">
-            <a:schemeClr val="accent1"/>
-          </a:fillRef>
-          <a:effectRef idx="2">
-            <a:schemeClr val="accent1"/>
-          </a:effectRef>
-          <a:fontRef idx="minor">
-            <a:schemeClr val="lt1"/>
-          </a:fontRef>
-        </p:style>
-        <p:txBody>
-          <a:bodyPr rtlCol="0" anchor="ctr"/>
-          <a:lstStyle/>
-          <a:p>
-            <a:pPr algn="ctr"/>
-            <a:endParaRPr/>
-          </a:p>
-        </p:txBody>
-      </p:sp>
-      <p:sp>
-        <p:nvSpPr>
-          <p:cNvPr id="7" name="TextBox 6"/>
-          <p:cNvSpPr txBox="1"/>
-          <p:nvPr/>
-        </p:nvSpPr>
-        <p:spPr>
-          <a:xfrm>
-            <a:off x="365760" y="6583680"/>
-            <a:ext cx="8229600" cy="228600"/>
-          </a:xfrm>
-          <a:prstGeom prst="rect">
-            <a:avLst/>
-          </a:prstGeom>
-          <a:noFill/>
-        </p:spPr>
-        <p:txBody>
-          <a:bodyPr wrap="square">
-            <a:spAutoFit/>
-          </a:bodyPr>
-          <a:lstStyle/>
-          <a:p>
-            <a:pPr algn="l"/>
-            <a:r>
-              <a:rPr sz="900" b="0">
+              <a:t>7</a:t>
+            </a:r>
+            <a:r>
+              <a:rPr sz="900" b="0" dirty="0">
                 <a:solidFill>
                   <a:srgbClr val="666666"/>
                 </a:solidFill>
               </a:rPr>
-              <a:t>CSCI E-222 · NLP for Healthcare · O. Mykhailovskyi</a:t>
-            </a:r>
-          </a:p>
-        </p:txBody>
-      </p:sp>
-      <p:sp>
-        <p:nvSpPr>
-          <p:cNvPr id="8" name="TextBox 7"/>
-          <p:cNvSpPr txBox="1"/>
-          <p:nvPr/>
-        </p:nvSpPr>
-        <p:spPr>
-          <a:xfrm>
-            <a:off x="11091672" y="6583680"/>
-            <a:ext cx="914400" cy="228600"/>
-          </a:xfrm>
-          <a:prstGeom prst="rect">
-            <a:avLst/>
-          </a:prstGeom>
-          <a:noFill/>
-        </p:spPr>
-        <p:txBody>
-          <a:bodyPr wrap="square">
-            <a:spAutoFit/>
-          </a:bodyPr>
-          <a:lstStyle/>
-          <a:p>
-            <a:pPr algn="r"/>
-            <a:r>
-              <a:rPr sz="900" b="0">
-                <a:solidFill>
-                  <a:srgbClr val="666666"/>
-                </a:solidFill>
-              </a:rPr>
-              <a:t>8 / 19</a:t>
+              <a:t> / 19</a:t>
             </a:r>
           </a:p>
         </p:txBody>
@@ -18604,7 +18393,7 @@
         <p:spPr>
           <a:xfrm>
             <a:off x="457200" y="1874519"/>
-            <a:ext cx="4572000" cy="256032"/>
+            <a:ext cx="3024354" cy="292388"/>
           </a:xfrm>
           <a:prstGeom prst="rect">
             <a:avLst/>
@@ -18618,12 +18407,52 @@
           <a:lstStyle/>
           <a:p>
             <a:r>
-              <a:rPr sz="1300" b="1">
+              <a:rPr sz="1300" b="1" dirty="0" err="1">
                 <a:solidFill>
                   <a:srgbClr val="1A56A8"/>
                 </a:solidFill>
               </a:rPr>
-              <a:t>BioClinicalBERT - Entity Performance</a:t>
+              <a:t>BioClinicalBERT</a:t>
+            </a:r>
+            <a:r>
+              <a:rPr sz="1300" b="1" dirty="0">
+                <a:solidFill>
+                  <a:srgbClr val="1A56A8"/>
+                </a:solidFill>
+              </a:rPr>
+              <a:t> </a:t>
+            </a:r>
+            <a:r>
+              <a:rPr lang="en-US" sz="1300" b="1" dirty="0">
+                <a:solidFill>
+                  <a:srgbClr val="1A56A8"/>
+                </a:solidFill>
+              </a:rPr>
+              <a:t>–</a:t>
+            </a:r>
+            <a:r>
+              <a:rPr sz="1300" b="1" dirty="0">
+                <a:solidFill>
+                  <a:srgbClr val="1A56A8"/>
+                </a:solidFill>
+              </a:rPr>
+              <a:t> </a:t>
+            </a:r>
+            <a:r>
+              <a:rPr lang="en-US" sz="1300" b="1" dirty="0">
+                <a:solidFill>
+                  <a:srgbClr val="1A56A8"/>
+                </a:solidFill>
+              </a:rPr>
+              <a:t>Per-</a:t>
+            </a:r>
+            <a:r>
+              <a:rPr sz="1300" b="1" dirty="0">
+                <a:solidFill>
+                  <a:srgbClr val="1A56A8"/>
+                </a:solidFill>
+              </a:rPr>
+              <a:t>Entity Performance</a:t>
             </a:r>
           </a:p>
         </p:txBody>
@@ -18637,7 +18466,7 @@
           <p:nvPr>
             <p:extLst>
               <p:ext uri="{D42A27DB-BD31-4B8C-83A1-F6EECF244321}">
-                <p14:modId xmlns:p14="http://schemas.microsoft.com/office/powerpoint/2010/main" val="1827518517"/>
+                <p14:modId xmlns:p14="http://schemas.microsoft.com/office/powerpoint/2010/main" val="4081937737"/>
               </p:ext>
             </p:extLst>
           </p:nvPr>
@@ -18688,8 +18517,9 @@
                     <a:bodyPr/>
                     <a:lstStyle/>
                     <a:p>
+                      <a:pPr algn="ctr"/>
                       <a:r>
-                        <a:rPr sz="1100" b="1">
+                        <a:rPr sz="1100" b="1" dirty="0">
                           <a:solidFill>
                             <a:srgbClr val="FFFFFF"/>
                           </a:solidFill>
@@ -18709,6 +18539,7 @@
                     <a:bodyPr/>
                     <a:lstStyle/>
                     <a:p>
+                      <a:pPr algn="ctr"/>
                       <a:r>
                         <a:rPr sz="1100" b="1">
                           <a:solidFill>
@@ -18730,8 +18561,9 @@
                     <a:bodyPr/>
                     <a:lstStyle/>
                     <a:p>
+                      <a:pPr algn="ctr"/>
                       <a:r>
-                        <a:rPr sz="1100" b="1">
+                        <a:rPr sz="1100" b="1" dirty="0">
                           <a:solidFill>
                             <a:srgbClr val="FFFFFF"/>
                           </a:solidFill>
@@ -18751,6 +18583,7 @@
                     <a:bodyPr/>
                     <a:lstStyle/>
                     <a:p>
+                      <a:pPr algn="ctr"/>
                       <a:r>
                         <a:rPr sz="1100" b="1">
                           <a:solidFill>
@@ -18779,13 +18612,14 @@
                     <a:bodyPr/>
                     <a:lstStyle/>
                     <a:p>
+                      <a:pPr algn="ctr"/>
                       <a:r>
-                        <a:rPr sz="1100">
+                        <a:rPr sz="1100" dirty="0">
                           <a:solidFill>
                             <a:srgbClr val="1A1A1A"/>
                           </a:solidFill>
                         </a:rPr>
-                        <a:t>T204 (Receptor)</a:t>
+                        <a:t>T204 </a:t>
                       </a:r>
                     </a:p>
                   </a:txBody>
@@ -18796,13 +18630,37 @@
                     <a:bodyPr/>
                     <a:lstStyle/>
                     <a:p>
+                      <a:pPr algn="ctr"/>
                       <a:r>
-                        <a:rPr sz="1100">
+                        <a:rPr lang="en-US" sz="1100" dirty="0">
                           <a:solidFill>
                             <a:srgbClr val="1A1A1A"/>
                           </a:solidFill>
                         </a:rPr>
-                        <a:t>High</a:t>
+                        <a:t>0.8</a:t>
+                      </a:r>
+                      <a:endParaRPr sz="1100" dirty="0">
+                        <a:solidFill>
+                          <a:srgbClr val="1A1A1A"/>
+                        </a:solidFill>
+                      </a:endParaRPr>
+                    </a:p>
+                  </a:txBody>
+                  <a:tcPr/>
+                </a:tc>
+                <a:tc>
+                  <a:txBody>
+                    <a:bodyPr/>
+                    <a:lstStyle/>
+                    <a:p>
+                      <a:pPr algn="ctr"/>
+                      <a:r>
+                        <a:rPr sz="1100" dirty="0">
+                          <a:solidFill>
+                            <a:srgbClr val="1A1A1A"/>
+                          </a:solidFill>
+                        </a:rPr>
+                        <a:t>T059</a:t>
                       </a:r>
                     </a:p>
                   </a:txBody>
@@ -18813,44 +18671,15 @@
                     <a:bodyPr/>
                     <a:lstStyle/>
                     <a:p>
-                      <a:r>
-                        <a:rPr sz="1100">
-                          <a:solidFill>
-                            <a:srgbClr val="1A1A1A"/>
-                          </a:solidFill>
-                        </a:rPr>
-                        <a:t>T059 (Lab Procedure)</a:t>
-                      </a:r>
-                    </a:p>
-                  </a:txBody>
-                  <a:tcPr/>
-                </a:tc>
-                <a:tc>
-                  <a:txBody>
-                    <a:bodyPr/>
-                    <a:lstStyle/>
-                    <a:p>
+                      <a:pPr algn="ctr"/>
                       <a:r>
                         <a:rPr sz="1100" dirty="0">
                           <a:solidFill>
                             <a:srgbClr val="1A1A1A"/>
                           </a:solidFill>
                         </a:rPr>
-                        <a:t>~0</a:t>
+                        <a:t>0</a:t>
                       </a:r>
-                      <a:r>
-                        <a:rPr lang="en-US" sz="1100" dirty="0">
-                          <a:solidFill>
-                            <a:srgbClr val="1A1A1A"/>
-                          </a:solidFill>
-                        </a:rPr>
-                        <a:t>.8</a:t>
-                      </a:r>
-                      <a:endParaRPr sz="1100" dirty="0">
-                        <a:solidFill>
-                          <a:srgbClr val="1A1A1A"/>
-                        </a:solidFill>
-                      </a:endParaRPr>
                     </a:p>
                   </a:txBody>
                   <a:tcPr/>
@@ -18867,13 +18696,14 @@
                     <a:bodyPr/>
                     <a:lstStyle/>
                     <a:p>
+                      <a:pPr algn="ctr"/>
                       <a:r>
-                        <a:rPr sz="1100">
+                        <a:rPr sz="1100" dirty="0">
                           <a:solidFill>
                             <a:srgbClr val="1A1A1A"/>
                           </a:solidFill>
                         </a:rPr>
-                        <a:t>T103 (Chemical)</a:t>
+                        <a:t>T103</a:t>
                       </a:r>
                     </a:p>
                   </a:txBody>
@@ -18888,13 +18718,41 @@
                     <a:bodyPr/>
                     <a:lstStyle/>
                     <a:p>
+                      <a:pPr algn="ctr"/>
                       <a:r>
-                        <a:rPr sz="1100">
+                        <a:rPr lang="en-US" sz="1100" dirty="0">
                           <a:solidFill>
                             <a:srgbClr val="1A1A1A"/>
                           </a:solidFill>
                         </a:rPr>
-                        <a:t>High</a:t>
+                        <a:t>0.75</a:t>
+                      </a:r>
+                      <a:endParaRPr sz="1100" dirty="0">
+                        <a:solidFill>
+                          <a:srgbClr val="1A1A1A"/>
+                        </a:solidFill>
+                      </a:endParaRPr>
+                    </a:p>
+                  </a:txBody>
+                  <a:tcPr>
+                    <a:solidFill>
+                      <a:srgbClr val="F5F8FE"/>
+                    </a:solidFill>
+                  </a:tcPr>
+                </a:tc>
+                <a:tc>
+                  <a:txBody>
+                    <a:bodyPr/>
+                    <a:lstStyle/>
+                    <a:p>
+                      <a:pPr algn="ctr"/>
+                      <a:r>
+                        <a:rPr sz="1100" dirty="0">
+                          <a:solidFill>
+                            <a:srgbClr val="1A1A1A"/>
+                          </a:solidFill>
+                        </a:rPr>
+                        <a:t>T024</a:t>
                       </a:r>
                     </a:p>
                   </a:txBody>
@@ -18909,48 +18767,15 @@
                     <a:bodyPr/>
                     <a:lstStyle/>
                     <a:p>
-                      <a:r>
-                        <a:rPr sz="1100">
-                          <a:solidFill>
-                            <a:srgbClr val="1A1A1A"/>
-                          </a:solidFill>
-                        </a:rPr>
-                        <a:t>T024 (Cell Component)</a:t>
-                      </a:r>
-                    </a:p>
-                  </a:txBody>
-                  <a:tcPr>
-                    <a:solidFill>
-                      <a:srgbClr val="F5F8FE"/>
-                    </a:solidFill>
-                  </a:tcPr>
-                </a:tc>
-                <a:tc>
-                  <a:txBody>
-                    <a:bodyPr/>
-                    <a:lstStyle/>
-                    <a:p>
+                      <a:pPr algn="ctr"/>
                       <a:r>
                         <a:rPr sz="1100" dirty="0">
                           <a:solidFill>
                             <a:srgbClr val="1A1A1A"/>
                           </a:solidFill>
                         </a:rPr>
-                        <a:t>~0</a:t>
+                        <a:t>0</a:t>
                       </a:r>
-                      <a:r>
-                        <a:rPr lang="en-US" sz="1100" dirty="0">
-                          <a:solidFill>
-                            <a:srgbClr val="1A1A1A"/>
-                          </a:solidFill>
-                        </a:rPr>
-                        <a:t>.8</a:t>
-                      </a:r>
-                      <a:endParaRPr sz="1100" dirty="0">
-                        <a:solidFill>
-                          <a:srgbClr val="1A1A1A"/>
-                        </a:solidFill>
-                      </a:endParaRPr>
                     </a:p>
                   </a:txBody>
                   <a:tcPr>
@@ -18971,13 +18796,14 @@
                     <a:bodyPr/>
                     <a:lstStyle/>
                     <a:p>
+                      <a:pPr algn="ctr"/>
                       <a:r>
-                        <a:rPr sz="1100">
+                        <a:rPr sz="1100" dirty="0">
                           <a:solidFill>
                             <a:srgbClr val="1A1A1A"/>
                           </a:solidFill>
                         </a:rPr>
-                        <a:t>T017 (Anatomy)</a:t>
+                        <a:t>T017</a:t>
                       </a:r>
                     </a:p>
                   </a:txBody>
@@ -18988,13 +18814,37 @@
                     <a:bodyPr/>
                     <a:lstStyle/>
                     <a:p>
+                      <a:pPr algn="ctr"/>
                       <a:r>
-                        <a:rPr sz="1100">
+                        <a:rPr lang="en-US" sz="1100" dirty="0">
                           <a:solidFill>
                             <a:srgbClr val="1A1A1A"/>
                           </a:solidFill>
                         </a:rPr>
-                        <a:t>High</a:t>
+                        <a:t>0.73</a:t>
+                      </a:r>
+                      <a:endParaRPr sz="1100" dirty="0">
+                        <a:solidFill>
+                          <a:srgbClr val="1A1A1A"/>
+                        </a:solidFill>
+                      </a:endParaRPr>
+                    </a:p>
+                  </a:txBody>
+                  <a:tcPr/>
+                </a:tc>
+                <a:tc>
+                  <a:txBody>
+                    <a:bodyPr/>
+                    <a:lstStyle/>
+                    <a:p>
+                      <a:pPr algn="ctr"/>
+                      <a:r>
+                        <a:rPr sz="1100" dirty="0">
+                          <a:solidFill>
+                            <a:srgbClr val="1A1A1A"/>
+                          </a:solidFill>
+                        </a:rPr>
+                        <a:t>T081</a:t>
                       </a:r>
                     </a:p>
                   </a:txBody>
@@ -19005,44 +18855,15 @@
                     <a:bodyPr/>
                     <a:lstStyle/>
                     <a:p>
-                      <a:r>
-                        <a:rPr sz="1100">
-                          <a:solidFill>
-                            <a:srgbClr val="1A1A1A"/>
-                          </a:solidFill>
-                        </a:rPr>
-                        <a:t>T081 (Quantitative Concept)</a:t>
-                      </a:r>
-                    </a:p>
-                  </a:txBody>
-                  <a:tcPr/>
-                </a:tc>
-                <a:tc>
-                  <a:txBody>
-                    <a:bodyPr/>
-                    <a:lstStyle/>
-                    <a:p>
+                      <a:pPr algn="ctr"/>
                       <a:r>
                         <a:rPr sz="1100" dirty="0">
                           <a:solidFill>
                             <a:srgbClr val="1A1A1A"/>
                           </a:solidFill>
                         </a:rPr>
-                        <a:t>~0</a:t>
+                        <a:t>0</a:t>
                       </a:r>
-                      <a:r>
-                        <a:rPr lang="en-US" sz="1100" dirty="0">
-                          <a:solidFill>
-                            <a:srgbClr val="1A1A1A"/>
-                          </a:solidFill>
-                        </a:rPr>
-                        <a:t>.7</a:t>
-                      </a:r>
-                      <a:endParaRPr sz="1100" dirty="0">
-                        <a:solidFill>
-                          <a:srgbClr val="1A1A1A"/>
-                        </a:solidFill>
-                      </a:endParaRPr>
                     </a:p>
                   </a:txBody>
                   <a:tcPr/>
@@ -19059,134 +18880,13 @@
       </p:graphicFrame>
       <p:sp>
         <p:nvSpPr>
-          <p:cNvPr id="23" name="Rectangle 22"/>
-          <p:cNvSpPr/>
-          <p:nvPr/>
-        </p:nvSpPr>
-        <p:spPr>
-          <a:xfrm>
-            <a:off x="457200" y="3401568"/>
-            <a:ext cx="41148" cy="594360"/>
-          </a:xfrm>
-          <a:prstGeom prst="rect">
-            <a:avLst/>
-          </a:prstGeom>
-          <a:solidFill>
-            <a:srgbClr val="1A56A8"/>
-          </a:solidFill>
-          <a:ln>
-            <a:noFill/>
-          </a:ln>
-        </p:spPr>
-        <p:style>
-          <a:lnRef idx="1">
-            <a:schemeClr val="accent1"/>
-          </a:lnRef>
-          <a:fillRef idx="3">
-            <a:schemeClr val="accent1"/>
-          </a:fillRef>
-          <a:effectRef idx="2">
-            <a:schemeClr val="accent1"/>
-          </a:effectRef>
-          <a:fontRef idx="minor">
-            <a:schemeClr val="lt1"/>
-          </a:fontRef>
-        </p:style>
-        <p:txBody>
-          <a:bodyPr rtlCol="0" anchor="ctr"/>
-          <a:lstStyle/>
-          <a:p>
-            <a:pPr algn="ctr"/>
-            <a:endParaRPr/>
-          </a:p>
-        </p:txBody>
-      </p:sp>
-      <p:sp>
-        <p:nvSpPr>
-          <p:cNvPr id="24" name="Rectangle 23"/>
-          <p:cNvSpPr/>
-          <p:nvPr/>
-        </p:nvSpPr>
-        <p:spPr>
-          <a:xfrm>
-            <a:off x="498348" y="3401568"/>
-            <a:ext cx="5262372" cy="594360"/>
-          </a:xfrm>
-          <a:prstGeom prst="rect">
-            <a:avLst/>
-          </a:prstGeom>
-          <a:solidFill>
-            <a:srgbClr val="E8F0FB"/>
-          </a:solidFill>
-          <a:ln>
-            <a:noFill/>
-          </a:ln>
-        </p:spPr>
-        <p:style>
-          <a:lnRef idx="1">
-            <a:schemeClr val="accent1"/>
-          </a:lnRef>
-          <a:fillRef idx="3">
-            <a:schemeClr val="accent1"/>
-          </a:fillRef>
-          <a:effectRef idx="2">
-            <a:schemeClr val="accent1"/>
-          </a:effectRef>
-          <a:fontRef idx="minor">
-            <a:schemeClr val="lt1"/>
-          </a:fontRef>
-        </p:style>
-        <p:txBody>
-          <a:bodyPr rtlCol="0" anchor="ctr"/>
-          <a:lstStyle/>
-          <a:p>
-            <a:pPr algn="ctr"/>
-            <a:endParaRPr/>
-          </a:p>
-        </p:txBody>
-      </p:sp>
-      <p:sp>
-        <p:nvSpPr>
-          <p:cNvPr id="25" name="TextBox 24"/>
-          <p:cNvSpPr txBox="1"/>
-          <p:nvPr/>
-        </p:nvSpPr>
-        <p:spPr>
-          <a:xfrm>
-            <a:off x="566928" y="3474720"/>
-            <a:ext cx="5102352" cy="484632"/>
-          </a:xfrm>
-          <a:prstGeom prst="rect">
-            <a:avLst/>
-          </a:prstGeom>
-          <a:noFill/>
-        </p:spPr>
-        <p:txBody>
-          <a:bodyPr wrap="square">
-            <a:spAutoFit/>
-          </a:bodyPr>
-          <a:lstStyle/>
-          <a:p>
-            <a:r>
-              <a:rPr sz="1100" dirty="0">
-                <a:solidFill>
-                  <a:srgbClr val="1A1A1A"/>
-                </a:solidFill>
-              </a:rPr>
-              <a:t>Class weighting helps frequent entities but very rare classes (&lt; 5 training examples) remain near zero - a fundamental data sparsity problem.</a:t>
-            </a:r>
-          </a:p>
-        </p:txBody>
-      </p:sp>
-      <p:sp>
-        <p:nvSpPr>
           <p:cNvPr id="26" name="Rectangle 25"/>
           <p:cNvSpPr/>
           <p:nvPr/>
         </p:nvSpPr>
         <p:spPr>
           <a:xfrm>
-            <a:off x="457199" y="4087368"/>
+            <a:off x="6238496" y="4704587"/>
             <a:ext cx="45719" cy="905256"/>
           </a:xfrm>
           <a:prstGeom prst="rect">
@@ -19230,8 +18930,8 @@
         </p:nvSpPr>
         <p:spPr>
           <a:xfrm>
-            <a:off x="498348" y="4087367"/>
-            <a:ext cx="5262372" cy="905257"/>
+            <a:off x="6286500" y="4722875"/>
+            <a:ext cx="5445252" cy="905257"/>
           </a:xfrm>
           <a:prstGeom prst="rect">
             <a:avLst/>
@@ -19274,8 +18974,8 @@
         </p:nvSpPr>
         <p:spPr>
           <a:xfrm>
-            <a:off x="566928" y="4160520"/>
-            <a:ext cx="5102352" cy="769441"/>
+            <a:off x="6327648" y="4809884"/>
+            <a:ext cx="5102352" cy="600164"/>
           </a:xfrm>
           <a:prstGeom prst="rect">
             <a:avLst/>
@@ -19289,13 +18989,36 @@
           <a:lstStyle/>
           <a:p>
             <a:r>
+              <a:rPr lang="en-US" sz="1100" dirty="0">
+                <a:solidFill>
+                  <a:srgbClr val="1A1A1A"/>
+                </a:solidFill>
+              </a:rPr>
+              <a:t>Peer</a:t>
+            </a:r>
+            <a:r>
               <a:rPr sz="1100" dirty="0">
                 <a:solidFill>
                   <a:srgbClr val="1A1A1A"/>
                 </a:solidFill>
               </a:rPr>
-              <a:t>Baseline: P=0.631 R=0.673 F1=0.652 | Weighted: P=0.649 R=0.651 F1=0.650
-</a:t>
+              <a:t> baselines: </a:t>
+            </a:r>
+            <a:r>
+              <a:rPr sz="1100" dirty="0" err="1">
+                <a:solidFill>
+                  <a:srgbClr val="1A1A1A"/>
+                </a:solidFill>
+              </a:rPr>
+              <a:t>TaggerOne</a:t>
+            </a:r>
+            <a:r>
+              <a:rPr sz="1100" dirty="0">
+                <a:solidFill>
+                  <a:srgbClr val="1A1A1A"/>
+                </a:solidFill>
+              </a:rPr>
+              <a:t> F1=0.453 · BERT ceiling 0.56</a:t>
             </a:r>
             <a:r>
               <a:rPr lang="en-US" sz="1100" dirty="0">
@@ -19303,7 +19026,7 @@
                   <a:srgbClr val="1A1A1A"/>
                 </a:solidFill>
               </a:rPr>
-              <a:t>Peer</a:t>
+              <a:t>, </a:t>
             </a:r>
             <a:r>
               <a:rPr sz="1100" dirty="0">
@@ -19311,15 +19034,15 @@
                   <a:srgbClr val="1A1A1A"/>
                 </a:solidFill>
               </a:rPr>
-              <a:t> baselines: </a:t>
-            </a:r>
-            <a:r>
-              <a:rPr sz="1100" dirty="0" err="1">
-                <a:solidFill>
-                  <a:srgbClr val="1A1A1A"/>
-                </a:solidFill>
-              </a:rPr>
-              <a:t>TaggerOne</a:t>
+              <a:t>this project exceeds </a:t>
+            </a:r>
+            <a:r>
+              <a:rPr lang="en-US" sz="1100" dirty="0">
+                <a:solidFill>
+                  <a:srgbClr val="1A1A1A"/>
+                </a:solidFill>
+              </a:rPr>
+              <a:t>this metric.</a:t>
             </a:r>
             <a:r>
               <a:rPr sz="1100" dirty="0">
@@ -19327,40 +19050,8 @@
                   <a:srgbClr val="1A1A1A"/>
                 </a:solidFill>
               </a:rPr>
-              <a:t> F1=0.453 · BERT ceiling 0.56</a:t>
-            </a:r>
-            <a:r>
-              <a:rPr lang="en-US" sz="1100" dirty="0">
-                <a:solidFill>
-                  <a:srgbClr val="1A1A1A"/>
-                </a:solidFill>
-              </a:rPr>
-              <a:t>, </a:t>
-            </a:r>
-            <a:r>
-              <a:rPr sz="1100" dirty="0">
-                <a:solidFill>
-                  <a:srgbClr val="1A1A1A"/>
-                </a:solidFill>
-              </a:rPr>
-              <a:t>this project exceeds </a:t>
-            </a:r>
-            <a:r>
-              <a:rPr lang="en-US" sz="1100" dirty="0">
-                <a:solidFill>
-                  <a:srgbClr val="1A1A1A"/>
-                </a:solidFill>
-              </a:rPr>
-              <a:t>this metric.</a:t>
-            </a:r>
-            <a:r>
-              <a:rPr sz="1100" dirty="0">
-                <a:solidFill>
-                  <a:srgbClr val="1A1A1A"/>
-                </a:solidFill>
-              </a:rPr>
               <a:t>
-Encoder architecture is clearly better at structured token-level classification.</a:t>
+Encoder architecture is clearly better at token-level classification.</a:t>
             </a:r>
           </a:p>
         </p:txBody>
@@ -19374,7 +19065,7 @@
         <p:spPr>
           <a:xfrm>
             <a:off x="6217920" y="1874519"/>
-            <a:ext cx="4572000" cy="256032"/>
+            <a:ext cx="910570" cy="292388"/>
           </a:xfrm>
           <a:prstGeom prst="rect">
             <a:avLst/>
@@ -19388,12 +19079,12 @@
           <a:lstStyle/>
           <a:p>
             <a:r>
-              <a:rPr sz="1300" b="1">
+              <a:rPr sz="1300" b="1" dirty="0">
                 <a:solidFill>
                   <a:srgbClr val="1A56A8"/>
                 </a:solidFill>
               </a:rPr>
-              <a:t>Evaluation Caveat</a:t>
+              <a:t>Evaluation</a:t>
             </a:r>
           </a:p>
         </p:txBody>
@@ -19406,8 +19097,8 @@
         </p:nvSpPr>
         <p:spPr>
           <a:xfrm>
-            <a:off x="6217920" y="2176272"/>
-            <a:ext cx="41148" cy="1005840"/>
+            <a:off x="6217919" y="2176272"/>
+            <a:ext cx="45719" cy="719036"/>
           </a:xfrm>
           <a:prstGeom prst="rect">
             <a:avLst/>
@@ -19451,7 +19142,7 @@
         <p:spPr>
           <a:xfrm>
             <a:off x="6259068" y="2176272"/>
-            <a:ext cx="5445252" cy="1005840"/>
+            <a:ext cx="5445252" cy="719036"/>
           </a:xfrm>
           <a:prstGeom prst="rect">
             <a:avLst/>
@@ -19587,7 +19278,7 @@
         <p:spPr>
           <a:xfrm>
             <a:off x="6217920" y="3291840"/>
-            <a:ext cx="4572000" cy="256032"/>
+            <a:ext cx="2111284" cy="292388"/>
           </a:xfrm>
           <a:prstGeom prst="rect">
             <a:avLst/>
@@ -19601,12 +19292,12 @@
           <a:lstStyle/>
           <a:p>
             <a:r>
-              <a:rPr sz="1300" b="1">
+              <a:rPr sz="1300" b="1" dirty="0">
                 <a:solidFill>
                   <a:srgbClr val="1A56A8"/>
                 </a:solidFill>
               </a:rPr>
-              <a:t>Root Cause of Low Overall Scores</a:t>
+              <a:t>Cause of Low Overall Scores</a:t>
             </a:r>
           </a:p>
         </p:txBody>
@@ -19735,7 +19426,7 @@
                   <a:srgbClr val="1A1A1A"/>
                 </a:solidFill>
               </a:rPr>
-              <a:t> has 127 UMLS semantic types; the dataset variant (MTI881) includ</a:t>
+              <a:t> has 127 UMLS semantic types; the dataset inclu</a:t>
             </a:r>
             <a:r>
               <a:rPr lang="en-US" sz="1100" dirty="0">
@@ -19743,7 +19434,7 @@
                   <a:srgbClr val="1A1A1A"/>
                 </a:solidFill>
               </a:rPr>
-              <a:t>ing</a:t>
+              <a:t>des</a:t>
             </a:r>
             <a:r>
               <a:rPr sz="1100" dirty="0">
@@ -19766,6 +19457,805 @@
                 <a:srgbClr val="1A1A1A"/>
               </a:solidFill>
             </a:endParaRPr>
+          </a:p>
+        </p:txBody>
+      </p:sp>
+      <p:graphicFrame>
+        <p:nvGraphicFramePr>
+          <p:cNvPr id="37" name="Table 36">
+            <a:extLst>
+              <a:ext uri="{FF2B5EF4-FFF2-40B4-BE49-F238E27FC236}">
+                <a16:creationId xmlns:a16="http://schemas.microsoft.com/office/drawing/2014/main" id="{98322D22-1B99-0126-826F-E9BF910ECC30}"/>
+              </a:ext>
+            </a:extLst>
+          </p:cNvPr>
+          <p:cNvGraphicFramePr>
+            <a:graphicFrameLocks noGrp="1"/>
+          </p:cNvGraphicFramePr>
+          <p:nvPr>
+            <p:extLst>
+              <p:ext uri="{D42A27DB-BD31-4B8C-83A1-F6EECF244321}">
+                <p14:modId xmlns:p14="http://schemas.microsoft.com/office/powerpoint/2010/main" val="1936118858"/>
+              </p:ext>
+            </p:extLst>
+          </p:nvPr>
+        </p:nvGraphicFramePr>
+        <p:xfrm>
+          <a:off x="457200" y="3915992"/>
+          <a:ext cx="5303520" cy="725680"/>
+        </p:xfrm>
+        <a:graphic>
+          <a:graphicData uri="http://schemas.openxmlformats.org/drawingml/2006/table">
+            <a:tbl>
+              <a:tblPr bandRow="1">
+                <a:tableStyleId>{5C22544A-7EE6-4342-B048-85BDC9FD1C3A}</a:tableStyleId>
+              </a:tblPr>
+              <a:tblGrid>
+                <a:gridCol w="1767840">
+                  <a:extLst>
+                    <a:ext uri="{9D8B030D-6E8A-4147-A177-3AD203B41FA5}">
+                      <a16:colId xmlns:a16="http://schemas.microsoft.com/office/drawing/2014/main" val="1318554875"/>
+                    </a:ext>
+                  </a:extLst>
+                </a:gridCol>
+                <a:gridCol w="1767840">
+                  <a:extLst>
+                    <a:ext uri="{9D8B030D-6E8A-4147-A177-3AD203B41FA5}">
+                      <a16:colId xmlns:a16="http://schemas.microsoft.com/office/drawing/2014/main" val="1670163812"/>
+                    </a:ext>
+                  </a:extLst>
+                </a:gridCol>
+                <a:gridCol w="1767840">
+                  <a:extLst>
+                    <a:ext uri="{9D8B030D-6E8A-4147-A177-3AD203B41FA5}">
+                      <a16:colId xmlns:a16="http://schemas.microsoft.com/office/drawing/2014/main" val="1030334139"/>
+                    </a:ext>
+                  </a:extLst>
+                </a:gridCol>
+              </a:tblGrid>
+              <a:tr h="0">
+                <a:tc>
+                  <a:txBody>
+                    <a:bodyPr/>
+                    <a:lstStyle/>
+                    <a:p>
+                      <a:pPr marL="0" marR="0" algn="ctr">
+                        <a:lnSpc>
+                          <a:spcPct val="115000"/>
+                        </a:lnSpc>
+                        <a:spcAft>
+                          <a:spcPts val="1000"/>
+                        </a:spcAft>
+                        <a:buNone/>
+                      </a:pPr>
+                      <a:r>
+                        <a:rPr lang="en-US" sz="1100" dirty="0">
+                          <a:effectLst/>
+                        </a:rPr>
+                        <a:t>Model</a:t>
+                      </a:r>
+                      <a:endParaRPr lang="en-US" sz="1100" dirty="0">
+                        <a:effectLst/>
+                        <a:latin typeface="Calibri" panose="020F0502020204030204" pitchFamily="34" charset="0"/>
+                        <a:ea typeface="Calibri" panose="020F0502020204030204" pitchFamily="34" charset="0"/>
+                      </a:endParaRPr>
+                    </a:p>
+                  </a:txBody>
+                  <a:tcPr marL="68580" marR="68580" marT="0" marB="0"/>
+                </a:tc>
+                <a:tc>
+                  <a:txBody>
+                    <a:bodyPr/>
+                    <a:lstStyle/>
+                    <a:p>
+                      <a:pPr marL="0" marR="0" algn="ctr">
+                        <a:lnSpc>
+                          <a:spcPct val="115000"/>
+                        </a:lnSpc>
+                        <a:spcAft>
+                          <a:spcPts val="1000"/>
+                        </a:spcAft>
+                        <a:buNone/>
+                      </a:pPr>
+                      <a:r>
+                        <a:rPr lang="en-US" sz="1100" dirty="0">
+                          <a:effectLst/>
+                        </a:rPr>
+                        <a:t>Support</a:t>
+                      </a:r>
+                      <a:endParaRPr lang="en-US" sz="1100" dirty="0">
+                        <a:effectLst/>
+                        <a:latin typeface="Calibri" panose="020F0502020204030204" pitchFamily="34" charset="0"/>
+                        <a:ea typeface="Calibri" panose="020F0502020204030204" pitchFamily="34" charset="0"/>
+                      </a:endParaRPr>
+                    </a:p>
+                  </a:txBody>
+                  <a:tcPr marL="68580" marR="68580" marT="0" marB="0"/>
+                </a:tc>
+                <a:tc>
+                  <a:txBody>
+                    <a:bodyPr/>
+                    <a:lstStyle/>
+                    <a:p>
+                      <a:pPr marL="0" marR="0" algn="ctr">
+                        <a:lnSpc>
+                          <a:spcPct val="115000"/>
+                        </a:lnSpc>
+                        <a:spcAft>
+                          <a:spcPts val="1000"/>
+                        </a:spcAft>
+                        <a:buNone/>
+                      </a:pPr>
+                      <a:r>
+                        <a:rPr lang="en-US" sz="1100" dirty="0">
+                          <a:effectLst/>
+                        </a:rPr>
+                        <a:t>Macro F1</a:t>
+                      </a:r>
+                      <a:endParaRPr lang="en-US" sz="1100" dirty="0">
+                        <a:effectLst/>
+                        <a:latin typeface="Calibri" panose="020F0502020204030204" pitchFamily="34" charset="0"/>
+                        <a:ea typeface="Calibri" panose="020F0502020204030204" pitchFamily="34" charset="0"/>
+                      </a:endParaRPr>
+                    </a:p>
+                  </a:txBody>
+                  <a:tcPr marL="68580" marR="68580" marT="0" marB="0"/>
+                </a:tc>
+                <a:extLst>
+                  <a:ext uri="{0D108BD9-81ED-4DB2-BD59-A6C34878D82A}">
+                    <a16:rowId xmlns:a16="http://schemas.microsoft.com/office/drawing/2014/main" val="1325571764"/>
+                  </a:ext>
+                </a:extLst>
+              </a:tr>
+              <a:tr h="0">
+                <a:tc>
+                  <a:txBody>
+                    <a:bodyPr/>
+                    <a:lstStyle/>
+                    <a:p>
+                      <a:pPr marL="0" marR="0" algn="ctr">
+                        <a:lnSpc>
+                          <a:spcPct val="115000"/>
+                        </a:lnSpc>
+                        <a:spcAft>
+                          <a:spcPts val="1000"/>
+                        </a:spcAft>
+                        <a:buNone/>
+                      </a:pPr>
+                      <a:r>
+                        <a:rPr lang="en-US" sz="1100">
+                          <a:effectLst/>
+                        </a:rPr>
+                        <a:t>Baseline Bio_ClinicalBERT</a:t>
+                      </a:r>
+                      <a:endParaRPr lang="en-US" sz="1100">
+                        <a:effectLst/>
+                        <a:latin typeface="Calibri" panose="020F0502020204030204" pitchFamily="34" charset="0"/>
+                        <a:ea typeface="Calibri" panose="020F0502020204030204" pitchFamily="34" charset="0"/>
+                      </a:endParaRPr>
+                    </a:p>
+                  </a:txBody>
+                  <a:tcPr marL="68580" marR="68580" marT="0" marB="0"/>
+                </a:tc>
+                <a:tc>
+                  <a:txBody>
+                    <a:bodyPr/>
+                    <a:lstStyle/>
+                    <a:p>
+                      <a:pPr marL="0" marR="0" algn="ctr">
+                        <a:lnSpc>
+                          <a:spcPct val="115000"/>
+                        </a:lnSpc>
+                        <a:spcAft>
+                          <a:spcPts val="1000"/>
+                        </a:spcAft>
+                        <a:buNone/>
+                      </a:pPr>
+                      <a:r>
+                        <a:rPr lang="en-US" sz="1100">
+                          <a:effectLst/>
+                        </a:rPr>
+                        <a:t>11,772</a:t>
+                      </a:r>
+                      <a:endParaRPr lang="en-US" sz="1100">
+                        <a:effectLst/>
+                        <a:latin typeface="Calibri" panose="020F0502020204030204" pitchFamily="34" charset="0"/>
+                        <a:ea typeface="Calibri" panose="020F0502020204030204" pitchFamily="34" charset="0"/>
+                      </a:endParaRPr>
+                    </a:p>
+                  </a:txBody>
+                  <a:tcPr marL="68580" marR="68580" marT="0" marB="0"/>
+                </a:tc>
+                <a:tc>
+                  <a:txBody>
+                    <a:bodyPr/>
+                    <a:lstStyle/>
+                    <a:p>
+                      <a:pPr marL="0" marR="0" algn="ctr">
+                        <a:lnSpc>
+                          <a:spcPct val="115000"/>
+                        </a:lnSpc>
+                        <a:spcAft>
+                          <a:spcPts val="1000"/>
+                        </a:spcAft>
+                        <a:buNone/>
+                      </a:pPr>
+                      <a:r>
+                        <a:rPr lang="en-US" sz="1100">
+                          <a:effectLst/>
+                        </a:rPr>
+                        <a:t>0.65</a:t>
+                      </a:r>
+                      <a:endParaRPr lang="en-US" sz="1100">
+                        <a:effectLst/>
+                        <a:latin typeface="Calibri" panose="020F0502020204030204" pitchFamily="34" charset="0"/>
+                        <a:ea typeface="Calibri" panose="020F0502020204030204" pitchFamily="34" charset="0"/>
+                      </a:endParaRPr>
+                    </a:p>
+                  </a:txBody>
+                  <a:tcPr marL="68580" marR="68580" marT="0" marB="0"/>
+                </a:tc>
+                <a:extLst>
+                  <a:ext uri="{0D108BD9-81ED-4DB2-BD59-A6C34878D82A}">
+                    <a16:rowId xmlns:a16="http://schemas.microsoft.com/office/drawing/2014/main" val="1698030473"/>
+                  </a:ext>
+                </a:extLst>
+              </a:tr>
+              <a:tr h="0">
+                <a:tc>
+                  <a:txBody>
+                    <a:bodyPr/>
+                    <a:lstStyle/>
+                    <a:p>
+                      <a:pPr marL="0" marR="0" algn="ctr">
+                        <a:lnSpc>
+                          <a:spcPct val="115000"/>
+                        </a:lnSpc>
+                        <a:spcAft>
+                          <a:spcPts val="1000"/>
+                        </a:spcAft>
+                        <a:buNone/>
+                      </a:pPr>
+                      <a:r>
+                        <a:rPr lang="en-US" sz="1100">
+                          <a:effectLst/>
+                        </a:rPr>
+                        <a:t>Weighted Bio_ClinicalBERT</a:t>
+                      </a:r>
+                      <a:endParaRPr lang="en-US" sz="1100">
+                        <a:effectLst/>
+                        <a:latin typeface="Calibri" panose="020F0502020204030204" pitchFamily="34" charset="0"/>
+                        <a:ea typeface="Calibri" panose="020F0502020204030204" pitchFamily="34" charset="0"/>
+                      </a:endParaRPr>
+                    </a:p>
+                  </a:txBody>
+                  <a:tcPr marL="68580" marR="68580" marT="0" marB="0"/>
+                </a:tc>
+                <a:tc>
+                  <a:txBody>
+                    <a:bodyPr/>
+                    <a:lstStyle/>
+                    <a:p>
+                      <a:pPr marL="0" marR="0" algn="ctr">
+                        <a:lnSpc>
+                          <a:spcPct val="115000"/>
+                        </a:lnSpc>
+                        <a:spcAft>
+                          <a:spcPts val="1000"/>
+                        </a:spcAft>
+                        <a:buNone/>
+                      </a:pPr>
+                      <a:r>
+                        <a:rPr lang="en-US" sz="1100" dirty="0">
+                          <a:effectLst/>
+                        </a:rPr>
+                        <a:t>11,772</a:t>
+                      </a:r>
+                      <a:endParaRPr lang="en-US" sz="1100" dirty="0">
+                        <a:effectLst/>
+                        <a:latin typeface="Calibri" panose="020F0502020204030204" pitchFamily="34" charset="0"/>
+                        <a:ea typeface="Calibri" panose="020F0502020204030204" pitchFamily="34" charset="0"/>
+                      </a:endParaRPr>
+                    </a:p>
+                  </a:txBody>
+                  <a:tcPr marL="68580" marR="68580" marT="0" marB="0"/>
+                </a:tc>
+                <a:tc>
+                  <a:txBody>
+                    <a:bodyPr/>
+                    <a:lstStyle/>
+                    <a:p>
+                      <a:pPr marL="0" marR="0" algn="ctr">
+                        <a:lnSpc>
+                          <a:spcPct val="115000"/>
+                        </a:lnSpc>
+                        <a:spcAft>
+                          <a:spcPts val="1000"/>
+                        </a:spcAft>
+                        <a:buNone/>
+                      </a:pPr>
+                      <a:r>
+                        <a:rPr lang="en-US" sz="1100">
+                          <a:effectLst/>
+                        </a:rPr>
+                        <a:t>0.65</a:t>
+                      </a:r>
+                      <a:endParaRPr lang="en-US" sz="1100">
+                        <a:effectLst/>
+                        <a:latin typeface="Calibri" panose="020F0502020204030204" pitchFamily="34" charset="0"/>
+                        <a:ea typeface="Calibri" panose="020F0502020204030204" pitchFamily="34" charset="0"/>
+                      </a:endParaRPr>
+                    </a:p>
+                  </a:txBody>
+                  <a:tcPr marL="68580" marR="68580" marT="0" marB="0"/>
+                </a:tc>
+                <a:extLst>
+                  <a:ext uri="{0D108BD9-81ED-4DB2-BD59-A6C34878D82A}">
+                    <a16:rowId xmlns:a16="http://schemas.microsoft.com/office/drawing/2014/main" val="2289852007"/>
+                  </a:ext>
+                </a:extLst>
+              </a:tr>
+              <a:tr h="0">
+                <a:tc>
+                  <a:txBody>
+                    <a:bodyPr/>
+                    <a:lstStyle/>
+                    <a:p>
+                      <a:pPr marL="0" marR="0" algn="ctr">
+                        <a:lnSpc>
+                          <a:spcPct val="115000"/>
+                        </a:lnSpc>
+                        <a:spcAft>
+                          <a:spcPts val="1000"/>
+                        </a:spcAft>
+                        <a:buNone/>
+                      </a:pPr>
+                      <a:r>
+                        <a:rPr lang="en-US" sz="1100">
+                          <a:effectLst/>
+                        </a:rPr>
+                        <a:t>MedGemma-4B</a:t>
+                      </a:r>
+                      <a:endParaRPr lang="en-US" sz="1100">
+                        <a:effectLst/>
+                        <a:latin typeface="Calibri" panose="020F0502020204030204" pitchFamily="34" charset="0"/>
+                        <a:ea typeface="Calibri" panose="020F0502020204030204" pitchFamily="34" charset="0"/>
+                      </a:endParaRPr>
+                    </a:p>
+                  </a:txBody>
+                  <a:tcPr marL="68580" marR="68580" marT="0" marB="0"/>
+                </a:tc>
+                <a:tc>
+                  <a:txBody>
+                    <a:bodyPr/>
+                    <a:lstStyle/>
+                    <a:p>
+                      <a:pPr marL="0" marR="0" algn="ctr">
+                        <a:lnSpc>
+                          <a:spcPct val="115000"/>
+                        </a:lnSpc>
+                        <a:spcAft>
+                          <a:spcPts val="1000"/>
+                        </a:spcAft>
+                        <a:buNone/>
+                      </a:pPr>
+                      <a:r>
+                        <a:rPr lang="en-US" sz="1100" dirty="0">
+                          <a:effectLst/>
+                        </a:rPr>
+                        <a:t>1,221</a:t>
+                      </a:r>
+                      <a:endParaRPr lang="en-US" sz="1100" dirty="0">
+                        <a:effectLst/>
+                        <a:latin typeface="Calibri" panose="020F0502020204030204" pitchFamily="34" charset="0"/>
+                        <a:ea typeface="Calibri" panose="020F0502020204030204" pitchFamily="34" charset="0"/>
+                      </a:endParaRPr>
+                    </a:p>
+                  </a:txBody>
+                  <a:tcPr marL="68580" marR="68580" marT="0" marB="0"/>
+                </a:tc>
+                <a:tc>
+                  <a:txBody>
+                    <a:bodyPr/>
+                    <a:lstStyle/>
+                    <a:p>
+                      <a:pPr marL="0" marR="0" algn="ctr">
+                        <a:lnSpc>
+                          <a:spcPct val="115000"/>
+                        </a:lnSpc>
+                        <a:spcAft>
+                          <a:spcPts val="1000"/>
+                        </a:spcAft>
+                        <a:buNone/>
+                      </a:pPr>
+                      <a:r>
+                        <a:rPr lang="en-US" sz="1100" dirty="0">
+                          <a:effectLst/>
+                        </a:rPr>
+                        <a:t>0.27</a:t>
+                      </a:r>
+                      <a:endParaRPr lang="en-US" sz="1100" dirty="0">
+                        <a:effectLst/>
+                        <a:latin typeface="Calibri" panose="020F0502020204030204" pitchFamily="34" charset="0"/>
+                        <a:ea typeface="Calibri" panose="020F0502020204030204" pitchFamily="34" charset="0"/>
+                      </a:endParaRPr>
+                    </a:p>
+                  </a:txBody>
+                  <a:tcPr marL="68580" marR="68580" marT="0" marB="0"/>
+                </a:tc>
+                <a:extLst>
+                  <a:ext uri="{0D108BD9-81ED-4DB2-BD59-A6C34878D82A}">
+                    <a16:rowId xmlns:a16="http://schemas.microsoft.com/office/drawing/2014/main" val="1264178470"/>
+                  </a:ext>
+                </a:extLst>
+              </a:tr>
+            </a:tbl>
+          </a:graphicData>
+        </a:graphic>
+      </p:graphicFrame>
+      <p:sp>
+        <p:nvSpPr>
+          <p:cNvPr id="38" name="TextBox 37">
+            <a:extLst>
+              <a:ext uri="{FF2B5EF4-FFF2-40B4-BE49-F238E27FC236}">
+                <a16:creationId xmlns:a16="http://schemas.microsoft.com/office/drawing/2014/main" id="{47D7CCEC-12E9-7490-F983-1C8E2427F314}"/>
+              </a:ext>
+            </a:extLst>
+          </p:cNvPr>
+          <p:cNvSpPr txBox="1"/>
+          <p:nvPr/>
+        </p:nvSpPr>
+        <p:spPr>
+          <a:xfrm>
+            <a:off x="457200" y="3520550"/>
+            <a:ext cx="1675427" cy="292388"/>
+          </a:xfrm>
+          <a:prstGeom prst="rect">
+            <a:avLst/>
+          </a:prstGeom>
+          <a:noFill/>
+        </p:spPr>
+        <p:txBody>
+          <a:bodyPr wrap="square">
+            <a:spAutoFit/>
+          </a:bodyPr>
+          <a:lstStyle/>
+          <a:p>
+            <a:r>
+              <a:rPr lang="en-US" sz="1300" b="1" dirty="0">
+                <a:solidFill>
+                  <a:srgbClr val="1A56A8"/>
+                </a:solidFill>
+              </a:rPr>
+              <a:t>P</a:t>
+            </a:r>
+            <a:r>
+              <a:rPr sz="1300" b="1" dirty="0">
+                <a:solidFill>
+                  <a:srgbClr val="1A56A8"/>
+                </a:solidFill>
+              </a:rPr>
+              <a:t>erformance</a:t>
+            </a:r>
+          </a:p>
+        </p:txBody>
+      </p:sp>
+      <p:sp>
+        <p:nvSpPr>
+          <p:cNvPr id="39" name="TextBox 38">
+            <a:extLst>
+              <a:ext uri="{FF2B5EF4-FFF2-40B4-BE49-F238E27FC236}">
+                <a16:creationId xmlns:a16="http://schemas.microsoft.com/office/drawing/2014/main" id="{CE0AE469-6CE7-919A-C781-FE2EA4B5573F}"/>
+              </a:ext>
+            </a:extLst>
+          </p:cNvPr>
+          <p:cNvSpPr txBox="1"/>
+          <p:nvPr/>
+        </p:nvSpPr>
+        <p:spPr>
+          <a:xfrm>
+            <a:off x="6217919" y="4421343"/>
+            <a:ext cx="559833" cy="292388"/>
+          </a:xfrm>
+          <a:prstGeom prst="rect">
+            <a:avLst/>
+          </a:prstGeom>
+          <a:noFill/>
+        </p:spPr>
+        <p:txBody>
+          <a:bodyPr wrap="none">
+            <a:spAutoFit/>
+          </a:bodyPr>
+          <a:lstStyle/>
+          <a:p>
+            <a:r>
+              <a:rPr lang="en-US" sz="1300" b="1" dirty="0">
+                <a:solidFill>
+                  <a:srgbClr val="1A56A8"/>
+                </a:solidFill>
+              </a:rPr>
+              <a:t>Peers</a:t>
+            </a:r>
+            <a:endParaRPr sz="1300" b="1" dirty="0">
+              <a:solidFill>
+                <a:srgbClr val="1A56A8"/>
+              </a:solidFill>
+            </a:endParaRPr>
+          </a:p>
+        </p:txBody>
+      </p:sp>
+    </p:spTree>
+  </p:cSld>
+  <p:clrMapOvr>
+    <a:masterClrMapping/>
+  </p:clrMapOvr>
+</p:sld>
+</file>
+
+<file path=ppt/slides/slide8.xml><?xml version="1.0" encoding="utf-8"?>
+<p:sld xmlns:a="http://schemas.openxmlformats.org/drawingml/2006/main" xmlns:r="http://schemas.openxmlformats.org/officeDocument/2006/relationships" xmlns:p="http://schemas.openxmlformats.org/presentationml/2006/main">
+  <p:cSld>
+    <p:spTree>
+      <p:nvGrpSpPr>
+        <p:cNvPr id="1" name=""/>
+        <p:cNvGrpSpPr/>
+        <p:nvPr/>
+      </p:nvGrpSpPr>
+      <p:grpSpPr>
+        <a:xfrm>
+          <a:off x="0" y="0"/>
+          <a:ext cx="0" cy="0"/>
+          <a:chOff x="0" y="0"/>
+          <a:chExt cx="0" cy="0"/>
+        </a:xfrm>
+      </p:grpSpPr>
+      <p:sp>
+        <p:nvSpPr>
+          <p:cNvPr id="2" name="TextBox 1"/>
+          <p:cNvSpPr txBox="1"/>
+          <p:nvPr/>
+        </p:nvSpPr>
+        <p:spPr>
+          <a:xfrm>
+            <a:off x="548640" y="164592"/>
+            <a:ext cx="11091672" cy="502920"/>
+          </a:xfrm>
+          <a:prstGeom prst="rect">
+            <a:avLst/>
+          </a:prstGeom>
+          <a:noFill/>
+        </p:spPr>
+        <p:txBody>
+          <a:bodyPr wrap="square">
+            <a:spAutoFit/>
+          </a:bodyPr>
+          <a:lstStyle/>
+          <a:p>
+            <a:pPr algn="l"/>
+            <a:r>
+              <a:rPr sz="2200" b="0" i="0">
+                <a:solidFill>
+                  <a:srgbClr val="1A56A8"/>
+                </a:solidFill>
+              </a:rPr>
+              <a:t>NER Training Analysis - Bio_ClinicalBERT (Weighted)</a:t>
+            </a:r>
+          </a:p>
+        </p:txBody>
+      </p:sp>
+      <p:pic>
+        <p:nvPicPr>
+          <p:cNvPr id="3" name="Picture 2" descr="ner02_cell18_0.png"/>
+          <p:cNvPicPr>
+            <a:picLocks noChangeAspect="1"/>
+          </p:cNvPicPr>
+          <p:nvPr/>
+        </p:nvPicPr>
+        <p:blipFill>
+          <a:blip r:embed="rId2"/>
+          <a:stretch>
+            <a:fillRect/>
+          </a:stretch>
+        </p:blipFill>
+        <p:spPr>
+          <a:xfrm>
+            <a:off x="365760" y="777240"/>
+            <a:ext cx="11430000" cy="3157458"/>
+          </a:xfrm>
+          <a:prstGeom prst="rect">
+            <a:avLst/>
+          </a:prstGeom>
+        </p:spPr>
+      </p:pic>
+      <p:sp>
+        <p:nvSpPr>
+          <p:cNvPr id="4" name="TextBox 3"/>
+          <p:cNvSpPr txBox="1"/>
+          <p:nvPr/>
+        </p:nvSpPr>
+        <p:spPr>
+          <a:xfrm>
+            <a:off x="365760" y="4026138"/>
+            <a:ext cx="11430000" cy="246221"/>
+          </a:xfrm>
+          <a:prstGeom prst="rect">
+            <a:avLst/>
+          </a:prstGeom>
+          <a:noFill/>
+        </p:spPr>
+        <p:txBody>
+          <a:bodyPr wrap="square">
+            <a:spAutoFit/>
+          </a:bodyPr>
+          <a:lstStyle/>
+          <a:p>
+            <a:pPr algn="l"/>
+            <a:r>
+              <a:rPr sz="1000" b="0" i="1" dirty="0">
+                <a:solidFill>
+                  <a:srgbClr val="666666"/>
+                </a:solidFill>
+              </a:rPr>
+              <a:t>Training loss </a:t>
+            </a:r>
+            <a:r>
+              <a:rPr lang="en-US" sz="1000" b="0" i="1" dirty="0">
+                <a:solidFill>
+                  <a:srgbClr val="666666"/>
+                </a:solidFill>
+              </a:rPr>
+              <a:t>falls-</a:t>
+            </a:r>
+            <a:r>
+              <a:rPr sz="1000" b="0" i="1" dirty="0">
+                <a:solidFill>
+                  <a:srgbClr val="666666"/>
+                </a:solidFill>
+              </a:rPr>
+              <a:t> validation loss rises </a:t>
+            </a:r>
+            <a:r>
+              <a:rPr lang="en-US" sz="1000" b="0" i="1" dirty="0">
+                <a:solidFill>
+                  <a:srgbClr val="666666"/>
+                </a:solidFill>
+              </a:rPr>
+              <a:t>-</a:t>
+            </a:r>
+            <a:r>
+              <a:rPr sz="1000" b="0" i="1" dirty="0">
+                <a:solidFill>
+                  <a:srgbClr val="666666"/>
+                </a:solidFill>
+              </a:rPr>
+              <a:t> </a:t>
+            </a:r>
+            <a:r>
+              <a:rPr sz="1000" b="0" i="1" dirty="0" err="1">
+                <a:solidFill>
+                  <a:srgbClr val="666666"/>
+                </a:solidFill>
+              </a:rPr>
+              <a:t>seqeval</a:t>
+            </a:r>
+            <a:r>
+              <a:rPr sz="1000" b="0" i="1" dirty="0">
+                <a:solidFill>
+                  <a:srgbClr val="666666"/>
+                </a:solidFill>
+              </a:rPr>
+              <a:t> F1 steadily improves to 0.65 · Both variants achieve comparable F1 (0.652 baseline / 0.650 weighted)</a:t>
+            </a:r>
+          </a:p>
+        </p:txBody>
+      </p:sp>
+      <p:sp>
+        <p:nvSpPr>
+          <p:cNvPr id="6" name="TextBox 5"/>
+          <p:cNvSpPr txBox="1"/>
+          <p:nvPr/>
+        </p:nvSpPr>
+        <p:spPr>
+          <a:xfrm>
+            <a:off x="365760" y="6583680"/>
+            <a:ext cx="8229600" cy="228600"/>
+          </a:xfrm>
+          <a:prstGeom prst="rect">
+            <a:avLst/>
+          </a:prstGeom>
+          <a:noFill/>
+        </p:spPr>
+        <p:txBody>
+          <a:bodyPr wrap="square">
+            <a:spAutoFit/>
+          </a:bodyPr>
+          <a:lstStyle/>
+          <a:p>
+            <a:pPr algn="l"/>
+            <a:r>
+              <a:rPr sz="900" b="0" i="0">
+                <a:solidFill>
+                  <a:srgbClr val="666666"/>
+                </a:solidFill>
+              </a:rPr>
+              <a:t>CSCI E-222 · NLP for Healthcare · O. Mykhailovskyi</a:t>
+            </a:r>
+          </a:p>
+        </p:txBody>
+      </p:sp>
+      <p:sp>
+        <p:nvSpPr>
+          <p:cNvPr id="7" name="TextBox 6"/>
+          <p:cNvSpPr txBox="1"/>
+          <p:nvPr/>
+        </p:nvSpPr>
+        <p:spPr>
+          <a:xfrm>
+            <a:off x="11091672" y="6583680"/>
+            <a:ext cx="914400" cy="228600"/>
+          </a:xfrm>
+          <a:prstGeom prst="rect">
+            <a:avLst/>
+          </a:prstGeom>
+          <a:noFill/>
+        </p:spPr>
+        <p:txBody>
+          <a:bodyPr wrap="square">
+            <a:spAutoFit/>
+          </a:bodyPr>
+          <a:lstStyle/>
+          <a:p>
+            <a:pPr algn="r"/>
+            <a:r>
+              <a:rPr lang="en-US" sz="900" dirty="0">
+                <a:solidFill>
+                  <a:srgbClr val="666666"/>
+                </a:solidFill>
+              </a:rPr>
+              <a:t>8</a:t>
+            </a:r>
+            <a:r>
+              <a:rPr sz="900" b="0" i="0" dirty="0">
+                <a:solidFill>
+                  <a:srgbClr val="666666"/>
+                </a:solidFill>
+              </a:rPr>
+              <a:t> / 19</a:t>
+            </a:r>
+          </a:p>
+        </p:txBody>
+      </p:sp>
+      <p:sp>
+        <p:nvSpPr>
+          <p:cNvPr id="9" name="TextBox 8"/>
+          <p:cNvSpPr txBox="1"/>
+          <p:nvPr/>
+        </p:nvSpPr>
+        <p:spPr>
+          <a:xfrm>
+            <a:off x="2194560" y="6547000"/>
+            <a:ext cx="7315200" cy="274320"/>
+          </a:xfrm>
+          <a:prstGeom prst="rect">
+            <a:avLst/>
+          </a:prstGeom>
+          <a:noFill/>
+        </p:spPr>
+        <p:txBody>
+          <a:bodyPr wrap="square">
+            <a:spAutoFit/>
+          </a:bodyPr>
+          <a:lstStyle/>
+          <a:p>
+            <a:pPr algn="ctr"/>
+            <a:r>
+              <a:rPr sz="900" b="0" i="1">
+                <a:solidFill>
+                  <a:srgbClr val="666666"/>
+                </a:solidFill>
+              </a:rPr>
+              <a:t>BERT QA training: oscillating loss + flat F1 → model never learns from 512-token truncated inputs</a:t>
+            </a:r>
           </a:p>
         </p:txBody>
       </p:sp>
@@ -19796,14 +20286,236 @@
       </p:grpSpPr>
       <p:sp>
         <p:nvSpPr>
-          <p:cNvPr id="2" name="TextBox 1"/>
+          <p:cNvPr id="2" name="Rectangle 1"/>
+          <p:cNvSpPr/>
+          <p:nvPr/>
+        </p:nvSpPr>
+        <p:spPr>
+          <a:xfrm>
+            <a:off x="0" y="0"/>
+            <a:ext cx="12188952" cy="64008"/>
+          </a:xfrm>
+          <a:prstGeom prst="rect">
+            <a:avLst/>
+          </a:prstGeom>
+          <a:solidFill>
+            <a:srgbClr val="1A56A8"/>
+          </a:solidFill>
+          <a:ln>
+            <a:noFill/>
+          </a:ln>
+        </p:spPr>
+        <p:style>
+          <a:lnRef idx="1">
+            <a:schemeClr val="accent1"/>
+          </a:lnRef>
+          <a:fillRef idx="3">
+            <a:schemeClr val="accent1"/>
+          </a:fillRef>
+          <a:effectRef idx="2">
+            <a:schemeClr val="accent1"/>
+          </a:effectRef>
+          <a:fontRef idx="minor">
+            <a:schemeClr val="lt1"/>
+          </a:fontRef>
+        </p:style>
+        <p:txBody>
+          <a:bodyPr rtlCol="0" anchor="ctr"/>
+          <a:lstStyle/>
+          <a:p>
+            <a:pPr algn="ctr"/>
+            <a:endParaRPr/>
+          </a:p>
+        </p:txBody>
+      </p:sp>
+      <p:sp>
+        <p:nvSpPr>
+          <p:cNvPr id="3" name="TextBox 2"/>
           <p:cNvSpPr txBox="1"/>
           <p:nvPr/>
         </p:nvSpPr>
         <p:spPr>
           <a:xfrm>
             <a:off x="548640" y="164592"/>
-            <a:ext cx="11091672" cy="502920"/>
+            <a:ext cx="4378058" cy="430887"/>
+          </a:xfrm>
+          <a:prstGeom prst="rect">
+            <a:avLst/>
+          </a:prstGeom>
+          <a:noFill/>
+        </p:spPr>
+        <p:txBody>
+          <a:bodyPr wrap="none">
+            <a:spAutoFit/>
+          </a:bodyPr>
+          <a:lstStyle/>
+          <a:p>
+            <a:r>
+              <a:rPr sz="2200" b="1" dirty="0">
+                <a:solidFill>
+                  <a:srgbClr val="1A56A8"/>
+                </a:solidFill>
+              </a:rPr>
+              <a:t>Task 2 - QA: </a:t>
+            </a:r>
+            <a:r>
+              <a:rPr lang="en-US" sz="2200" b="1" dirty="0">
+                <a:solidFill>
+                  <a:srgbClr val="1A56A8"/>
+                </a:solidFill>
+              </a:rPr>
+              <a:t>BERT &amp; MedGemma-4b</a:t>
+            </a:r>
+            <a:endParaRPr sz="2200" b="1" dirty="0">
+              <a:solidFill>
+                <a:srgbClr val="1A56A8"/>
+              </a:solidFill>
+            </a:endParaRPr>
+          </a:p>
+        </p:txBody>
+      </p:sp>
+      <p:sp>
+        <p:nvSpPr>
+          <p:cNvPr id="4" name="Rectangle 3"/>
+          <p:cNvSpPr/>
+          <p:nvPr/>
+        </p:nvSpPr>
+        <p:spPr>
+          <a:xfrm>
+            <a:off x="548640" y="667512"/>
+            <a:ext cx="11091672" cy="22860"/>
+          </a:xfrm>
+          <a:prstGeom prst="rect">
+            <a:avLst/>
+          </a:prstGeom>
+          <a:solidFill>
+            <a:srgbClr val="E8F0FB"/>
+          </a:solidFill>
+          <a:ln>
+            <a:noFill/>
+          </a:ln>
+        </p:spPr>
+        <p:style>
+          <a:lnRef idx="1">
+            <a:schemeClr val="accent1"/>
+          </a:lnRef>
+          <a:fillRef idx="3">
+            <a:schemeClr val="accent1"/>
+          </a:fillRef>
+          <a:effectRef idx="2">
+            <a:schemeClr val="accent1"/>
+          </a:effectRef>
+          <a:fontRef idx="minor">
+            <a:schemeClr val="lt1"/>
+          </a:fontRef>
+        </p:style>
+        <p:txBody>
+          <a:bodyPr rtlCol="0" anchor="ctr"/>
+          <a:lstStyle/>
+          <a:p>
+            <a:pPr algn="ctr"/>
+            <a:endParaRPr/>
+          </a:p>
+        </p:txBody>
+      </p:sp>
+      <p:sp>
+        <p:nvSpPr>
+          <p:cNvPr id="5" name="Rectangle 4"/>
+          <p:cNvSpPr/>
+          <p:nvPr/>
+        </p:nvSpPr>
+        <p:spPr>
+          <a:xfrm>
+            <a:off x="0" y="6565392"/>
+            <a:ext cx="12188952" cy="292608"/>
+          </a:xfrm>
+          <a:prstGeom prst="rect">
+            <a:avLst/>
+          </a:prstGeom>
+          <a:solidFill>
+            <a:srgbClr val="F5F8FE"/>
+          </a:solidFill>
+          <a:ln>
+            <a:noFill/>
+          </a:ln>
+        </p:spPr>
+        <p:style>
+          <a:lnRef idx="1">
+            <a:schemeClr val="accent1"/>
+          </a:lnRef>
+          <a:fillRef idx="3">
+            <a:schemeClr val="accent1"/>
+          </a:fillRef>
+          <a:effectRef idx="2">
+            <a:schemeClr val="accent1"/>
+          </a:effectRef>
+          <a:fontRef idx="minor">
+            <a:schemeClr val="lt1"/>
+          </a:fontRef>
+        </p:style>
+        <p:txBody>
+          <a:bodyPr rtlCol="0" anchor="ctr"/>
+          <a:lstStyle/>
+          <a:p>
+            <a:pPr algn="ctr"/>
+            <a:endParaRPr/>
+          </a:p>
+        </p:txBody>
+      </p:sp>
+      <p:sp>
+        <p:nvSpPr>
+          <p:cNvPr id="6" name="Rectangle 5"/>
+          <p:cNvSpPr/>
+          <p:nvPr/>
+        </p:nvSpPr>
+        <p:spPr>
+          <a:xfrm>
+            <a:off x="0" y="6556248"/>
+            <a:ext cx="12188952" cy="9144"/>
+          </a:xfrm>
+          <a:prstGeom prst="rect">
+            <a:avLst/>
+          </a:prstGeom>
+          <a:solidFill>
+            <a:srgbClr val="D0E2F8"/>
+          </a:solidFill>
+          <a:ln>
+            <a:noFill/>
+          </a:ln>
+        </p:spPr>
+        <p:style>
+          <a:lnRef idx="1">
+            <a:schemeClr val="accent1"/>
+          </a:lnRef>
+          <a:fillRef idx="3">
+            <a:schemeClr val="accent1"/>
+          </a:fillRef>
+          <a:effectRef idx="2">
+            <a:schemeClr val="accent1"/>
+          </a:effectRef>
+          <a:fontRef idx="minor">
+            <a:schemeClr val="lt1"/>
+          </a:fontRef>
+        </p:style>
+        <p:txBody>
+          <a:bodyPr rtlCol="0" anchor="ctr"/>
+          <a:lstStyle/>
+          <a:p>
+            <a:pPr algn="ctr"/>
+            <a:endParaRPr/>
+          </a:p>
+        </p:txBody>
+      </p:sp>
+      <p:sp>
+        <p:nvSpPr>
+          <p:cNvPr id="7" name="TextBox 6"/>
+          <p:cNvSpPr txBox="1"/>
+          <p:nvPr/>
+        </p:nvSpPr>
+        <p:spPr>
+          <a:xfrm>
+            <a:off x="365760" y="6583680"/>
+            <a:ext cx="8229600" cy="228600"/>
           </a:xfrm>
           <a:prstGeom prst="rect">
             <a:avLst/>
@@ -19818,50 +20530,26 @@
           <a:p>
             <a:pPr algn="l"/>
             <a:r>
-              <a:rPr sz="2200" b="0" i="0">
-                <a:solidFill>
-                  <a:srgbClr val="1A56A8"/>
-                </a:solidFill>
-              </a:rPr>
-              <a:t>NER Training Analysis - Bio_ClinicalBERT (Weighted)</a:t>
-            </a:r>
-          </a:p>
-        </p:txBody>
-      </p:sp>
-      <p:pic>
-        <p:nvPicPr>
-          <p:cNvPr id="3" name="Picture 2" descr="ner02_cell18_0.png"/>
-          <p:cNvPicPr>
-            <a:picLocks noChangeAspect="1"/>
-          </p:cNvPicPr>
-          <p:nvPr/>
-        </p:nvPicPr>
-        <p:blipFill>
-          <a:blip r:embed="rId2"/>
-          <a:stretch>
-            <a:fillRect/>
-          </a:stretch>
-        </p:blipFill>
-        <p:spPr>
-          <a:xfrm>
-            <a:off x="365760" y="777240"/>
-            <a:ext cx="11430000" cy="3157458"/>
-          </a:xfrm>
-          <a:prstGeom prst="rect">
-            <a:avLst/>
-          </a:prstGeom>
-        </p:spPr>
-      </p:pic>
-      <p:sp>
-        <p:nvSpPr>
-          <p:cNvPr id="4" name="TextBox 3"/>
+              <a:rPr sz="900" b="0">
+                <a:solidFill>
+                  <a:srgbClr val="666666"/>
+                </a:solidFill>
+              </a:rPr>
+              <a:t>CSCI E-222 · NLP for Healthcare · O. Mykhailovskyi</a:t>
+            </a:r>
+          </a:p>
+        </p:txBody>
+      </p:sp>
+      <p:sp>
+        <p:nvSpPr>
+          <p:cNvPr id="8" name="TextBox 7"/>
           <p:cNvSpPr txBox="1"/>
           <p:nvPr/>
         </p:nvSpPr>
         <p:spPr>
           <a:xfrm>
-            <a:off x="365760" y="4026138"/>
-            <a:ext cx="11430000" cy="246221"/>
+            <a:off x="11091672" y="6583680"/>
+            <a:ext cx="914400" cy="228600"/>
           </a:xfrm>
           <a:prstGeom prst="rect">
             <a:avLst/>
@@ -19874,76 +20562,157 @@
           </a:bodyPr>
           <a:lstStyle/>
           <a:p>
-            <a:pPr algn="l"/>
-            <a:r>
-              <a:rPr sz="1000" b="0" i="1" dirty="0">
+            <a:pPr algn="r"/>
+            <a:r>
+              <a:rPr lang="en-US" sz="900" dirty="0">
                 <a:solidFill>
                   <a:srgbClr val="666666"/>
                 </a:solidFill>
               </a:rPr>
-              <a:t>Training loss converges </a:t>
-            </a:r>
-            <a:r>
-              <a:rPr lang="en-US" sz="1000" b="0" i="1" dirty="0">
+              <a:t>9</a:t>
+            </a:r>
+            <a:r>
+              <a:rPr sz="900" b="0" dirty="0">
                 <a:solidFill>
                   <a:srgbClr val="666666"/>
                 </a:solidFill>
               </a:rPr>
-              <a:t>-</a:t>
-            </a:r>
-            <a:r>
-              <a:rPr sz="1000" b="0" i="1" dirty="0">
-                <a:solidFill>
-                  <a:srgbClr val="666666"/>
-                </a:solidFill>
-              </a:rPr>
-              <a:t> validation loss rises (class-weighted CE inflates it) </a:t>
-            </a:r>
-            <a:r>
-              <a:rPr lang="en-US" sz="1000" b="0" i="1" dirty="0">
-                <a:solidFill>
-                  <a:srgbClr val="666666"/>
-                </a:solidFill>
-              </a:rPr>
-              <a:t>-</a:t>
-            </a:r>
-            <a:r>
-              <a:rPr sz="1000" b="0" i="1" dirty="0">
-                <a:solidFill>
-                  <a:srgbClr val="666666"/>
-                </a:solidFill>
-              </a:rPr>
-              <a:t> </a:t>
-            </a:r>
-            <a:r>
-              <a:rPr sz="1000" b="0" i="1" dirty="0" err="1">
-                <a:solidFill>
-                  <a:srgbClr val="666666"/>
-                </a:solidFill>
-              </a:rPr>
-              <a:t>seqeval</a:t>
-            </a:r>
-            <a:r>
-              <a:rPr sz="1000" b="0" i="1" dirty="0">
-                <a:solidFill>
-                  <a:srgbClr val="666666"/>
-                </a:solidFill>
-              </a:rPr>
-              <a:t> F1 steadily improves to 0.65 · Both variants achieve comparable F1 (0.652 baseline / 0.650 weighted)</a:t>
-            </a:r>
-          </a:p>
-        </p:txBody>
-      </p:sp>
-      <p:sp>
-        <p:nvSpPr>
-          <p:cNvPr id="5" name="TextBox 4"/>
+              <a:t> / 19</a:t>
+            </a:r>
+          </a:p>
+        </p:txBody>
+      </p:sp>
+      <p:sp>
+        <p:nvSpPr>
+          <p:cNvPr id="9" name="TextBox 8"/>
           <p:cNvSpPr txBox="1"/>
           <p:nvPr/>
         </p:nvSpPr>
         <p:spPr>
           <a:xfrm>
-            <a:off x="365760" y="4206240"/>
-            <a:ext cx="11430000" cy="365760"/>
+            <a:off x="457200" y="868680"/>
+            <a:ext cx="4572000" cy="256032"/>
+          </a:xfrm>
+          <a:prstGeom prst="rect">
+            <a:avLst/>
+          </a:prstGeom>
+          <a:noFill/>
+        </p:spPr>
+        <p:txBody>
+          <a:bodyPr wrap="none">
+            <a:spAutoFit/>
+          </a:bodyPr>
+          <a:lstStyle/>
+          <a:p>
+            <a:r>
+              <a:rPr sz="1300" b="1">
+                <a:solidFill>
+                  <a:srgbClr val="1A56A8"/>
+                </a:solidFill>
+              </a:rPr>
+              <a:t>BioClinicalBERT Multiple-Choice</a:t>
+            </a:r>
+          </a:p>
+        </p:txBody>
+      </p:sp>
+      <p:sp>
+        <p:nvSpPr>
+          <p:cNvPr id="10" name="Rectangle 9"/>
+          <p:cNvSpPr/>
+          <p:nvPr/>
+        </p:nvSpPr>
+        <p:spPr>
+          <a:xfrm>
+            <a:off x="457200" y="1143000"/>
+            <a:ext cx="41148" cy="347472"/>
+          </a:xfrm>
+          <a:prstGeom prst="rect">
+            <a:avLst/>
+          </a:prstGeom>
+          <a:solidFill>
+            <a:srgbClr val="1A56A8"/>
+          </a:solidFill>
+          <a:ln>
+            <a:noFill/>
+          </a:ln>
+        </p:spPr>
+        <p:style>
+          <a:lnRef idx="1">
+            <a:schemeClr val="accent1"/>
+          </a:lnRef>
+          <a:fillRef idx="3">
+            <a:schemeClr val="accent1"/>
+          </a:fillRef>
+          <a:effectRef idx="2">
+            <a:schemeClr val="accent1"/>
+          </a:effectRef>
+          <a:fontRef idx="minor">
+            <a:schemeClr val="lt1"/>
+          </a:fontRef>
+        </p:style>
+        <p:txBody>
+          <a:bodyPr rtlCol="0" anchor="ctr"/>
+          <a:lstStyle/>
+          <a:p>
+            <a:pPr algn="ctr"/>
+            <a:endParaRPr/>
+          </a:p>
+        </p:txBody>
+      </p:sp>
+      <p:sp>
+        <p:nvSpPr>
+          <p:cNvPr id="11" name="Rectangle 10"/>
+          <p:cNvSpPr/>
+          <p:nvPr/>
+        </p:nvSpPr>
+        <p:spPr>
+          <a:xfrm>
+            <a:off x="498348" y="1143000"/>
+            <a:ext cx="5262372" cy="347472"/>
+          </a:xfrm>
+          <a:prstGeom prst="rect">
+            <a:avLst/>
+          </a:prstGeom>
+          <a:solidFill>
+            <a:srgbClr val="E8F0FB"/>
+          </a:solidFill>
+          <a:ln>
+            <a:noFill/>
+          </a:ln>
+        </p:spPr>
+        <p:style>
+          <a:lnRef idx="1">
+            <a:schemeClr val="accent1"/>
+          </a:lnRef>
+          <a:fillRef idx="3">
+            <a:schemeClr val="accent1"/>
+          </a:fillRef>
+          <a:effectRef idx="2">
+            <a:schemeClr val="accent1"/>
+          </a:effectRef>
+          <a:fontRef idx="minor">
+            <a:schemeClr val="lt1"/>
+          </a:fontRef>
+        </p:style>
+        <p:txBody>
+          <a:bodyPr rtlCol="0" anchor="ctr"/>
+          <a:lstStyle/>
+          <a:p>
+            <a:pPr algn="ctr"/>
+            <a:endParaRPr/>
+          </a:p>
+        </p:txBody>
+      </p:sp>
+      <p:sp>
+        <p:nvSpPr>
+          <p:cNvPr id="12" name="TextBox 11"/>
+          <p:cNvSpPr txBox="1"/>
+          <p:nvPr/>
+        </p:nvSpPr>
+        <p:spPr>
+          <a:xfrm>
+            <a:off x="566928" y="1216152"/>
+            <a:ext cx="5102352" cy="261610"/>
           </a:xfrm>
           <a:prstGeom prst="rect">
             <a:avLst/>
@@ -19956,60 +20725,131 @@
           </a:bodyPr>
           <a:lstStyle/>
           <a:p>
-            <a:pPr algn="l"/>
-            <a:r>
-              <a:rPr sz="1000" b="0" i="0" dirty="0">
-                <a:solidFill>
-                  <a:srgbClr val="1A1A1A"/>
-                </a:solidFill>
-              </a:rPr>
-              <a:t>Published context: </a:t>
-            </a:r>
-            <a:r>
-              <a:rPr sz="1000" b="0" i="0" dirty="0" err="1">
-                <a:solidFill>
-                  <a:srgbClr val="1A1A1A"/>
-                </a:solidFill>
-              </a:rPr>
-              <a:t>TaggerOne</a:t>
-            </a:r>
-            <a:r>
-              <a:rPr sz="1000" b="0" i="0" dirty="0">
-                <a:solidFill>
-                  <a:srgbClr val="1A1A1A"/>
-                </a:solidFill>
-              </a:rPr>
-              <a:t> baseline F1=0.453 · BERT ceiling ~0.56 · This project F1=0.65 ✓ above published BERT ceiling · Asymmetric eval: BERT on full 2,926-sample test; </a:t>
-            </a:r>
-            <a:r>
-              <a:rPr sz="1000" b="0" i="0" dirty="0" err="1">
-                <a:solidFill>
-                  <a:srgbClr val="1A1A1A"/>
-                </a:solidFill>
-              </a:rPr>
-              <a:t>MedGemma</a:t>
-            </a:r>
-            <a:r>
-              <a:rPr sz="1000" b="0" i="0" dirty="0">
-                <a:solidFill>
-                  <a:srgbClr val="1A1A1A"/>
-                </a:solidFill>
-              </a:rPr>
-              <a:t> on 10% subset only</a:t>
-            </a:r>
-          </a:p>
-        </p:txBody>
-      </p:sp>
-      <p:sp>
-        <p:nvSpPr>
-          <p:cNvPr id="6" name="TextBox 5"/>
+            <a:r>
+              <a:rPr lang="en-US" sz="1100" dirty="0">
+                <a:solidFill>
+                  <a:srgbClr val="1A1A1A"/>
+                </a:solidFill>
+              </a:rPr>
+              <a:t>[</a:t>
+            </a:r>
+            <a:r>
+              <a:rPr sz="1100" dirty="0">
+                <a:solidFill>
+                  <a:srgbClr val="1A1A1A"/>
+                </a:solidFill>
+              </a:rPr>
+              <a:t>(Q</a:t>
+            </a:r>
+            <a:r>
+              <a:rPr lang="en-US" sz="1100" dirty="0">
+                <a:solidFill>
+                  <a:srgbClr val="1A1A1A"/>
+                </a:solidFill>
+              </a:rPr>
+              <a:t>:</a:t>
+            </a:r>
+            <a:r>
+              <a:rPr sz="1100" dirty="0">
+                <a:solidFill>
+                  <a:srgbClr val="1A1A1A"/>
+                </a:solidFill>
+              </a:rPr>
+              <a:t> Option A)</a:t>
+            </a:r>
+            <a:r>
+              <a:rPr lang="en-US" sz="1100" dirty="0">
+                <a:solidFill>
+                  <a:srgbClr val="1A1A1A"/>
+                </a:solidFill>
+              </a:rPr>
+              <a:t>, …]</a:t>
+            </a:r>
+            <a:r>
+              <a:rPr sz="1100" dirty="0">
+                <a:solidFill>
+                  <a:srgbClr val="1A1A1A"/>
+                </a:solidFill>
+              </a:rPr>
+              <a:t> </a:t>
+            </a:r>
+            <a:r>
+              <a:rPr lang="en-US" sz="1100" dirty="0">
+                <a:solidFill>
+                  <a:srgbClr val="1A1A1A"/>
+                </a:solidFill>
+              </a:rPr>
+              <a:t>-&gt;</a:t>
+            </a:r>
+            <a:r>
+              <a:rPr sz="1100" dirty="0">
+                <a:solidFill>
+                  <a:srgbClr val="1A1A1A"/>
+                </a:solidFill>
+              </a:rPr>
+              <a:t> BERT </a:t>
+            </a:r>
+            <a:r>
+              <a:rPr lang="en-US" sz="1100" dirty="0">
+                <a:solidFill>
+                  <a:srgbClr val="1A1A1A"/>
+                </a:solidFill>
+              </a:rPr>
+              <a:t>-&gt;</a:t>
+            </a:r>
+            <a:r>
+              <a:rPr sz="1100" dirty="0">
+                <a:solidFill>
+                  <a:srgbClr val="1A1A1A"/>
+                </a:solidFill>
+              </a:rPr>
+              <a:t> logit ×4 </a:t>
+            </a:r>
+            <a:r>
+              <a:rPr lang="en-US" sz="1100" dirty="0">
+                <a:solidFill>
+                  <a:srgbClr val="1A1A1A"/>
+                </a:solidFill>
+              </a:rPr>
+              <a:t>-&gt;</a:t>
+            </a:r>
+            <a:r>
+              <a:rPr sz="1100" dirty="0">
+                <a:solidFill>
+                  <a:srgbClr val="1A1A1A"/>
+                </a:solidFill>
+              </a:rPr>
+              <a:t> </a:t>
+            </a:r>
+            <a:r>
+              <a:rPr sz="1100" dirty="0" err="1">
+                <a:solidFill>
+                  <a:srgbClr val="1A1A1A"/>
+                </a:solidFill>
+              </a:rPr>
+              <a:t>softmax</a:t>
+            </a:r>
+            <a:r>
+              <a:rPr sz="1100" dirty="0">
+                <a:solidFill>
+                  <a:srgbClr val="1A1A1A"/>
+                </a:solidFill>
+              </a:rPr>
+              <a:t> </a:t>
+            </a:r>
+          </a:p>
+        </p:txBody>
+      </p:sp>
+      <p:sp>
+        <p:nvSpPr>
+          <p:cNvPr id="13" name="TextBox 12"/>
           <p:cNvSpPr txBox="1"/>
           <p:nvPr/>
         </p:nvSpPr>
         <p:spPr>
           <a:xfrm>
-            <a:off x="365760" y="6583680"/>
-            <a:ext cx="8229600" cy="228600"/>
+            <a:off x="457200" y="1572768"/>
+            <a:ext cx="5303520" cy="515526"/>
           </a:xfrm>
           <a:prstGeom prst="rect">
             <a:avLst/>
@@ -20022,28 +20862,213 @@
           </a:bodyPr>
           <a:lstStyle/>
           <a:p>
-            <a:pPr algn="l"/>
-            <a:r>
-              <a:rPr sz="900" b="0" i="0">
-                <a:solidFill>
-                  <a:srgbClr val="666666"/>
-                </a:solidFill>
-              </a:rPr>
-              <a:t>CSCI E-222 · NLP for Healthcare · O. Mykhailovskyi</a:t>
-            </a:r>
-          </a:p>
-        </p:txBody>
-      </p:sp>
-      <p:sp>
-        <p:nvSpPr>
-          <p:cNvPr id="7" name="TextBox 6"/>
+            <a:pPr>
+              <a:spcBef>
+                <a:spcPts val="300"/>
+              </a:spcBef>
+            </a:pPr>
+            <a:r>
+              <a:rPr sz="1250" dirty="0">
+                <a:solidFill>
+                  <a:srgbClr val="1A1A1A"/>
+                </a:solidFill>
+              </a:rPr>
+              <a:t>• 90/10 train/</a:t>
+            </a:r>
+            <a:r>
+              <a:rPr sz="1250" dirty="0" err="1">
+                <a:solidFill>
+                  <a:srgbClr val="1A1A1A"/>
+                </a:solidFill>
+              </a:rPr>
+              <a:t>val</a:t>
+            </a:r>
+            <a:r>
+              <a:rPr sz="1250" dirty="0">
+                <a:solidFill>
+                  <a:srgbClr val="1A1A1A"/>
+                </a:solidFill>
+              </a:rPr>
+              <a:t> split</a:t>
+            </a:r>
+          </a:p>
+          <a:p>
+            <a:pPr>
+              <a:spcBef>
+                <a:spcPts val="300"/>
+              </a:spcBef>
+            </a:pPr>
+            <a:r>
+              <a:rPr sz="1250" dirty="0">
+                <a:solidFill>
+                  <a:srgbClr val="1A1A1A"/>
+                </a:solidFill>
+              </a:rPr>
+              <a:t>• Checkpoint: alexd063/bio-</a:t>
+            </a:r>
+            <a:r>
+              <a:rPr sz="1250" dirty="0" err="1">
+                <a:solidFill>
+                  <a:srgbClr val="1A1A1A"/>
+                </a:solidFill>
+              </a:rPr>
+              <a:t>clinicalbert</a:t>
+            </a:r>
+            <a:r>
+              <a:rPr sz="1250" dirty="0">
+                <a:solidFill>
+                  <a:srgbClr val="1A1A1A"/>
+                </a:solidFill>
+              </a:rPr>
+              <a:t>-finetuned-</a:t>
+            </a:r>
+            <a:r>
+              <a:rPr sz="1250" dirty="0" err="1">
+                <a:solidFill>
+                  <a:srgbClr val="1A1A1A"/>
+                </a:solidFill>
+              </a:rPr>
+              <a:t>medqa</a:t>
+            </a:r>
+            <a:endParaRPr lang="en-US" sz="1250" dirty="0">
+              <a:solidFill>
+                <a:srgbClr val="1A1A1A"/>
+              </a:solidFill>
+            </a:endParaRPr>
+          </a:p>
+        </p:txBody>
+      </p:sp>
+      <p:sp>
+        <p:nvSpPr>
+          <p:cNvPr id="17" name="TextBox 16"/>
           <p:cNvSpPr txBox="1"/>
           <p:nvPr/>
         </p:nvSpPr>
         <p:spPr>
           <a:xfrm>
-            <a:off x="11091672" y="6583680"/>
-            <a:ext cx="914400" cy="228600"/>
+            <a:off x="6217920" y="868680"/>
+            <a:ext cx="4572000" cy="256032"/>
+          </a:xfrm>
+          <a:prstGeom prst="rect">
+            <a:avLst/>
+          </a:prstGeom>
+          <a:noFill/>
+        </p:spPr>
+        <p:txBody>
+          <a:bodyPr wrap="none">
+            <a:spAutoFit/>
+          </a:bodyPr>
+          <a:lstStyle/>
+          <a:p>
+            <a:r>
+              <a:rPr sz="1300" b="1">
+                <a:solidFill>
+                  <a:srgbClr val="1A56A8"/>
+                </a:solidFill>
+              </a:rPr>
+              <a:t>MedGemma Generative QA</a:t>
+            </a:r>
+          </a:p>
+        </p:txBody>
+      </p:sp>
+      <p:sp>
+        <p:nvSpPr>
+          <p:cNvPr id="18" name="Rectangle 17"/>
+          <p:cNvSpPr/>
+          <p:nvPr/>
+        </p:nvSpPr>
+        <p:spPr>
+          <a:xfrm>
+            <a:off x="6217920" y="1143000"/>
+            <a:ext cx="41148" cy="548640"/>
+          </a:xfrm>
+          <a:prstGeom prst="rect">
+            <a:avLst/>
+          </a:prstGeom>
+          <a:solidFill>
+            <a:srgbClr val="1A56A8"/>
+          </a:solidFill>
+          <a:ln>
+            <a:noFill/>
+          </a:ln>
+        </p:spPr>
+        <p:style>
+          <a:lnRef idx="1">
+            <a:schemeClr val="accent1"/>
+          </a:lnRef>
+          <a:fillRef idx="3">
+            <a:schemeClr val="accent1"/>
+          </a:fillRef>
+          <a:effectRef idx="2">
+            <a:schemeClr val="accent1"/>
+          </a:effectRef>
+          <a:fontRef idx="minor">
+            <a:schemeClr val="lt1"/>
+          </a:fontRef>
+        </p:style>
+        <p:txBody>
+          <a:bodyPr rtlCol="0" anchor="ctr"/>
+          <a:lstStyle/>
+          <a:p>
+            <a:pPr algn="ctr"/>
+            <a:endParaRPr/>
+          </a:p>
+        </p:txBody>
+      </p:sp>
+      <p:sp>
+        <p:nvSpPr>
+          <p:cNvPr id="19" name="Rectangle 18"/>
+          <p:cNvSpPr/>
+          <p:nvPr/>
+        </p:nvSpPr>
+        <p:spPr>
+          <a:xfrm>
+            <a:off x="6259068" y="1143000"/>
+            <a:ext cx="5445252" cy="548640"/>
+          </a:xfrm>
+          <a:prstGeom prst="rect">
+            <a:avLst/>
+          </a:prstGeom>
+          <a:solidFill>
+            <a:srgbClr val="E8F0FB"/>
+          </a:solidFill>
+          <a:ln>
+            <a:noFill/>
+          </a:ln>
+        </p:spPr>
+        <p:style>
+          <a:lnRef idx="1">
+            <a:schemeClr val="accent1"/>
+          </a:lnRef>
+          <a:fillRef idx="3">
+            <a:schemeClr val="accent1"/>
+          </a:fillRef>
+          <a:effectRef idx="2">
+            <a:schemeClr val="accent1"/>
+          </a:effectRef>
+          <a:fontRef idx="minor">
+            <a:schemeClr val="lt1"/>
+          </a:fontRef>
+        </p:style>
+        <p:txBody>
+          <a:bodyPr rtlCol="0" anchor="ctr"/>
+          <a:lstStyle/>
+          <a:p>
+            <a:pPr algn="ctr"/>
+            <a:endParaRPr/>
+          </a:p>
+        </p:txBody>
+      </p:sp>
+      <p:sp>
+        <p:nvSpPr>
+          <p:cNvPr id="20" name="TextBox 19"/>
+          <p:cNvSpPr txBox="1"/>
+          <p:nvPr/>
+        </p:nvSpPr>
+        <p:spPr>
+          <a:xfrm>
+            <a:off x="6327648" y="1216152"/>
+            <a:ext cx="5285232" cy="438912"/>
           </a:xfrm>
           <a:prstGeom prst="rect">
             <a:avLst/>
@@ -20056,28 +21081,28 @@
           </a:bodyPr>
           <a:lstStyle/>
           <a:p>
-            <a:pPr algn="r"/>
-            <a:r>
-              <a:rPr sz="900" b="0" i="0">
-                <a:solidFill>
-                  <a:srgbClr val="666666"/>
-                </a:solidFill>
-              </a:rPr>
-              <a:t>9 / 19</a:t>
-            </a:r>
-          </a:p>
-        </p:txBody>
-      </p:sp>
-      <p:sp>
-        <p:nvSpPr>
-          <p:cNvPr id="9" name="TextBox 8"/>
+            <a:r>
+              <a:rPr sz="1100">
+                <a:solidFill>
+                  <a:srgbClr val="1A1A1A"/>
+                </a:solidFill>
+              </a:rPr>
+              <a:t>Model sees full question + all 4 options and outputs a single letter.
+Instruction format: explicit EOS token appended to answer.</a:t>
+            </a:r>
+          </a:p>
+        </p:txBody>
+      </p:sp>
+      <p:sp>
+        <p:nvSpPr>
+          <p:cNvPr id="21" name="TextBox 20"/>
           <p:cNvSpPr txBox="1"/>
           <p:nvPr/>
         </p:nvSpPr>
         <p:spPr>
           <a:xfrm>
-            <a:off x="2194560" y="6547000"/>
-            <a:ext cx="7315200" cy="274320"/>
+            <a:off x="6217920" y="1783080"/>
+            <a:ext cx="5486400" cy="284693"/>
           </a:xfrm>
           <a:prstGeom prst="rect">
             <a:avLst/>
@@ -20090,14 +21115,1682 @@
           </a:bodyPr>
           <a:lstStyle/>
           <a:p>
+            <a:pPr>
+              <a:spcBef>
+                <a:spcPts val="300"/>
+              </a:spcBef>
+            </a:pPr>
+            <a:r>
+              <a:rPr sz="1250" dirty="0">
+                <a:solidFill>
+                  <a:srgbClr val="1A1A1A"/>
+                </a:solidFill>
+              </a:rPr>
+              <a:t>• Checkpoint: alexd063/gemma4bit-finetuned-medqa</a:t>
+            </a:r>
+          </a:p>
+        </p:txBody>
+      </p:sp>
+      <p:sp>
+        <p:nvSpPr>
+          <p:cNvPr id="22" name="Rectangle 21"/>
+          <p:cNvSpPr/>
+          <p:nvPr/>
+        </p:nvSpPr>
+        <p:spPr>
+          <a:xfrm>
+            <a:off x="6193050" y="5609844"/>
+            <a:ext cx="41148" cy="594360"/>
+          </a:xfrm>
+          <a:prstGeom prst="rect">
+            <a:avLst/>
+          </a:prstGeom>
+          <a:solidFill>
+            <a:srgbClr val="E67E22"/>
+          </a:solidFill>
+          <a:ln>
+            <a:noFill/>
+          </a:ln>
+        </p:spPr>
+        <p:style>
+          <a:lnRef idx="1">
+            <a:schemeClr val="accent1"/>
+          </a:lnRef>
+          <a:fillRef idx="3">
+            <a:schemeClr val="accent1"/>
+          </a:fillRef>
+          <a:effectRef idx="2">
+            <a:schemeClr val="accent1"/>
+          </a:effectRef>
+          <a:fontRef idx="minor">
+            <a:schemeClr val="lt1"/>
+          </a:fontRef>
+        </p:style>
+        <p:txBody>
+          <a:bodyPr rtlCol="0" anchor="ctr"/>
+          <a:lstStyle/>
+          <a:p>
             <a:pPr algn="ctr"/>
-            <a:r>
-              <a:rPr sz="900" b="0" i="1">
-                <a:solidFill>
-                  <a:srgbClr val="666666"/>
-                </a:solidFill>
-              </a:rPr>
-              <a:t>BERT QA training: oscillating loss + flat F1 → model never learns from 512-token truncated inputs</a:t>
+            <a:endParaRPr/>
+          </a:p>
+        </p:txBody>
+      </p:sp>
+      <p:sp>
+        <p:nvSpPr>
+          <p:cNvPr id="23" name="Rectangle 22"/>
+          <p:cNvSpPr/>
+          <p:nvPr/>
+        </p:nvSpPr>
+        <p:spPr>
+          <a:xfrm>
+            <a:off x="6259068" y="5609844"/>
+            <a:ext cx="5445252" cy="594360"/>
+          </a:xfrm>
+          <a:prstGeom prst="rect">
+            <a:avLst/>
+          </a:prstGeom>
+          <a:solidFill>
+            <a:srgbClr val="FFF3E0"/>
+          </a:solidFill>
+          <a:ln>
+            <a:noFill/>
+          </a:ln>
+        </p:spPr>
+        <p:style>
+          <a:lnRef idx="1">
+            <a:schemeClr val="accent1"/>
+          </a:lnRef>
+          <a:fillRef idx="3">
+            <a:schemeClr val="accent1"/>
+          </a:fillRef>
+          <a:effectRef idx="2">
+            <a:schemeClr val="accent1"/>
+          </a:effectRef>
+          <a:fontRef idx="minor">
+            <a:schemeClr val="lt1"/>
+          </a:fontRef>
+        </p:style>
+        <p:txBody>
+          <a:bodyPr rtlCol="0" anchor="ctr"/>
+          <a:lstStyle/>
+          <a:p>
+            <a:pPr algn="ctr"/>
+            <a:endParaRPr/>
+          </a:p>
+        </p:txBody>
+      </p:sp>
+      <p:sp>
+        <p:nvSpPr>
+          <p:cNvPr id="24" name="TextBox 23"/>
+          <p:cNvSpPr txBox="1"/>
+          <p:nvPr/>
+        </p:nvSpPr>
+        <p:spPr>
+          <a:xfrm>
+            <a:off x="6263640" y="5695483"/>
+            <a:ext cx="5285232" cy="484632"/>
+          </a:xfrm>
+          <a:prstGeom prst="rect">
+            <a:avLst/>
+          </a:prstGeom>
+          <a:noFill/>
+        </p:spPr>
+        <p:txBody>
+          <a:bodyPr wrap="square">
+            <a:spAutoFit/>
+          </a:bodyPr>
+          <a:lstStyle/>
+          <a:p>
+            <a:r>
+              <a:rPr sz="1100" dirty="0">
+                <a:solidFill>
+                  <a:srgbClr val="1A1A1A"/>
+                </a:solidFill>
+              </a:rPr>
+              <a:t>Only 2 epochs trained. Warmup = 10 steps is far too low for stable fine-tuning. No error analysis on incorrect predictions.</a:t>
+            </a:r>
+          </a:p>
+        </p:txBody>
+      </p:sp>
+      <p:graphicFrame>
+        <p:nvGraphicFramePr>
+          <p:cNvPr id="25" name="Table 24">
+            <a:extLst>
+              <a:ext uri="{FF2B5EF4-FFF2-40B4-BE49-F238E27FC236}">
+                <a16:creationId xmlns:a16="http://schemas.microsoft.com/office/drawing/2014/main" id="{B1CF123A-7DEA-1B93-39BE-41F8C8C990B2}"/>
+              </a:ext>
+            </a:extLst>
+          </p:cNvPr>
+          <p:cNvGraphicFramePr>
+            <a:graphicFrameLocks noGrp="1"/>
+          </p:cNvGraphicFramePr>
+          <p:nvPr>
+            <p:extLst>
+              <p:ext uri="{D42A27DB-BD31-4B8C-83A1-F6EECF244321}">
+                <p14:modId xmlns:p14="http://schemas.microsoft.com/office/powerpoint/2010/main" val="1732601725"/>
+              </p:ext>
+            </p:extLst>
+          </p:nvPr>
+        </p:nvGraphicFramePr>
+        <p:xfrm>
+          <a:off x="484505" y="2416552"/>
+          <a:ext cx="3981450" cy="1451360"/>
+        </p:xfrm>
+        <a:graphic>
+          <a:graphicData uri="http://schemas.openxmlformats.org/drawingml/2006/table">
+            <a:tbl>
+              <a:tblPr bandRow="1">
+                <a:tableStyleId>{5C22544A-7EE6-4342-B048-85BDC9FD1C3A}</a:tableStyleId>
+              </a:tblPr>
+              <a:tblGrid>
+                <a:gridCol w="1990725">
+                  <a:extLst>
+                    <a:ext uri="{9D8B030D-6E8A-4147-A177-3AD203B41FA5}">
+                      <a16:colId xmlns:a16="http://schemas.microsoft.com/office/drawing/2014/main" val="271244189"/>
+                    </a:ext>
+                  </a:extLst>
+                </a:gridCol>
+                <a:gridCol w="1990725">
+                  <a:extLst>
+                    <a:ext uri="{9D8B030D-6E8A-4147-A177-3AD203B41FA5}">
+                      <a16:colId xmlns:a16="http://schemas.microsoft.com/office/drawing/2014/main" val="1909146473"/>
+                    </a:ext>
+                  </a:extLst>
+                </a:gridCol>
+              </a:tblGrid>
+              <a:tr h="0">
+                <a:tc>
+                  <a:txBody>
+                    <a:bodyPr/>
+                    <a:lstStyle/>
+                    <a:p>
+                      <a:pPr marL="0" marR="0" algn="ctr">
+                        <a:lnSpc>
+                          <a:spcPct val="115000"/>
+                        </a:lnSpc>
+                        <a:spcAft>
+                          <a:spcPts val="1000"/>
+                        </a:spcAft>
+                        <a:buNone/>
+                      </a:pPr>
+                      <a:r>
+                        <a:rPr lang="en-US" sz="1100">
+                          <a:effectLst/>
+                        </a:rPr>
+                        <a:t>Hyperparameter</a:t>
+                      </a:r>
+                      <a:endParaRPr lang="en-US" sz="1100">
+                        <a:effectLst/>
+                        <a:latin typeface="Calibri" panose="020F0502020204030204" pitchFamily="34" charset="0"/>
+                        <a:ea typeface="Calibri" panose="020F0502020204030204" pitchFamily="34" charset="0"/>
+                      </a:endParaRPr>
+                    </a:p>
+                  </a:txBody>
+                  <a:tcPr marL="68580" marR="68580" marT="0" marB="0"/>
+                </a:tc>
+                <a:tc>
+                  <a:txBody>
+                    <a:bodyPr/>
+                    <a:lstStyle/>
+                    <a:p>
+                      <a:pPr marL="0" marR="0" algn="ctr">
+                        <a:lnSpc>
+                          <a:spcPct val="115000"/>
+                        </a:lnSpc>
+                        <a:spcAft>
+                          <a:spcPts val="1000"/>
+                        </a:spcAft>
+                        <a:buNone/>
+                      </a:pPr>
+                      <a:r>
+                        <a:rPr lang="en-US" sz="1100">
+                          <a:effectLst/>
+                        </a:rPr>
+                        <a:t>Value</a:t>
+                      </a:r>
+                      <a:endParaRPr lang="en-US" sz="1100">
+                        <a:effectLst/>
+                        <a:latin typeface="Calibri" panose="020F0502020204030204" pitchFamily="34" charset="0"/>
+                        <a:ea typeface="Calibri" panose="020F0502020204030204" pitchFamily="34" charset="0"/>
+                      </a:endParaRPr>
+                    </a:p>
+                  </a:txBody>
+                  <a:tcPr marL="68580" marR="68580" marT="0" marB="0"/>
+                </a:tc>
+                <a:extLst>
+                  <a:ext uri="{0D108BD9-81ED-4DB2-BD59-A6C34878D82A}">
+                    <a16:rowId xmlns:a16="http://schemas.microsoft.com/office/drawing/2014/main" val="390761576"/>
+                  </a:ext>
+                </a:extLst>
+              </a:tr>
+              <a:tr h="0">
+                <a:tc>
+                  <a:txBody>
+                    <a:bodyPr/>
+                    <a:lstStyle/>
+                    <a:p>
+                      <a:pPr marL="0" marR="0" algn="ctr">
+                        <a:lnSpc>
+                          <a:spcPct val="115000"/>
+                        </a:lnSpc>
+                        <a:spcAft>
+                          <a:spcPts val="1000"/>
+                        </a:spcAft>
+                        <a:buNone/>
+                      </a:pPr>
+                      <a:r>
+                        <a:rPr lang="en-US" sz="1100">
+                          <a:effectLst/>
+                        </a:rPr>
+                        <a:t>MAX_LENGTH</a:t>
+                      </a:r>
+                      <a:endParaRPr lang="en-US" sz="1100">
+                        <a:effectLst/>
+                        <a:latin typeface="Calibri" panose="020F0502020204030204" pitchFamily="34" charset="0"/>
+                        <a:ea typeface="Calibri" panose="020F0502020204030204" pitchFamily="34" charset="0"/>
+                      </a:endParaRPr>
+                    </a:p>
+                  </a:txBody>
+                  <a:tcPr marL="68580" marR="68580" marT="0" marB="0"/>
+                </a:tc>
+                <a:tc>
+                  <a:txBody>
+                    <a:bodyPr/>
+                    <a:lstStyle/>
+                    <a:p>
+                      <a:pPr marL="0" marR="0" algn="ctr">
+                        <a:lnSpc>
+                          <a:spcPct val="115000"/>
+                        </a:lnSpc>
+                        <a:spcAft>
+                          <a:spcPts val="1000"/>
+                        </a:spcAft>
+                        <a:buNone/>
+                      </a:pPr>
+                      <a:r>
+                        <a:rPr lang="en-US" sz="1100">
+                          <a:effectLst/>
+                        </a:rPr>
+                        <a:t>512</a:t>
+                      </a:r>
+                      <a:endParaRPr lang="en-US" sz="1100">
+                        <a:effectLst/>
+                        <a:latin typeface="Calibri" panose="020F0502020204030204" pitchFamily="34" charset="0"/>
+                        <a:ea typeface="Calibri" panose="020F0502020204030204" pitchFamily="34" charset="0"/>
+                      </a:endParaRPr>
+                    </a:p>
+                  </a:txBody>
+                  <a:tcPr marL="68580" marR="68580" marT="0" marB="0"/>
+                </a:tc>
+                <a:extLst>
+                  <a:ext uri="{0D108BD9-81ED-4DB2-BD59-A6C34878D82A}">
+                    <a16:rowId xmlns:a16="http://schemas.microsoft.com/office/drawing/2014/main" val="3027628110"/>
+                  </a:ext>
+                </a:extLst>
+              </a:tr>
+              <a:tr h="0">
+                <a:tc>
+                  <a:txBody>
+                    <a:bodyPr/>
+                    <a:lstStyle/>
+                    <a:p>
+                      <a:pPr marL="0" marR="0" algn="ctr">
+                        <a:lnSpc>
+                          <a:spcPct val="115000"/>
+                        </a:lnSpc>
+                        <a:spcAft>
+                          <a:spcPts val="1000"/>
+                        </a:spcAft>
+                        <a:buNone/>
+                      </a:pPr>
+                      <a:r>
+                        <a:rPr lang="en-US" sz="1100">
+                          <a:effectLst/>
+                        </a:rPr>
+                        <a:t>BATCH_SIZE</a:t>
+                      </a:r>
+                      <a:endParaRPr lang="en-US" sz="1100">
+                        <a:effectLst/>
+                        <a:latin typeface="Calibri" panose="020F0502020204030204" pitchFamily="34" charset="0"/>
+                        <a:ea typeface="Calibri" panose="020F0502020204030204" pitchFamily="34" charset="0"/>
+                      </a:endParaRPr>
+                    </a:p>
+                  </a:txBody>
+                  <a:tcPr marL="68580" marR="68580" marT="0" marB="0"/>
+                </a:tc>
+                <a:tc>
+                  <a:txBody>
+                    <a:bodyPr/>
+                    <a:lstStyle/>
+                    <a:p>
+                      <a:pPr marL="0" marR="0" algn="ctr">
+                        <a:lnSpc>
+                          <a:spcPct val="115000"/>
+                        </a:lnSpc>
+                        <a:spcAft>
+                          <a:spcPts val="1000"/>
+                        </a:spcAft>
+                        <a:buNone/>
+                      </a:pPr>
+                      <a:r>
+                        <a:rPr lang="en-US" sz="1100" dirty="0">
+                          <a:effectLst/>
+                        </a:rPr>
+                        <a:t>4</a:t>
+                      </a:r>
+                      <a:endParaRPr lang="en-US" sz="1100" dirty="0">
+                        <a:effectLst/>
+                        <a:latin typeface="Calibri" panose="020F0502020204030204" pitchFamily="34" charset="0"/>
+                        <a:ea typeface="Calibri" panose="020F0502020204030204" pitchFamily="34" charset="0"/>
+                      </a:endParaRPr>
+                    </a:p>
+                  </a:txBody>
+                  <a:tcPr marL="68580" marR="68580" marT="0" marB="0"/>
+                </a:tc>
+                <a:extLst>
+                  <a:ext uri="{0D108BD9-81ED-4DB2-BD59-A6C34878D82A}">
+                    <a16:rowId xmlns:a16="http://schemas.microsoft.com/office/drawing/2014/main" val="2295127885"/>
+                  </a:ext>
+                </a:extLst>
+              </a:tr>
+              <a:tr h="0">
+                <a:tc>
+                  <a:txBody>
+                    <a:bodyPr/>
+                    <a:lstStyle/>
+                    <a:p>
+                      <a:pPr marL="0" marR="0" algn="ctr">
+                        <a:lnSpc>
+                          <a:spcPct val="115000"/>
+                        </a:lnSpc>
+                        <a:spcAft>
+                          <a:spcPts val="1000"/>
+                        </a:spcAft>
+                        <a:buNone/>
+                      </a:pPr>
+                      <a:r>
+                        <a:rPr lang="en-US" sz="1100">
+                          <a:effectLst/>
+                        </a:rPr>
+                        <a:t>EPOCHS</a:t>
+                      </a:r>
+                      <a:endParaRPr lang="en-US" sz="1100">
+                        <a:effectLst/>
+                        <a:latin typeface="Calibri" panose="020F0502020204030204" pitchFamily="34" charset="0"/>
+                        <a:ea typeface="Calibri" panose="020F0502020204030204" pitchFamily="34" charset="0"/>
+                      </a:endParaRPr>
+                    </a:p>
+                  </a:txBody>
+                  <a:tcPr marL="68580" marR="68580" marT="0" marB="0"/>
+                </a:tc>
+                <a:tc>
+                  <a:txBody>
+                    <a:bodyPr/>
+                    <a:lstStyle/>
+                    <a:p>
+                      <a:pPr marL="0" marR="0" algn="ctr">
+                        <a:lnSpc>
+                          <a:spcPct val="115000"/>
+                        </a:lnSpc>
+                        <a:spcAft>
+                          <a:spcPts val="1000"/>
+                        </a:spcAft>
+                        <a:buNone/>
+                      </a:pPr>
+                      <a:r>
+                        <a:rPr lang="en-US" sz="1100">
+                          <a:effectLst/>
+                        </a:rPr>
+                        <a:t>10</a:t>
+                      </a:r>
+                      <a:endParaRPr lang="en-US" sz="1100">
+                        <a:effectLst/>
+                        <a:latin typeface="Calibri" panose="020F0502020204030204" pitchFamily="34" charset="0"/>
+                        <a:ea typeface="Calibri" panose="020F0502020204030204" pitchFamily="34" charset="0"/>
+                      </a:endParaRPr>
+                    </a:p>
+                  </a:txBody>
+                  <a:tcPr marL="68580" marR="68580" marT="0" marB="0"/>
+                </a:tc>
+                <a:extLst>
+                  <a:ext uri="{0D108BD9-81ED-4DB2-BD59-A6C34878D82A}">
+                    <a16:rowId xmlns:a16="http://schemas.microsoft.com/office/drawing/2014/main" val="1735219316"/>
+                  </a:ext>
+                </a:extLst>
+              </a:tr>
+              <a:tr h="0">
+                <a:tc>
+                  <a:txBody>
+                    <a:bodyPr/>
+                    <a:lstStyle/>
+                    <a:p>
+                      <a:pPr marL="0" marR="0" algn="ctr">
+                        <a:lnSpc>
+                          <a:spcPct val="115000"/>
+                        </a:lnSpc>
+                        <a:spcAft>
+                          <a:spcPts val="1000"/>
+                        </a:spcAft>
+                        <a:buNone/>
+                      </a:pPr>
+                      <a:r>
+                        <a:rPr lang="en-US" sz="1100">
+                          <a:effectLst/>
+                        </a:rPr>
+                        <a:t>WARMUP_RATIO</a:t>
+                      </a:r>
+                      <a:endParaRPr lang="en-US" sz="1100">
+                        <a:effectLst/>
+                        <a:latin typeface="Calibri" panose="020F0502020204030204" pitchFamily="34" charset="0"/>
+                        <a:ea typeface="Calibri" panose="020F0502020204030204" pitchFamily="34" charset="0"/>
+                      </a:endParaRPr>
+                    </a:p>
+                  </a:txBody>
+                  <a:tcPr marL="68580" marR="68580" marT="0" marB="0"/>
+                </a:tc>
+                <a:tc>
+                  <a:txBody>
+                    <a:bodyPr/>
+                    <a:lstStyle/>
+                    <a:p>
+                      <a:pPr marL="0" marR="0" algn="ctr">
+                        <a:lnSpc>
+                          <a:spcPct val="115000"/>
+                        </a:lnSpc>
+                        <a:spcAft>
+                          <a:spcPts val="1000"/>
+                        </a:spcAft>
+                        <a:buNone/>
+                      </a:pPr>
+                      <a:r>
+                        <a:rPr lang="en-US" sz="1100">
+                          <a:effectLst/>
+                        </a:rPr>
+                        <a:t>0.1</a:t>
+                      </a:r>
+                      <a:endParaRPr lang="en-US" sz="1100">
+                        <a:effectLst/>
+                        <a:latin typeface="Calibri" panose="020F0502020204030204" pitchFamily="34" charset="0"/>
+                        <a:ea typeface="Calibri" panose="020F0502020204030204" pitchFamily="34" charset="0"/>
+                      </a:endParaRPr>
+                    </a:p>
+                  </a:txBody>
+                  <a:tcPr marL="68580" marR="68580" marT="0" marB="0"/>
+                </a:tc>
+                <a:extLst>
+                  <a:ext uri="{0D108BD9-81ED-4DB2-BD59-A6C34878D82A}">
+                    <a16:rowId xmlns:a16="http://schemas.microsoft.com/office/drawing/2014/main" val="1609625613"/>
+                  </a:ext>
+                </a:extLst>
+              </a:tr>
+              <a:tr h="0">
+                <a:tc>
+                  <a:txBody>
+                    <a:bodyPr/>
+                    <a:lstStyle/>
+                    <a:p>
+                      <a:pPr marL="0" marR="0" algn="ctr">
+                        <a:lnSpc>
+                          <a:spcPct val="115000"/>
+                        </a:lnSpc>
+                        <a:spcAft>
+                          <a:spcPts val="1000"/>
+                        </a:spcAft>
+                        <a:buNone/>
+                      </a:pPr>
+                      <a:r>
+                        <a:rPr lang="en-US" sz="1100">
+                          <a:effectLst/>
+                        </a:rPr>
+                        <a:t>WEIGHT_DECAY</a:t>
+                      </a:r>
+                      <a:endParaRPr lang="en-US" sz="1100">
+                        <a:effectLst/>
+                        <a:latin typeface="Calibri" panose="020F0502020204030204" pitchFamily="34" charset="0"/>
+                        <a:ea typeface="Calibri" panose="020F0502020204030204" pitchFamily="34" charset="0"/>
+                      </a:endParaRPr>
+                    </a:p>
+                  </a:txBody>
+                  <a:tcPr marL="68580" marR="68580" marT="0" marB="0"/>
+                </a:tc>
+                <a:tc>
+                  <a:txBody>
+                    <a:bodyPr/>
+                    <a:lstStyle/>
+                    <a:p>
+                      <a:pPr marL="0" marR="0" algn="ctr">
+                        <a:lnSpc>
+                          <a:spcPct val="115000"/>
+                        </a:lnSpc>
+                        <a:spcAft>
+                          <a:spcPts val="1000"/>
+                        </a:spcAft>
+                        <a:buNone/>
+                      </a:pPr>
+                      <a:r>
+                        <a:rPr lang="en-US" sz="1100">
+                          <a:effectLst/>
+                        </a:rPr>
+                        <a:t>0.01</a:t>
+                      </a:r>
+                      <a:endParaRPr lang="en-US" sz="1100">
+                        <a:effectLst/>
+                        <a:latin typeface="Calibri" panose="020F0502020204030204" pitchFamily="34" charset="0"/>
+                        <a:ea typeface="Calibri" panose="020F0502020204030204" pitchFamily="34" charset="0"/>
+                      </a:endParaRPr>
+                    </a:p>
+                  </a:txBody>
+                  <a:tcPr marL="68580" marR="68580" marT="0" marB="0"/>
+                </a:tc>
+                <a:extLst>
+                  <a:ext uri="{0D108BD9-81ED-4DB2-BD59-A6C34878D82A}">
+                    <a16:rowId xmlns:a16="http://schemas.microsoft.com/office/drawing/2014/main" val="3140577604"/>
+                  </a:ext>
+                </a:extLst>
+              </a:tr>
+              <a:tr h="0">
+                <a:tc>
+                  <a:txBody>
+                    <a:bodyPr/>
+                    <a:lstStyle/>
+                    <a:p>
+                      <a:pPr marL="0" marR="0" algn="ctr">
+                        <a:lnSpc>
+                          <a:spcPct val="115000"/>
+                        </a:lnSpc>
+                        <a:spcAft>
+                          <a:spcPts val="1000"/>
+                        </a:spcAft>
+                        <a:buNone/>
+                      </a:pPr>
+                      <a:r>
+                        <a:rPr lang="en-US" sz="1100">
+                          <a:effectLst/>
+                        </a:rPr>
+                        <a:t>LEARNING_RATE</a:t>
+                      </a:r>
+                      <a:endParaRPr lang="en-US" sz="1100">
+                        <a:effectLst/>
+                        <a:latin typeface="Calibri" panose="020F0502020204030204" pitchFamily="34" charset="0"/>
+                        <a:ea typeface="Calibri" panose="020F0502020204030204" pitchFamily="34" charset="0"/>
+                      </a:endParaRPr>
+                    </a:p>
+                  </a:txBody>
+                  <a:tcPr marL="68580" marR="68580" marT="0" marB="0"/>
+                </a:tc>
+                <a:tc>
+                  <a:txBody>
+                    <a:bodyPr/>
+                    <a:lstStyle/>
+                    <a:p>
+                      <a:pPr marL="0" marR="0" algn="ctr">
+                        <a:lnSpc>
+                          <a:spcPct val="115000"/>
+                        </a:lnSpc>
+                        <a:spcAft>
+                          <a:spcPts val="1000"/>
+                        </a:spcAft>
+                        <a:buNone/>
+                      </a:pPr>
+                      <a:r>
+                        <a:rPr lang="en-US" sz="1100">
+                          <a:effectLst/>
+                        </a:rPr>
+                        <a:t>4e-5</a:t>
+                      </a:r>
+                      <a:endParaRPr lang="en-US" sz="1100">
+                        <a:effectLst/>
+                        <a:latin typeface="Calibri" panose="020F0502020204030204" pitchFamily="34" charset="0"/>
+                        <a:ea typeface="Calibri" panose="020F0502020204030204" pitchFamily="34" charset="0"/>
+                      </a:endParaRPr>
+                    </a:p>
+                  </a:txBody>
+                  <a:tcPr marL="68580" marR="68580" marT="0" marB="0"/>
+                </a:tc>
+                <a:extLst>
+                  <a:ext uri="{0D108BD9-81ED-4DB2-BD59-A6C34878D82A}">
+                    <a16:rowId xmlns:a16="http://schemas.microsoft.com/office/drawing/2014/main" val="2516411083"/>
+                  </a:ext>
+                </a:extLst>
+              </a:tr>
+              <a:tr h="0">
+                <a:tc>
+                  <a:txBody>
+                    <a:bodyPr/>
+                    <a:lstStyle/>
+                    <a:p>
+                      <a:pPr marL="0" marR="0" algn="ctr">
+                        <a:lnSpc>
+                          <a:spcPct val="115000"/>
+                        </a:lnSpc>
+                        <a:spcAft>
+                          <a:spcPts val="1000"/>
+                        </a:spcAft>
+                        <a:buNone/>
+                      </a:pPr>
+                      <a:r>
+                        <a:rPr lang="en-US" sz="1100">
+                          <a:effectLst/>
+                        </a:rPr>
+                        <a:t>LR_SCHEDULER</a:t>
+                      </a:r>
+                      <a:endParaRPr lang="en-US" sz="1100">
+                        <a:effectLst/>
+                        <a:latin typeface="Calibri" panose="020F0502020204030204" pitchFamily="34" charset="0"/>
+                        <a:ea typeface="Calibri" panose="020F0502020204030204" pitchFamily="34" charset="0"/>
+                      </a:endParaRPr>
+                    </a:p>
+                  </a:txBody>
+                  <a:tcPr marL="68580" marR="68580" marT="0" marB="0"/>
+                </a:tc>
+                <a:tc>
+                  <a:txBody>
+                    <a:bodyPr/>
+                    <a:lstStyle/>
+                    <a:p>
+                      <a:pPr marL="0" marR="0" algn="ctr">
+                        <a:lnSpc>
+                          <a:spcPct val="115000"/>
+                        </a:lnSpc>
+                        <a:spcAft>
+                          <a:spcPts val="1000"/>
+                        </a:spcAft>
+                        <a:buNone/>
+                      </a:pPr>
+                      <a:r>
+                        <a:rPr lang="en-US" sz="1100" dirty="0">
+                          <a:effectLst/>
+                        </a:rPr>
+                        <a:t>cosine</a:t>
+                      </a:r>
+                      <a:endParaRPr lang="en-US" sz="1100" dirty="0">
+                        <a:effectLst/>
+                        <a:latin typeface="Calibri" panose="020F0502020204030204" pitchFamily="34" charset="0"/>
+                        <a:ea typeface="Calibri" panose="020F0502020204030204" pitchFamily="34" charset="0"/>
+                      </a:endParaRPr>
+                    </a:p>
+                  </a:txBody>
+                  <a:tcPr marL="68580" marR="68580" marT="0" marB="0"/>
+                </a:tc>
+                <a:extLst>
+                  <a:ext uri="{0D108BD9-81ED-4DB2-BD59-A6C34878D82A}">
+                    <a16:rowId xmlns:a16="http://schemas.microsoft.com/office/drawing/2014/main" val="309018558"/>
+                  </a:ext>
+                </a:extLst>
+              </a:tr>
+            </a:tbl>
+          </a:graphicData>
+        </a:graphic>
+      </p:graphicFrame>
+      <p:sp>
+        <p:nvSpPr>
+          <p:cNvPr id="26" name="TextBox 25">
+            <a:extLst>
+              <a:ext uri="{FF2B5EF4-FFF2-40B4-BE49-F238E27FC236}">
+                <a16:creationId xmlns:a16="http://schemas.microsoft.com/office/drawing/2014/main" id="{19EEB348-C843-8C11-99DA-BF40693B9226}"/>
+              </a:ext>
+            </a:extLst>
+          </p:cNvPr>
+          <p:cNvSpPr txBox="1"/>
+          <p:nvPr/>
+        </p:nvSpPr>
+        <p:spPr>
+          <a:xfrm>
+            <a:off x="457200" y="2084832"/>
+            <a:ext cx="4572000" cy="256032"/>
+          </a:xfrm>
+          <a:prstGeom prst="rect">
+            <a:avLst/>
+          </a:prstGeom>
+          <a:noFill/>
+        </p:spPr>
+        <p:txBody>
+          <a:bodyPr wrap="none">
+            <a:spAutoFit/>
+          </a:bodyPr>
+          <a:lstStyle/>
+          <a:p>
+            <a:r>
+              <a:rPr sz="1300" b="1" dirty="0">
+                <a:solidFill>
+                  <a:srgbClr val="1A56A8"/>
+                </a:solidFill>
+              </a:rPr>
+              <a:t>Training Configuration</a:t>
+            </a:r>
+          </a:p>
+        </p:txBody>
+      </p:sp>
+      <p:graphicFrame>
+        <p:nvGraphicFramePr>
+          <p:cNvPr id="27" name="Table 26">
+            <a:extLst>
+              <a:ext uri="{FF2B5EF4-FFF2-40B4-BE49-F238E27FC236}">
+                <a16:creationId xmlns:a16="http://schemas.microsoft.com/office/drawing/2014/main" id="{FD80B9B5-0A62-E6A2-5FEB-5F6DCBCD7D35}"/>
+              </a:ext>
+            </a:extLst>
+          </p:cNvPr>
+          <p:cNvGraphicFramePr>
+            <a:graphicFrameLocks noGrp="1"/>
+          </p:cNvGraphicFramePr>
+          <p:nvPr>
+            <p:extLst>
+              <p:ext uri="{D42A27DB-BD31-4B8C-83A1-F6EECF244321}">
+                <p14:modId xmlns:p14="http://schemas.microsoft.com/office/powerpoint/2010/main" val="2537823050"/>
+              </p:ext>
+            </p:extLst>
+          </p:nvPr>
+        </p:nvGraphicFramePr>
+        <p:xfrm>
+          <a:off x="6327648" y="2559783"/>
+          <a:ext cx="3981450" cy="2551246"/>
+        </p:xfrm>
+        <a:graphic>
+          <a:graphicData uri="http://schemas.openxmlformats.org/drawingml/2006/table">
+            <a:tbl>
+              <a:tblPr bandRow="1">
+                <a:tableStyleId>{5C22544A-7EE6-4342-B048-85BDC9FD1C3A}</a:tableStyleId>
+              </a:tblPr>
+              <a:tblGrid>
+                <a:gridCol w="1990725">
+                  <a:extLst>
+                    <a:ext uri="{9D8B030D-6E8A-4147-A177-3AD203B41FA5}">
+                      <a16:colId xmlns:a16="http://schemas.microsoft.com/office/drawing/2014/main" val="3512198957"/>
+                    </a:ext>
+                  </a:extLst>
+                </a:gridCol>
+                <a:gridCol w="1990725">
+                  <a:extLst>
+                    <a:ext uri="{9D8B030D-6E8A-4147-A177-3AD203B41FA5}">
+                      <a16:colId xmlns:a16="http://schemas.microsoft.com/office/drawing/2014/main" val="3986889857"/>
+                    </a:ext>
+                  </a:extLst>
+                </a:gridCol>
+              </a:tblGrid>
+              <a:tr h="0">
+                <a:tc>
+                  <a:txBody>
+                    <a:bodyPr/>
+                    <a:lstStyle/>
+                    <a:p>
+                      <a:pPr marL="0" marR="0" algn="ctr">
+                        <a:lnSpc>
+                          <a:spcPct val="115000"/>
+                        </a:lnSpc>
+                        <a:spcAft>
+                          <a:spcPts val="1000"/>
+                        </a:spcAft>
+                        <a:buNone/>
+                      </a:pPr>
+                      <a:r>
+                        <a:rPr lang="en-US" sz="1100">
+                          <a:effectLst/>
+                        </a:rPr>
+                        <a:t>Hyperparameter</a:t>
+                      </a:r>
+                      <a:endParaRPr lang="en-US" sz="1100">
+                        <a:effectLst/>
+                        <a:latin typeface="Calibri" panose="020F0502020204030204" pitchFamily="34" charset="0"/>
+                        <a:ea typeface="Calibri" panose="020F0502020204030204" pitchFamily="34" charset="0"/>
+                      </a:endParaRPr>
+                    </a:p>
+                  </a:txBody>
+                  <a:tcPr marL="68580" marR="68580" marT="0" marB="0"/>
+                </a:tc>
+                <a:tc>
+                  <a:txBody>
+                    <a:bodyPr/>
+                    <a:lstStyle/>
+                    <a:p>
+                      <a:pPr marL="0" marR="0" algn="ctr">
+                        <a:lnSpc>
+                          <a:spcPct val="115000"/>
+                        </a:lnSpc>
+                        <a:spcAft>
+                          <a:spcPts val="1000"/>
+                        </a:spcAft>
+                        <a:buNone/>
+                      </a:pPr>
+                      <a:r>
+                        <a:rPr lang="en-US" sz="1100" dirty="0">
+                          <a:effectLst/>
+                        </a:rPr>
+                        <a:t>Value</a:t>
+                      </a:r>
+                      <a:endParaRPr lang="en-US" sz="1100" dirty="0">
+                        <a:effectLst/>
+                        <a:latin typeface="Calibri" panose="020F0502020204030204" pitchFamily="34" charset="0"/>
+                        <a:ea typeface="Calibri" panose="020F0502020204030204" pitchFamily="34" charset="0"/>
+                      </a:endParaRPr>
+                    </a:p>
+                  </a:txBody>
+                  <a:tcPr marL="68580" marR="68580" marT="0" marB="0"/>
+                </a:tc>
+                <a:extLst>
+                  <a:ext uri="{0D108BD9-81ED-4DB2-BD59-A6C34878D82A}">
+                    <a16:rowId xmlns:a16="http://schemas.microsoft.com/office/drawing/2014/main" val="2442184046"/>
+                  </a:ext>
+                </a:extLst>
+              </a:tr>
+              <a:tr h="0">
+                <a:tc>
+                  <a:txBody>
+                    <a:bodyPr/>
+                    <a:lstStyle/>
+                    <a:p>
+                      <a:pPr marL="0" marR="0" algn="ctr">
+                        <a:lnSpc>
+                          <a:spcPct val="115000"/>
+                        </a:lnSpc>
+                        <a:spcAft>
+                          <a:spcPts val="1000"/>
+                        </a:spcAft>
+                        <a:buNone/>
+                      </a:pPr>
+                      <a:r>
+                        <a:rPr lang="en-US" sz="1100">
+                          <a:effectLst/>
+                        </a:rPr>
+                        <a:t>MAX_SEQ_LENGTH</a:t>
+                      </a:r>
+                      <a:endParaRPr lang="en-US" sz="1100">
+                        <a:effectLst/>
+                        <a:latin typeface="Calibri" panose="020F0502020204030204" pitchFamily="34" charset="0"/>
+                        <a:ea typeface="Calibri" panose="020F0502020204030204" pitchFamily="34" charset="0"/>
+                      </a:endParaRPr>
+                    </a:p>
+                  </a:txBody>
+                  <a:tcPr marL="68580" marR="68580" marT="0" marB="0"/>
+                </a:tc>
+                <a:tc>
+                  <a:txBody>
+                    <a:bodyPr/>
+                    <a:lstStyle/>
+                    <a:p>
+                      <a:pPr marL="0" marR="0" algn="ctr">
+                        <a:lnSpc>
+                          <a:spcPct val="115000"/>
+                        </a:lnSpc>
+                        <a:spcAft>
+                          <a:spcPts val="1000"/>
+                        </a:spcAft>
+                        <a:buNone/>
+                      </a:pPr>
+                      <a:r>
+                        <a:rPr lang="en-US" sz="1100">
+                          <a:effectLst/>
+                        </a:rPr>
+                        <a:t>1024</a:t>
+                      </a:r>
+                      <a:endParaRPr lang="en-US" sz="1100">
+                        <a:effectLst/>
+                        <a:latin typeface="Calibri" panose="020F0502020204030204" pitchFamily="34" charset="0"/>
+                        <a:ea typeface="Calibri" panose="020F0502020204030204" pitchFamily="34" charset="0"/>
+                      </a:endParaRPr>
+                    </a:p>
+                  </a:txBody>
+                  <a:tcPr marL="68580" marR="68580" marT="0" marB="0"/>
+                </a:tc>
+                <a:extLst>
+                  <a:ext uri="{0D108BD9-81ED-4DB2-BD59-A6C34878D82A}">
+                    <a16:rowId xmlns:a16="http://schemas.microsoft.com/office/drawing/2014/main" val="3229526773"/>
+                  </a:ext>
+                </a:extLst>
+              </a:tr>
+              <a:tr h="0">
+                <a:tc>
+                  <a:txBody>
+                    <a:bodyPr/>
+                    <a:lstStyle/>
+                    <a:p>
+                      <a:pPr marL="0" marR="0" algn="ctr">
+                        <a:lnSpc>
+                          <a:spcPct val="115000"/>
+                        </a:lnSpc>
+                        <a:spcAft>
+                          <a:spcPts val="1000"/>
+                        </a:spcAft>
+                        <a:buNone/>
+                      </a:pPr>
+                      <a:r>
+                        <a:rPr lang="en-US" sz="1100">
+                          <a:effectLst/>
+                        </a:rPr>
+                        <a:t>BATCH_SIZE</a:t>
+                      </a:r>
+                      <a:endParaRPr lang="en-US" sz="1100">
+                        <a:effectLst/>
+                        <a:latin typeface="Calibri" panose="020F0502020204030204" pitchFamily="34" charset="0"/>
+                        <a:ea typeface="Calibri" panose="020F0502020204030204" pitchFamily="34" charset="0"/>
+                      </a:endParaRPr>
+                    </a:p>
+                  </a:txBody>
+                  <a:tcPr marL="68580" marR="68580" marT="0" marB="0"/>
+                </a:tc>
+                <a:tc>
+                  <a:txBody>
+                    <a:bodyPr/>
+                    <a:lstStyle/>
+                    <a:p>
+                      <a:pPr marL="0" marR="0" algn="ctr">
+                        <a:lnSpc>
+                          <a:spcPct val="115000"/>
+                        </a:lnSpc>
+                        <a:spcAft>
+                          <a:spcPts val="1000"/>
+                        </a:spcAft>
+                        <a:buNone/>
+                      </a:pPr>
+                      <a:r>
+                        <a:rPr lang="en-US" sz="1100">
+                          <a:effectLst/>
+                        </a:rPr>
+                        <a:t>4</a:t>
+                      </a:r>
+                      <a:endParaRPr lang="en-US" sz="1100">
+                        <a:effectLst/>
+                        <a:latin typeface="Calibri" panose="020F0502020204030204" pitchFamily="34" charset="0"/>
+                        <a:ea typeface="Calibri" panose="020F0502020204030204" pitchFamily="34" charset="0"/>
+                      </a:endParaRPr>
+                    </a:p>
+                  </a:txBody>
+                  <a:tcPr marL="68580" marR="68580" marT="0" marB="0"/>
+                </a:tc>
+                <a:extLst>
+                  <a:ext uri="{0D108BD9-81ED-4DB2-BD59-A6C34878D82A}">
+                    <a16:rowId xmlns:a16="http://schemas.microsoft.com/office/drawing/2014/main" val="2850958390"/>
+                  </a:ext>
+                </a:extLst>
+              </a:tr>
+              <a:tr h="0">
+                <a:tc>
+                  <a:txBody>
+                    <a:bodyPr/>
+                    <a:lstStyle/>
+                    <a:p>
+                      <a:pPr marL="0" marR="0" algn="ctr">
+                        <a:lnSpc>
+                          <a:spcPct val="115000"/>
+                        </a:lnSpc>
+                        <a:spcAft>
+                          <a:spcPts val="1000"/>
+                        </a:spcAft>
+                        <a:buNone/>
+                      </a:pPr>
+                      <a:r>
+                        <a:rPr lang="en-US" sz="1100">
+                          <a:effectLst/>
+                        </a:rPr>
+                        <a:t>GRAD_ACCUM_STEPS</a:t>
+                      </a:r>
+                      <a:endParaRPr lang="en-US" sz="1100">
+                        <a:effectLst/>
+                        <a:latin typeface="Calibri" panose="020F0502020204030204" pitchFamily="34" charset="0"/>
+                        <a:ea typeface="Calibri" panose="020F0502020204030204" pitchFamily="34" charset="0"/>
+                      </a:endParaRPr>
+                    </a:p>
+                  </a:txBody>
+                  <a:tcPr marL="68580" marR="68580" marT="0" marB="0"/>
+                </a:tc>
+                <a:tc>
+                  <a:txBody>
+                    <a:bodyPr/>
+                    <a:lstStyle/>
+                    <a:p>
+                      <a:pPr marL="0" marR="0" algn="ctr">
+                        <a:lnSpc>
+                          <a:spcPct val="115000"/>
+                        </a:lnSpc>
+                        <a:spcAft>
+                          <a:spcPts val="1000"/>
+                        </a:spcAft>
+                        <a:buNone/>
+                      </a:pPr>
+                      <a:r>
+                        <a:rPr lang="en-US" sz="1100">
+                          <a:effectLst/>
+                        </a:rPr>
+                        <a:t>4</a:t>
+                      </a:r>
+                      <a:endParaRPr lang="en-US" sz="1100">
+                        <a:effectLst/>
+                        <a:latin typeface="Calibri" panose="020F0502020204030204" pitchFamily="34" charset="0"/>
+                        <a:ea typeface="Calibri" panose="020F0502020204030204" pitchFamily="34" charset="0"/>
+                      </a:endParaRPr>
+                    </a:p>
+                  </a:txBody>
+                  <a:tcPr marL="68580" marR="68580" marT="0" marB="0"/>
+                </a:tc>
+                <a:extLst>
+                  <a:ext uri="{0D108BD9-81ED-4DB2-BD59-A6C34878D82A}">
+                    <a16:rowId xmlns:a16="http://schemas.microsoft.com/office/drawing/2014/main" val="1184479395"/>
+                  </a:ext>
+                </a:extLst>
+              </a:tr>
+              <a:tr h="0">
+                <a:tc>
+                  <a:txBody>
+                    <a:bodyPr/>
+                    <a:lstStyle/>
+                    <a:p>
+                      <a:pPr marL="0" marR="0" algn="ctr">
+                        <a:lnSpc>
+                          <a:spcPct val="115000"/>
+                        </a:lnSpc>
+                        <a:spcAft>
+                          <a:spcPts val="1000"/>
+                        </a:spcAft>
+                        <a:buNone/>
+                      </a:pPr>
+                      <a:r>
+                        <a:rPr lang="en-US" sz="1100">
+                          <a:effectLst/>
+                        </a:rPr>
+                        <a:t>LORA_R</a:t>
+                      </a:r>
+                      <a:endParaRPr lang="en-US" sz="1100">
+                        <a:effectLst/>
+                        <a:latin typeface="Calibri" panose="020F0502020204030204" pitchFamily="34" charset="0"/>
+                        <a:ea typeface="Calibri" panose="020F0502020204030204" pitchFamily="34" charset="0"/>
+                      </a:endParaRPr>
+                    </a:p>
+                  </a:txBody>
+                  <a:tcPr marL="68580" marR="68580" marT="0" marB="0"/>
+                </a:tc>
+                <a:tc>
+                  <a:txBody>
+                    <a:bodyPr/>
+                    <a:lstStyle/>
+                    <a:p>
+                      <a:pPr marL="0" marR="0" algn="ctr">
+                        <a:lnSpc>
+                          <a:spcPct val="115000"/>
+                        </a:lnSpc>
+                        <a:spcAft>
+                          <a:spcPts val="1000"/>
+                        </a:spcAft>
+                        <a:buNone/>
+                      </a:pPr>
+                      <a:r>
+                        <a:rPr lang="en-US" sz="1100">
+                          <a:effectLst/>
+                        </a:rPr>
+                        <a:t>16</a:t>
+                      </a:r>
+                      <a:endParaRPr lang="en-US" sz="1100">
+                        <a:effectLst/>
+                        <a:latin typeface="Calibri" panose="020F0502020204030204" pitchFamily="34" charset="0"/>
+                        <a:ea typeface="Calibri" panose="020F0502020204030204" pitchFamily="34" charset="0"/>
+                      </a:endParaRPr>
+                    </a:p>
+                  </a:txBody>
+                  <a:tcPr marL="68580" marR="68580" marT="0" marB="0"/>
+                </a:tc>
+                <a:extLst>
+                  <a:ext uri="{0D108BD9-81ED-4DB2-BD59-A6C34878D82A}">
+                    <a16:rowId xmlns:a16="http://schemas.microsoft.com/office/drawing/2014/main" val="803093595"/>
+                  </a:ext>
+                </a:extLst>
+              </a:tr>
+              <a:tr h="0">
+                <a:tc>
+                  <a:txBody>
+                    <a:bodyPr/>
+                    <a:lstStyle/>
+                    <a:p>
+                      <a:pPr marL="0" marR="0" algn="ctr">
+                        <a:lnSpc>
+                          <a:spcPct val="115000"/>
+                        </a:lnSpc>
+                        <a:spcAft>
+                          <a:spcPts val="1000"/>
+                        </a:spcAft>
+                        <a:buNone/>
+                      </a:pPr>
+                      <a:r>
+                        <a:rPr lang="en-US" sz="1100">
+                          <a:effectLst/>
+                        </a:rPr>
+                        <a:t>LORA_ALPHA</a:t>
+                      </a:r>
+                      <a:endParaRPr lang="en-US" sz="1100">
+                        <a:effectLst/>
+                        <a:latin typeface="Calibri" panose="020F0502020204030204" pitchFamily="34" charset="0"/>
+                        <a:ea typeface="Calibri" panose="020F0502020204030204" pitchFamily="34" charset="0"/>
+                      </a:endParaRPr>
+                    </a:p>
+                  </a:txBody>
+                  <a:tcPr marL="68580" marR="68580" marT="0" marB="0"/>
+                </a:tc>
+                <a:tc>
+                  <a:txBody>
+                    <a:bodyPr/>
+                    <a:lstStyle/>
+                    <a:p>
+                      <a:pPr marL="0" marR="0" algn="ctr">
+                        <a:lnSpc>
+                          <a:spcPct val="115000"/>
+                        </a:lnSpc>
+                        <a:spcAft>
+                          <a:spcPts val="1000"/>
+                        </a:spcAft>
+                        <a:buNone/>
+                      </a:pPr>
+                      <a:r>
+                        <a:rPr lang="en-US" sz="1100">
+                          <a:effectLst/>
+                        </a:rPr>
+                        <a:t>16</a:t>
+                      </a:r>
+                      <a:endParaRPr lang="en-US" sz="1100">
+                        <a:effectLst/>
+                        <a:latin typeface="Calibri" panose="020F0502020204030204" pitchFamily="34" charset="0"/>
+                        <a:ea typeface="Calibri" panose="020F0502020204030204" pitchFamily="34" charset="0"/>
+                      </a:endParaRPr>
+                    </a:p>
+                  </a:txBody>
+                  <a:tcPr marL="68580" marR="68580" marT="0" marB="0"/>
+                </a:tc>
+                <a:extLst>
+                  <a:ext uri="{0D108BD9-81ED-4DB2-BD59-A6C34878D82A}">
+                    <a16:rowId xmlns:a16="http://schemas.microsoft.com/office/drawing/2014/main" val="3850659798"/>
+                  </a:ext>
+                </a:extLst>
+              </a:tr>
+              <a:tr h="0">
+                <a:tc>
+                  <a:txBody>
+                    <a:bodyPr/>
+                    <a:lstStyle/>
+                    <a:p>
+                      <a:pPr marL="0" marR="0" algn="ctr">
+                        <a:lnSpc>
+                          <a:spcPct val="115000"/>
+                        </a:lnSpc>
+                        <a:spcAft>
+                          <a:spcPts val="1000"/>
+                        </a:spcAft>
+                        <a:buNone/>
+                      </a:pPr>
+                      <a:r>
+                        <a:rPr lang="en-US" sz="1100">
+                          <a:effectLst/>
+                        </a:rPr>
+                        <a:t>LORA_DROPOUT</a:t>
+                      </a:r>
+                      <a:endParaRPr lang="en-US" sz="1100">
+                        <a:effectLst/>
+                        <a:latin typeface="Calibri" panose="020F0502020204030204" pitchFamily="34" charset="0"/>
+                        <a:ea typeface="Calibri" panose="020F0502020204030204" pitchFamily="34" charset="0"/>
+                      </a:endParaRPr>
+                    </a:p>
+                  </a:txBody>
+                  <a:tcPr marL="68580" marR="68580" marT="0" marB="0"/>
+                </a:tc>
+                <a:tc>
+                  <a:txBody>
+                    <a:bodyPr/>
+                    <a:lstStyle/>
+                    <a:p>
+                      <a:pPr marL="0" marR="0" algn="ctr">
+                        <a:lnSpc>
+                          <a:spcPct val="115000"/>
+                        </a:lnSpc>
+                        <a:spcAft>
+                          <a:spcPts val="1000"/>
+                        </a:spcAft>
+                        <a:buNone/>
+                      </a:pPr>
+                      <a:r>
+                        <a:rPr lang="en-US" sz="1100">
+                          <a:effectLst/>
+                        </a:rPr>
+                        <a:t>0</a:t>
+                      </a:r>
+                      <a:endParaRPr lang="en-US" sz="1100">
+                        <a:effectLst/>
+                        <a:latin typeface="Calibri" panose="020F0502020204030204" pitchFamily="34" charset="0"/>
+                        <a:ea typeface="Calibri" panose="020F0502020204030204" pitchFamily="34" charset="0"/>
+                      </a:endParaRPr>
+                    </a:p>
+                  </a:txBody>
+                  <a:tcPr marL="68580" marR="68580" marT="0" marB="0"/>
+                </a:tc>
+                <a:extLst>
+                  <a:ext uri="{0D108BD9-81ED-4DB2-BD59-A6C34878D82A}">
+                    <a16:rowId xmlns:a16="http://schemas.microsoft.com/office/drawing/2014/main" val="1200365365"/>
+                  </a:ext>
+                </a:extLst>
+              </a:tr>
+              <a:tr h="0">
+                <a:tc>
+                  <a:txBody>
+                    <a:bodyPr/>
+                    <a:lstStyle/>
+                    <a:p>
+                      <a:pPr marL="0" marR="0" algn="ctr">
+                        <a:lnSpc>
+                          <a:spcPct val="115000"/>
+                        </a:lnSpc>
+                        <a:spcAft>
+                          <a:spcPts val="1000"/>
+                        </a:spcAft>
+                        <a:buNone/>
+                      </a:pPr>
+                      <a:r>
+                        <a:rPr lang="en-US" sz="1100">
+                          <a:effectLst/>
+                        </a:rPr>
+                        <a:t>TARGET_MODULES (LORA)</a:t>
+                      </a:r>
+                      <a:endParaRPr lang="en-US" sz="1100">
+                        <a:effectLst/>
+                        <a:latin typeface="Calibri" panose="020F0502020204030204" pitchFamily="34" charset="0"/>
+                        <a:ea typeface="Calibri" panose="020F0502020204030204" pitchFamily="34" charset="0"/>
+                      </a:endParaRPr>
+                    </a:p>
+                  </a:txBody>
+                  <a:tcPr marL="68580" marR="68580" marT="0" marB="0"/>
+                </a:tc>
+                <a:tc>
+                  <a:txBody>
+                    <a:bodyPr/>
+                    <a:lstStyle/>
+                    <a:p>
+                      <a:pPr marL="0" marR="0" algn="ctr">
+                        <a:lnSpc>
+                          <a:spcPct val="115000"/>
+                        </a:lnSpc>
+                        <a:spcAft>
+                          <a:spcPts val="1000"/>
+                        </a:spcAft>
+                        <a:buNone/>
+                      </a:pPr>
+                      <a:r>
+                        <a:rPr lang="en-US" sz="1100">
+                          <a:effectLst/>
+                        </a:rPr>
+                        <a:t>q_proj, v_proj, k_proj, o_proj, gate_proj, up_proj, down_proj</a:t>
+                      </a:r>
+                      <a:endParaRPr lang="en-US" sz="1100">
+                        <a:effectLst/>
+                        <a:latin typeface="Calibri" panose="020F0502020204030204" pitchFamily="34" charset="0"/>
+                        <a:ea typeface="Calibri" panose="020F0502020204030204" pitchFamily="34" charset="0"/>
+                      </a:endParaRPr>
+                    </a:p>
+                  </a:txBody>
+                  <a:tcPr marL="68580" marR="68580" marT="0" marB="0"/>
+                </a:tc>
+                <a:extLst>
+                  <a:ext uri="{0D108BD9-81ED-4DB2-BD59-A6C34878D82A}">
+                    <a16:rowId xmlns:a16="http://schemas.microsoft.com/office/drawing/2014/main" val="735470992"/>
+                  </a:ext>
+                </a:extLst>
+              </a:tr>
+              <a:tr h="0">
+                <a:tc>
+                  <a:txBody>
+                    <a:bodyPr/>
+                    <a:lstStyle/>
+                    <a:p>
+                      <a:pPr marL="0" marR="0" algn="ctr">
+                        <a:lnSpc>
+                          <a:spcPct val="115000"/>
+                        </a:lnSpc>
+                        <a:spcAft>
+                          <a:spcPts val="1000"/>
+                        </a:spcAft>
+                        <a:buNone/>
+                      </a:pPr>
+                      <a:r>
+                        <a:rPr lang="en-US" sz="1100">
+                          <a:effectLst/>
+                        </a:rPr>
+                        <a:t>EPOCHS</a:t>
+                      </a:r>
+                      <a:endParaRPr lang="en-US" sz="1100">
+                        <a:effectLst/>
+                        <a:latin typeface="Calibri" panose="020F0502020204030204" pitchFamily="34" charset="0"/>
+                        <a:ea typeface="Calibri" panose="020F0502020204030204" pitchFamily="34" charset="0"/>
+                      </a:endParaRPr>
+                    </a:p>
+                  </a:txBody>
+                  <a:tcPr marL="68580" marR="68580" marT="0" marB="0"/>
+                </a:tc>
+                <a:tc>
+                  <a:txBody>
+                    <a:bodyPr/>
+                    <a:lstStyle/>
+                    <a:p>
+                      <a:pPr marL="0" marR="0" algn="ctr">
+                        <a:lnSpc>
+                          <a:spcPct val="115000"/>
+                        </a:lnSpc>
+                        <a:spcAft>
+                          <a:spcPts val="1000"/>
+                        </a:spcAft>
+                        <a:buNone/>
+                      </a:pPr>
+                      <a:r>
+                        <a:rPr lang="en-US" sz="1100">
+                          <a:effectLst/>
+                        </a:rPr>
+                        <a:t>2</a:t>
+                      </a:r>
+                      <a:endParaRPr lang="en-US" sz="1100">
+                        <a:effectLst/>
+                        <a:latin typeface="Calibri" panose="020F0502020204030204" pitchFamily="34" charset="0"/>
+                        <a:ea typeface="Calibri" panose="020F0502020204030204" pitchFamily="34" charset="0"/>
+                      </a:endParaRPr>
+                    </a:p>
+                  </a:txBody>
+                  <a:tcPr marL="68580" marR="68580" marT="0" marB="0"/>
+                </a:tc>
+                <a:extLst>
+                  <a:ext uri="{0D108BD9-81ED-4DB2-BD59-A6C34878D82A}">
+                    <a16:rowId xmlns:a16="http://schemas.microsoft.com/office/drawing/2014/main" val="1889849994"/>
+                  </a:ext>
+                </a:extLst>
+              </a:tr>
+              <a:tr h="0">
+                <a:tc>
+                  <a:txBody>
+                    <a:bodyPr/>
+                    <a:lstStyle/>
+                    <a:p>
+                      <a:pPr marL="0" marR="0" algn="ctr">
+                        <a:lnSpc>
+                          <a:spcPct val="115000"/>
+                        </a:lnSpc>
+                        <a:spcAft>
+                          <a:spcPts val="1000"/>
+                        </a:spcAft>
+                        <a:buNone/>
+                      </a:pPr>
+                      <a:r>
+                        <a:rPr lang="en-US" sz="1100">
+                          <a:effectLst/>
+                        </a:rPr>
+                        <a:t>WARMUP_STEPS</a:t>
+                      </a:r>
+                      <a:endParaRPr lang="en-US" sz="1100">
+                        <a:effectLst/>
+                        <a:latin typeface="Calibri" panose="020F0502020204030204" pitchFamily="34" charset="0"/>
+                        <a:ea typeface="Calibri" panose="020F0502020204030204" pitchFamily="34" charset="0"/>
+                      </a:endParaRPr>
+                    </a:p>
+                  </a:txBody>
+                  <a:tcPr marL="68580" marR="68580" marT="0" marB="0"/>
+                </a:tc>
+                <a:tc>
+                  <a:txBody>
+                    <a:bodyPr/>
+                    <a:lstStyle/>
+                    <a:p>
+                      <a:pPr marL="0" marR="0" algn="ctr">
+                        <a:lnSpc>
+                          <a:spcPct val="115000"/>
+                        </a:lnSpc>
+                        <a:spcAft>
+                          <a:spcPts val="1000"/>
+                        </a:spcAft>
+                        <a:buNone/>
+                      </a:pPr>
+                      <a:r>
+                        <a:rPr lang="en-US" sz="1100">
+                          <a:effectLst/>
+                        </a:rPr>
+                        <a:t>10</a:t>
+                      </a:r>
+                      <a:endParaRPr lang="en-US" sz="1100">
+                        <a:effectLst/>
+                        <a:latin typeface="Calibri" panose="020F0502020204030204" pitchFamily="34" charset="0"/>
+                        <a:ea typeface="Calibri" panose="020F0502020204030204" pitchFamily="34" charset="0"/>
+                      </a:endParaRPr>
+                    </a:p>
+                  </a:txBody>
+                  <a:tcPr marL="68580" marR="68580" marT="0" marB="0"/>
+                </a:tc>
+                <a:extLst>
+                  <a:ext uri="{0D108BD9-81ED-4DB2-BD59-A6C34878D82A}">
+                    <a16:rowId xmlns:a16="http://schemas.microsoft.com/office/drawing/2014/main" val="727050599"/>
+                  </a:ext>
+                </a:extLst>
+              </a:tr>
+              <a:tr h="0">
+                <a:tc>
+                  <a:txBody>
+                    <a:bodyPr/>
+                    <a:lstStyle/>
+                    <a:p>
+                      <a:pPr marL="0" marR="0" algn="ctr">
+                        <a:lnSpc>
+                          <a:spcPct val="115000"/>
+                        </a:lnSpc>
+                        <a:spcAft>
+                          <a:spcPts val="1000"/>
+                        </a:spcAft>
+                        <a:buNone/>
+                      </a:pPr>
+                      <a:r>
+                        <a:rPr lang="en-US" sz="1100">
+                          <a:effectLst/>
+                        </a:rPr>
+                        <a:t>WEIGHT_DECAY</a:t>
+                      </a:r>
+                      <a:endParaRPr lang="en-US" sz="1100">
+                        <a:effectLst/>
+                        <a:latin typeface="Calibri" panose="020F0502020204030204" pitchFamily="34" charset="0"/>
+                        <a:ea typeface="Calibri" panose="020F0502020204030204" pitchFamily="34" charset="0"/>
+                      </a:endParaRPr>
+                    </a:p>
+                  </a:txBody>
+                  <a:tcPr marL="68580" marR="68580" marT="0" marB="0"/>
+                </a:tc>
+                <a:tc>
+                  <a:txBody>
+                    <a:bodyPr/>
+                    <a:lstStyle/>
+                    <a:p>
+                      <a:pPr marL="0" marR="0" algn="ctr">
+                        <a:lnSpc>
+                          <a:spcPct val="115000"/>
+                        </a:lnSpc>
+                        <a:spcAft>
+                          <a:spcPts val="1000"/>
+                        </a:spcAft>
+                        <a:buNone/>
+                      </a:pPr>
+                      <a:r>
+                        <a:rPr lang="en-US" sz="1100">
+                          <a:effectLst/>
+                        </a:rPr>
+                        <a:t>0.01</a:t>
+                      </a:r>
+                      <a:endParaRPr lang="en-US" sz="1100">
+                        <a:effectLst/>
+                        <a:latin typeface="Calibri" panose="020F0502020204030204" pitchFamily="34" charset="0"/>
+                        <a:ea typeface="Calibri" panose="020F0502020204030204" pitchFamily="34" charset="0"/>
+                      </a:endParaRPr>
+                    </a:p>
+                  </a:txBody>
+                  <a:tcPr marL="68580" marR="68580" marT="0" marB="0"/>
+                </a:tc>
+                <a:extLst>
+                  <a:ext uri="{0D108BD9-81ED-4DB2-BD59-A6C34878D82A}">
+                    <a16:rowId xmlns:a16="http://schemas.microsoft.com/office/drawing/2014/main" val="1457312956"/>
+                  </a:ext>
+                </a:extLst>
+              </a:tr>
+              <a:tr h="0">
+                <a:tc>
+                  <a:txBody>
+                    <a:bodyPr/>
+                    <a:lstStyle/>
+                    <a:p>
+                      <a:pPr marL="0" marR="0" algn="ctr">
+                        <a:lnSpc>
+                          <a:spcPct val="115000"/>
+                        </a:lnSpc>
+                        <a:spcAft>
+                          <a:spcPts val="1000"/>
+                        </a:spcAft>
+                        <a:buNone/>
+                      </a:pPr>
+                      <a:r>
+                        <a:rPr lang="en-US" sz="1100">
+                          <a:effectLst/>
+                        </a:rPr>
+                        <a:t>LEARNING_RATE</a:t>
+                      </a:r>
+                      <a:endParaRPr lang="en-US" sz="1100">
+                        <a:effectLst/>
+                        <a:latin typeface="Calibri" panose="020F0502020204030204" pitchFamily="34" charset="0"/>
+                        <a:ea typeface="Calibri" panose="020F0502020204030204" pitchFamily="34" charset="0"/>
+                      </a:endParaRPr>
+                    </a:p>
+                  </a:txBody>
+                  <a:tcPr marL="68580" marR="68580" marT="0" marB="0"/>
+                </a:tc>
+                <a:tc>
+                  <a:txBody>
+                    <a:bodyPr/>
+                    <a:lstStyle/>
+                    <a:p>
+                      <a:pPr marL="0" marR="0" algn="ctr">
+                        <a:lnSpc>
+                          <a:spcPct val="115000"/>
+                        </a:lnSpc>
+                        <a:spcAft>
+                          <a:spcPts val="1000"/>
+                        </a:spcAft>
+                        <a:buNone/>
+                      </a:pPr>
+                      <a:r>
+                        <a:rPr lang="en-US" sz="1100">
+                          <a:effectLst/>
+                        </a:rPr>
+                        <a:t>2e-4</a:t>
+                      </a:r>
+                      <a:endParaRPr lang="en-US" sz="1100">
+                        <a:effectLst/>
+                        <a:latin typeface="Calibri" panose="020F0502020204030204" pitchFamily="34" charset="0"/>
+                        <a:ea typeface="Calibri" panose="020F0502020204030204" pitchFamily="34" charset="0"/>
+                      </a:endParaRPr>
+                    </a:p>
+                  </a:txBody>
+                  <a:tcPr marL="68580" marR="68580" marT="0" marB="0"/>
+                </a:tc>
+                <a:extLst>
+                  <a:ext uri="{0D108BD9-81ED-4DB2-BD59-A6C34878D82A}">
+                    <a16:rowId xmlns:a16="http://schemas.microsoft.com/office/drawing/2014/main" val="2176101638"/>
+                  </a:ext>
+                </a:extLst>
+              </a:tr>
+              <a:tr h="0">
+                <a:tc>
+                  <a:txBody>
+                    <a:bodyPr/>
+                    <a:lstStyle/>
+                    <a:p>
+                      <a:pPr marL="0" marR="0" algn="ctr">
+                        <a:lnSpc>
+                          <a:spcPct val="115000"/>
+                        </a:lnSpc>
+                        <a:spcAft>
+                          <a:spcPts val="1000"/>
+                        </a:spcAft>
+                        <a:buNone/>
+                      </a:pPr>
+                      <a:r>
+                        <a:rPr lang="en-US" sz="1100">
+                          <a:effectLst/>
+                        </a:rPr>
+                        <a:t>LR_SCHEDULER</a:t>
+                      </a:r>
+                      <a:endParaRPr lang="en-US" sz="1100">
+                        <a:effectLst/>
+                        <a:latin typeface="Calibri" panose="020F0502020204030204" pitchFamily="34" charset="0"/>
+                        <a:ea typeface="Calibri" panose="020F0502020204030204" pitchFamily="34" charset="0"/>
+                      </a:endParaRPr>
+                    </a:p>
+                  </a:txBody>
+                  <a:tcPr marL="68580" marR="68580" marT="0" marB="0"/>
+                </a:tc>
+                <a:tc>
+                  <a:txBody>
+                    <a:bodyPr/>
+                    <a:lstStyle/>
+                    <a:p>
+                      <a:pPr marL="0" marR="0" algn="ctr">
+                        <a:lnSpc>
+                          <a:spcPct val="115000"/>
+                        </a:lnSpc>
+                        <a:spcAft>
+                          <a:spcPts val="1000"/>
+                        </a:spcAft>
+                        <a:buNone/>
+                      </a:pPr>
+                      <a:r>
+                        <a:rPr lang="en-US" sz="1100" dirty="0">
+                          <a:effectLst/>
+                        </a:rPr>
+                        <a:t>cosine</a:t>
+                      </a:r>
+                      <a:endParaRPr lang="en-US" sz="1100" dirty="0">
+                        <a:effectLst/>
+                        <a:latin typeface="Calibri" panose="020F0502020204030204" pitchFamily="34" charset="0"/>
+                        <a:ea typeface="Calibri" panose="020F0502020204030204" pitchFamily="34" charset="0"/>
+                      </a:endParaRPr>
+                    </a:p>
+                  </a:txBody>
+                  <a:tcPr marL="68580" marR="68580" marT="0" marB="0"/>
+                </a:tc>
+                <a:extLst>
+                  <a:ext uri="{0D108BD9-81ED-4DB2-BD59-A6C34878D82A}">
+                    <a16:rowId xmlns:a16="http://schemas.microsoft.com/office/drawing/2014/main" val="164091523"/>
+                  </a:ext>
+                </a:extLst>
+              </a:tr>
+            </a:tbl>
+          </a:graphicData>
+        </a:graphic>
+      </p:graphicFrame>
+      <p:sp>
+        <p:nvSpPr>
+          <p:cNvPr id="28" name="TextBox 27">
+            <a:extLst>
+              <a:ext uri="{FF2B5EF4-FFF2-40B4-BE49-F238E27FC236}">
+                <a16:creationId xmlns:a16="http://schemas.microsoft.com/office/drawing/2014/main" id="{10F00D47-20EC-7F7D-1AEF-47FD3DB6F644}"/>
+              </a:ext>
+            </a:extLst>
+          </p:cNvPr>
+          <p:cNvSpPr txBox="1"/>
+          <p:nvPr/>
+        </p:nvSpPr>
+        <p:spPr>
+          <a:xfrm>
+            <a:off x="6259068" y="2218112"/>
+            <a:ext cx="4572000" cy="256032"/>
+          </a:xfrm>
+          <a:prstGeom prst="rect">
+            <a:avLst/>
+          </a:prstGeom>
+          <a:noFill/>
+        </p:spPr>
+        <p:txBody>
+          <a:bodyPr wrap="none">
+            <a:spAutoFit/>
+          </a:bodyPr>
+          <a:lstStyle/>
+          <a:p>
+            <a:r>
+              <a:rPr sz="1300" b="1" dirty="0">
+                <a:solidFill>
+                  <a:srgbClr val="1A56A8"/>
+                </a:solidFill>
+              </a:rPr>
+              <a:t>Training Configuration</a:t>
             </a:r>
           </a:p>
         </p:txBody>

--- a/NLP_Healthcare_Mykhailovskyi.pptx
+++ b/NLP_Healthcare_Mykhailovskyi.pptx
@@ -3412,9 +3412,9 @@
           <a:p>
             <a:pPr algn="l"/>
             <a:r>
-              <a:rPr sz="900" b="0" i="0">
-                <a:solidFill>
-                  <a:srgbClr val="666666"/>
+              <a:rPr sz="900" b="0" i="0" dirty="0">
+                <a:solidFill>
+                  <a:schemeClr val="bg1"/>
                 </a:solidFill>
               </a:rPr>
               <a:t>CSCI E-222 · NLP for Healthcare · O. Mykhailovskyi</a:t>
@@ -5760,7 +5760,7 @@
                     <a:lstStyle/>
                     <a:p>
                       <a:r>
-                        <a:rPr sz="1100">
+                        <a:rPr sz="1100" dirty="0">
                           <a:solidFill>
                             <a:srgbClr val="1A1A1A"/>
                           </a:solidFill>
@@ -5826,7 +5826,7 @@
                     <a:lstStyle/>
                     <a:p>
                       <a:r>
-                        <a:rPr sz="1100">
+                        <a:rPr sz="1100" dirty="0">
                           <a:solidFill>
                             <a:srgbClr val="1A1A1A"/>
                           </a:solidFill>
@@ -5968,7 +5968,7 @@
                 </a:solidFill>
               </a:rPr>
               <a:t>Key: Use the right architecture for the task.
-Encoders excel at structured extraction (NER). Decoders excel at open-ended reasoning (QA).
+Encoders excel at NER. Decoders excel at reasoning (QA).
 Neither model is universally better - task-architecture alignment is </a:t>
             </a:r>
             <a:r>
@@ -6098,12 +6098,28 @@
           <a:lstStyle/>
           <a:p>
             <a:r>
-              <a:rPr sz="1100">
-                <a:solidFill>
-                  <a:srgbClr val="1A1A1A"/>
-                </a:solidFill>
-              </a:rPr>
-              <a:t>Note: NER comparison is not a clean head-to-head - BERT on full 2,926-sample test split, MedGemma on 10% qualitative subset only.
+              <a:rPr sz="1100" dirty="0">
+                <a:solidFill>
+                  <a:srgbClr val="1A1A1A"/>
+                </a:solidFill>
+              </a:rPr>
+              <a:t>Note: NER comparison is not a clean head-to-head - BERT on full 2,926-sample test split, </a:t>
+            </a:r>
+            <a:r>
+              <a:rPr sz="1100" dirty="0" err="1">
+                <a:solidFill>
+                  <a:srgbClr val="1A1A1A"/>
+                </a:solidFill>
+              </a:rPr>
+              <a:t>MedGemma</a:t>
+            </a:r>
+            <a:r>
+              <a:rPr sz="1100" dirty="0">
+                <a:solidFill>
+                  <a:srgbClr val="1A1A1A"/>
+                </a:solidFill>
+              </a:rPr>
+              <a:t> on 10% qualitative subset only.
 200-sample QA comparative subset: BERT 30.0% accuracy / Gemma 56.5% accuracy.</a:t>
             </a:r>
           </a:p>
@@ -8297,7 +8313,7 @@
         <p:spPr>
           <a:xfrm>
             <a:off x="457200" y="1170432"/>
-            <a:ext cx="5303520" cy="1131079"/>
+            <a:ext cx="5303520" cy="1361911"/>
           </a:xfrm>
           <a:prstGeom prst="rect">
             <a:avLst/>
@@ -8394,11 +8410,37 @@
               </a:rPr>
               <a:t>texts</a:t>
             </a:r>
-            <a:endParaRPr sz="1250" dirty="0">
-              <a:solidFill>
-                <a:srgbClr val="1A1A1A"/>
-              </a:solidFill>
-            </a:endParaRPr>
+          </a:p>
+          <a:p>
+            <a:pPr>
+              <a:spcBef>
+                <a:spcPts val="300"/>
+              </a:spcBef>
+            </a:pPr>
+            <a:r>
+              <a:rPr lang="en-US" sz="1250" dirty="0">
+                <a:solidFill>
+                  <a:srgbClr val="1A1A1A"/>
+                </a:solidFill>
+              </a:rPr>
+              <a:t>• </a:t>
+            </a:r>
+            <a:r>
+              <a:rPr lang="en-US" sz="1250" dirty="0" err="1">
+                <a:solidFill>
+                  <a:srgbClr val="1A1A1A"/>
+                </a:solidFill>
+              </a:rPr>
+              <a:t>MedGemma</a:t>
+            </a:r>
+            <a:r>
+              <a:rPr lang="en-US" sz="1250" dirty="0">
+                <a:solidFill>
+                  <a:srgbClr val="1A1A1A"/>
+                </a:solidFill>
+              </a:rPr>
+              <a:t> NER – needs a full epoch training before metrics mean anything </a:t>
+            </a:r>
           </a:p>
           <a:p>
             <a:pPr>
@@ -9596,13 +9638,50 @@
           <a:p>
             <a:pPr algn="ctr"/>
             <a:r>
-              <a:rPr sz="2000" b="1" dirty="0">
+              <a:rPr lang="en-US" sz="2000" b="1" dirty="0">
                 <a:solidFill>
                   <a:srgbClr val="1A56A8"/>
                 </a:solidFill>
               </a:rPr>
-              <a:t>[ INSERT VIDEO URL HERE ]</a:t>
-            </a:r>
+              <a:t>https://</a:t>
+            </a:r>
+            <a:r>
+              <a:rPr lang="en-US" sz="2000" b="1" dirty="0" err="1">
+                <a:solidFill>
+                  <a:srgbClr val="1A56A8"/>
+                </a:solidFill>
+              </a:rPr>
+              <a:t>drive.google.com</a:t>
+            </a:r>
+            <a:r>
+              <a:rPr lang="en-US" sz="2000" b="1" dirty="0">
+                <a:solidFill>
+                  <a:srgbClr val="1A56A8"/>
+                </a:solidFill>
+              </a:rPr>
+              <a:t>/file/d/1EPFei5UW99ChOIn4ZFcI2R88i08dXfaH/</a:t>
+            </a:r>
+            <a:r>
+              <a:rPr lang="en-US" sz="2000" b="1" dirty="0" err="1">
+                <a:solidFill>
+                  <a:srgbClr val="1A56A8"/>
+                </a:solidFill>
+              </a:rPr>
+              <a:t>view?usp</a:t>
+            </a:r>
+            <a:r>
+              <a:rPr lang="en-US" sz="2000" b="1" dirty="0">
+                <a:solidFill>
+                  <a:srgbClr val="1A56A8"/>
+                </a:solidFill>
+              </a:rPr>
+              <a:t>=sharing</a:t>
+            </a:r>
+            <a:endParaRPr sz="2000" b="1" dirty="0">
+              <a:solidFill>
+                <a:srgbClr val="1A56A8"/>
+              </a:solidFill>
+            </a:endParaRPr>
           </a:p>
         </p:txBody>
       </p:sp>
